--- a/output/wordlabs-ious-suffix-3day.pptx
+++ b/output/wordlabs-ious-suffix-3day.pptx
@@ -6057,7 +6057,7 @@
                 <a:ea typeface="Calibri" pitchFamily="34" charset="-122"/>
                 <a:cs typeface="Calibri" pitchFamily="34" charset="-120"/>
               </a:rPr>
-              <a:t>studious</a:t>
+              <a:t>ambitious</a:t>
             </a:r>
             <a:pPr algn="l" indent="0" marL="0">
               <a:buNone/>
@@ -6071,7 +6071,7 @@
                 <a:ea typeface="Calibri" pitchFamily="34" charset="-122"/>
                 <a:cs typeface="Calibri" pitchFamily="34" charset="-120"/>
               </a:rPr>
-              <a:t> girl was </a:t>
+              <a:t> student was </a:t>
             </a:r>
             <a:pPr algn="l" indent="0" marL="0">
               <a:buNone/>
@@ -6088,7 +6088,7 @@
                 <a:ea typeface="Calibri" pitchFamily="34" charset="-122"/>
                 <a:cs typeface="Calibri" pitchFamily="34" charset="-120"/>
               </a:rPr>
-              <a:t>curious</a:t>
+              <a:t>serious</a:t>
             </a:r>
             <a:pPr algn="l" indent="0" marL="0">
               <a:buNone/>
@@ -6102,7 +6102,7 @@
                 <a:ea typeface="Calibri" pitchFamily="34" charset="-122"/>
                 <a:cs typeface="Calibri" pitchFamily="34" charset="-120"/>
               </a:rPr>
-              <a:t> about every topic in her science book.</a:t>
+              <a:t> about winning the science competition.</a:t>
             </a:r>
             <a:endParaRPr lang="en-US" sz="1800" dirty="0"/>
           </a:p>
@@ -6257,7 +6257,7 @@
                 <a:ea typeface="Trebuchet MS" pitchFamily="34" charset="-122"/>
                 <a:cs typeface="Trebuchet MS" pitchFamily="34" charset="-120"/>
               </a:rPr>
-              <a:t>studious</a:t>
+              <a:t>ambitious</a:t>
             </a:r>
             <a:endParaRPr lang="en-US" sz="1400" dirty="0"/>
           </a:p>
@@ -6385,7 +6385,7 @@
                 <a:ea typeface="Trebuchet MS" pitchFamily="34" charset="-122"/>
                 <a:cs typeface="Trebuchet MS" pitchFamily="34" charset="-120"/>
               </a:rPr>
-              <a:t>curious</a:t>
+              <a:t>serious</a:t>
             </a:r>
             <a:endParaRPr lang="en-US" sz="1400" dirty="0"/>
           </a:p>
@@ -6855,7 +6855,7 @@
                 <a:ea typeface="Trebuchet MS" pitchFamily="34" charset="-122"/>
                 <a:cs typeface="Trebuchet MS" pitchFamily="34" charset="-120"/>
               </a:rPr>
-              <a:t>studious</a:t>
+              <a:t>ambitious</a:t>
             </a:r>
             <a:endParaRPr lang="en-US" sz="2800" dirty="0"/>
           </a:p>
@@ -7682,7 +7682,7 @@
                 <a:ea typeface="Trebuchet MS" pitchFamily="34" charset="-122"/>
                 <a:cs typeface="Trebuchet MS" pitchFamily="34" charset="-120"/>
               </a:rPr>
-              <a:t>studious</a:t>
+              <a:t>ambitious</a:t>
             </a:r>
             <a:endParaRPr lang="en-US" sz="2800" dirty="0"/>
           </a:p>
@@ -7821,7 +7821,7 @@
                 <a:ea typeface="Trebuchet MS" pitchFamily="34" charset="-122"/>
                 <a:cs typeface="Trebuchet MS" pitchFamily="34" charset="-120"/>
               </a:rPr>
-              <a:t>studi</a:t>
+              <a:t>ambit</a:t>
             </a:r>
             <a:endParaRPr lang="en-US" sz="1300" dirty="0"/>
           </a:p>
@@ -7860,7 +7860,7 @@
                 <a:ea typeface="Calibri" pitchFamily="34" charset="-122"/>
                 <a:cs typeface="Calibri" pitchFamily="34" charset="-120"/>
               </a:rPr>
-              <a:t>to study or be eager to learn</a:t>
+              <a:t>to go around, strive</a:t>
             </a:r>
             <a:endParaRPr lang="en-US" sz="850" dirty="0"/>
           </a:p>
@@ -7883,11 +7883,11 @@
             </a:avLst>
           </a:prstGeom>
           <a:solidFill>
-            <a:srgbClr val="FCE7F3"/>
+            <a:srgbClr val="CCFBF1"/>
           </a:solidFill>
           <a:ln w="19050">
             <a:solidFill>
-              <a:srgbClr val="DB2777"/>
+              <a:srgbClr val="0D9488"/>
             </a:solidFill>
             <a:prstDash val="solid"/>
           </a:ln>
@@ -7927,13 +7927,13 @@
             <a:r>
               <a:rPr lang="en-US" sz="1300" b="1" dirty="0">
                 <a:solidFill>
-                  <a:srgbClr val="9D174D"/>
+                  <a:srgbClr val="0F766E"/>
                 </a:solidFill>
                 <a:latin typeface="Trebuchet MS" pitchFamily="34" charset="0"/>
                 <a:ea typeface="Trebuchet MS" pitchFamily="34" charset="-122"/>
                 <a:cs typeface="Trebuchet MS" pitchFamily="34" charset="-120"/>
               </a:rPr>
-              <a:t>ous</a:t>
+              <a:t>ious</a:t>
             </a:r>
             <a:endParaRPr lang="en-US" sz="1300" dirty="0"/>
           </a:p>
@@ -7972,7 +7972,7 @@
                 <a:ea typeface="Calibri" pitchFamily="34" charset="-122"/>
                 <a:cs typeface="Calibri" pitchFamily="34" charset="-120"/>
               </a:rPr>
-              <a:t>full of, having the quality of</a:t>
+              <a:t>full of, having quality</a:t>
             </a:r>
             <a:endParaRPr lang="en-US" sz="850" dirty="0"/>
           </a:p>
@@ -7980,57 +7980,150 @@
       </p:sp>
       <p:sp>
         <p:nvSpPr>
-          <p:cNvPr id="22" name="Text 20"/>
-          <p:cNvSpPr/>
-          <p:nvPr/>
-        </p:nvSpPr>
-        <p:spPr>
-          <a:xfrm>
-            <a:off x="5803392" y="2752344"/>
-            <a:ext cx="1828800" cy="182880"/>
-          </a:xfrm>
-          <a:prstGeom prst="rect">
-            <a:avLst/>
-          </a:prstGeom>
-          <a:noFill/>
-          <a:ln/>
-        </p:spPr>
-        <p:txBody>
-          <a:bodyPr wrap="square" lIns="0" tIns="0" rIns="0" bIns="0" rtlCol="0" anchor="t"/>
-          <a:lstStyle/>
-          <a:p>
-            <a:pPr algn="ctr" indent="0" marL="0">
-              <a:buNone/>
-            </a:pPr>
-            <a:r>
-              <a:rPr lang="en-US" sz="700" i="1" dirty="0">
-                <a:solidFill>
-                  <a:srgbClr val="94A3B8"/>
+          <p:cNvPr id="22" name="Shape 20"/>
+          <p:cNvSpPr/>
+          <p:nvPr/>
+        </p:nvSpPr>
+        <p:spPr>
+          <a:xfrm>
+            <a:off x="365760" y="3273552"/>
+            <a:ext cx="1371600" cy="658368"/>
+          </a:xfrm>
+          <a:prstGeom prst="rect">
+            <a:avLst>
+              <a:gd name="adj" fmla="val 8333"/>
+            </a:avLst>
+          </a:prstGeom>
+          <a:solidFill>
+            <a:srgbClr val="E2E8F0"/>
+          </a:solidFill>
+          <a:ln w="12700">
+            <a:solidFill>
+              <a:srgbClr val="E2E8F0"/>
+            </a:solidFill>
+            <a:prstDash val="solid"/>
+          </a:ln>
+        </p:spPr>
+      </p:sp>
+      <p:sp>
+        <p:nvSpPr>
+          <p:cNvPr id="23" name="Text 21"/>
+          <p:cNvSpPr/>
+          <p:nvPr/>
+        </p:nvSpPr>
+        <p:spPr>
+          <a:xfrm>
+            <a:off x="365760" y="3273552"/>
+            <a:ext cx="1371600" cy="658368"/>
+          </a:xfrm>
+          <a:prstGeom prst="rect">
+            <a:avLst/>
+          </a:prstGeom>
+          <a:noFill/>
+          <a:ln/>
+        </p:spPr>
+        <p:txBody>
+          <a:bodyPr wrap="square" lIns="0" tIns="0" rIns="0" bIns="0" rtlCol="0" anchor="ctr"/>
+          <a:lstStyle/>
+          <a:p>
+            <a:pPr algn="ctr" indent="0" marL="0">
+              <a:buNone/>
+            </a:pPr>
+            <a:r>
+              <a:rPr lang="en-US" sz="1100" b="1" dirty="0">
+                <a:solidFill>
+                  <a:srgbClr val="475569"/>
+                </a:solidFill>
+                <a:latin typeface="Trebuchet MS" pitchFamily="34" charset="0"/>
+                <a:ea typeface="Trebuchet MS" pitchFamily="34" charset="-122"/>
+                <a:cs typeface="Trebuchet MS" pitchFamily="34" charset="-120"/>
+              </a:rPr>
+              <a:t>Syllables</a:t>
+            </a:r>
+            <a:endParaRPr lang="en-US" sz="1100" dirty="0"/>
+          </a:p>
+        </p:txBody>
+      </p:sp>
+      <p:sp>
+        <p:nvSpPr>
+          <p:cNvPr id="24" name="Shape 22"/>
+          <p:cNvSpPr/>
+          <p:nvPr/>
+        </p:nvSpPr>
+        <p:spPr>
+          <a:xfrm>
+            <a:off x="1874520" y="3273552"/>
+            <a:ext cx="6903720" cy="658368"/>
+          </a:xfrm>
+          <a:prstGeom prst="rect">
+            <a:avLst>
+              <a:gd name="adj" fmla="val 8333"/>
+            </a:avLst>
+          </a:prstGeom>
+          <a:solidFill>
+            <a:srgbClr val="F8FAFC"/>
+          </a:solidFill>
+          <a:ln w="12700">
+            <a:solidFill>
+              <a:srgbClr val="E2E8F0"/>
+            </a:solidFill>
+            <a:prstDash val="dash"/>
+          </a:ln>
+        </p:spPr>
+      </p:sp>
+      <p:sp>
+        <p:nvSpPr>
+          <p:cNvPr id="25" name="Text 23"/>
+          <p:cNvSpPr/>
+          <p:nvPr/>
+        </p:nvSpPr>
+        <p:spPr>
+          <a:xfrm>
+            <a:off x="1874520" y="3273552"/>
+            <a:ext cx="6903720" cy="658368"/>
+          </a:xfrm>
+          <a:prstGeom prst="rect">
+            <a:avLst/>
+          </a:prstGeom>
+          <a:noFill/>
+          <a:ln/>
+        </p:spPr>
+        <p:txBody>
+          <a:bodyPr wrap="square" rtlCol="0" anchor="ctr"/>
+          <a:lstStyle/>
+          <a:p>
+            <a:pPr algn="ctr" indent="0" marL="0">
+              <a:buNone/>
+            </a:pPr>
+            <a:r>
+              <a:rPr lang="en-US" sz="1100" i="1" dirty="0">
+                <a:solidFill>
+                  <a:srgbClr val="CBD5E1"/>
                 </a:solidFill>
                 <a:latin typeface="Calibri" pitchFamily="34" charset="0"/>
                 <a:ea typeface="Calibri" pitchFamily="34" charset="-122"/>
                 <a:cs typeface="Calibri" pitchFamily="34" charset="-120"/>
               </a:rPr>
-              <a:t>'-ious' spelling simplified to '-ous' after 'i' already present in base</a:t>
-            </a:r>
-            <a:endParaRPr lang="en-US" sz="700" dirty="0"/>
-          </a:p>
-        </p:txBody>
-      </p:sp>
-      <p:sp>
-        <p:nvSpPr>
-          <p:cNvPr id="23" name="Shape 21"/>
-          <p:cNvSpPr/>
-          <p:nvPr/>
-        </p:nvSpPr>
-        <p:spPr>
-          <a:xfrm>
-            <a:off x="365760" y="3273552"/>
-            <a:ext cx="1371600" cy="658368"/>
+              <a:t>Write here...</a:t>
+            </a:r>
+            <a:endParaRPr lang="en-US" sz="1100" dirty="0"/>
+          </a:p>
+        </p:txBody>
+      </p:sp>
+      <p:sp>
+        <p:nvSpPr>
+          <p:cNvPr id="26" name="Shape 24"/>
+          <p:cNvSpPr/>
+          <p:nvPr/>
+        </p:nvSpPr>
+        <p:spPr>
+          <a:xfrm>
+            <a:off x="365760" y="4096512"/>
+            <a:ext cx="1371600" cy="804672"/>
           </a:xfrm>
           <a:prstGeom prst="rect">
             <a:avLst>
-              <a:gd name="adj" fmla="val 8333"/>
+              <a:gd name="adj" fmla="val 6818"/>
             </a:avLst>
           </a:prstGeom>
           <a:solidFill>
@@ -8046,14 +8139,14 @@
       </p:sp>
       <p:sp>
         <p:nvSpPr>
-          <p:cNvPr id="24" name="Text 22"/>
-          <p:cNvSpPr/>
-          <p:nvPr/>
-        </p:nvSpPr>
-        <p:spPr>
-          <a:xfrm>
-            <a:off x="365760" y="3273552"/>
-            <a:ext cx="1371600" cy="658368"/>
+          <p:cNvPr id="27" name="Text 25"/>
+          <p:cNvSpPr/>
+          <p:nvPr/>
+        </p:nvSpPr>
+        <p:spPr>
+          <a:xfrm>
+            <a:off x="365760" y="4096512"/>
+            <a:ext cx="1371600" cy="804672"/>
           </a:xfrm>
           <a:prstGeom prst="rect">
             <a:avLst/>
@@ -8077,7 +8170,7 @@
                 <a:ea typeface="Trebuchet MS" pitchFamily="34" charset="-122"/>
                 <a:cs typeface="Trebuchet MS" pitchFamily="34" charset="-120"/>
               </a:rPr>
-              <a:t>Syllables</a:t>
+              <a:t>Phonemes</a:t>
             </a:r>
             <a:endParaRPr lang="en-US" sz="1100" dirty="0"/>
           </a:p>
@@ -8085,80 +8178,14 @@
       </p:sp>
       <p:sp>
         <p:nvSpPr>
-          <p:cNvPr id="25" name="Shape 23"/>
-          <p:cNvSpPr/>
-          <p:nvPr/>
-        </p:nvSpPr>
-        <p:spPr>
-          <a:xfrm>
-            <a:off x="1874520" y="3273552"/>
-            <a:ext cx="6903720" cy="658368"/>
-          </a:xfrm>
-          <a:prstGeom prst="rect">
-            <a:avLst>
-              <a:gd name="adj" fmla="val 8333"/>
-            </a:avLst>
-          </a:prstGeom>
-          <a:solidFill>
-            <a:srgbClr val="F8FAFC"/>
-          </a:solidFill>
-          <a:ln w="12700">
-            <a:solidFill>
-              <a:srgbClr val="E2E8F0"/>
-            </a:solidFill>
-            <a:prstDash val="dash"/>
-          </a:ln>
-        </p:spPr>
-      </p:sp>
-      <p:sp>
-        <p:nvSpPr>
-          <p:cNvPr id="26" name="Text 24"/>
-          <p:cNvSpPr/>
-          <p:nvPr/>
-        </p:nvSpPr>
-        <p:spPr>
-          <a:xfrm>
-            <a:off x="1874520" y="3273552"/>
-            <a:ext cx="6903720" cy="658368"/>
-          </a:xfrm>
-          <a:prstGeom prst="rect">
-            <a:avLst/>
-          </a:prstGeom>
-          <a:noFill/>
-          <a:ln/>
-        </p:spPr>
-        <p:txBody>
-          <a:bodyPr wrap="square" rtlCol="0" anchor="ctr"/>
-          <a:lstStyle/>
-          <a:p>
-            <a:pPr algn="ctr" indent="0" marL="0">
-              <a:buNone/>
-            </a:pPr>
-            <a:r>
-              <a:rPr lang="en-US" sz="1100" i="1" dirty="0">
-                <a:solidFill>
-                  <a:srgbClr val="CBD5E1"/>
-                </a:solidFill>
-                <a:latin typeface="Calibri" pitchFamily="34" charset="0"/>
-                <a:ea typeface="Calibri" pitchFamily="34" charset="-122"/>
-                <a:cs typeface="Calibri" pitchFamily="34" charset="-120"/>
-              </a:rPr>
-              <a:t>Write here...</a:t>
-            </a:r>
-            <a:endParaRPr lang="en-US" sz="1100" dirty="0"/>
-          </a:p>
-        </p:txBody>
-      </p:sp>
-      <p:sp>
-        <p:nvSpPr>
-          <p:cNvPr id="27" name="Shape 25"/>
-          <p:cNvSpPr/>
-          <p:nvPr/>
-        </p:nvSpPr>
-        <p:spPr>
-          <a:xfrm>
-            <a:off x="365760" y="4096512"/>
-            <a:ext cx="1371600" cy="804672"/>
+          <p:cNvPr id="28" name="Shape 26"/>
+          <p:cNvSpPr/>
+          <p:nvPr/>
+        </p:nvSpPr>
+        <p:spPr>
+          <a:xfrm>
+            <a:off x="1874520" y="4096512"/>
+            <a:ext cx="6903720" cy="804672"/>
           </a:xfrm>
           <a:prstGeom prst="rect">
             <a:avLst>
@@ -8166,85 +8193,19 @@
             </a:avLst>
           </a:prstGeom>
           <a:solidFill>
-            <a:srgbClr val="E2E8F0"/>
+            <a:srgbClr val="F8FAFC"/>
           </a:solidFill>
           <a:ln w="12700">
             <a:solidFill>
               <a:srgbClr val="E2E8F0"/>
             </a:solidFill>
-            <a:prstDash val="solid"/>
-          </a:ln>
-        </p:spPr>
-      </p:sp>
-      <p:sp>
-        <p:nvSpPr>
-          <p:cNvPr id="28" name="Text 26"/>
-          <p:cNvSpPr/>
-          <p:nvPr/>
-        </p:nvSpPr>
-        <p:spPr>
-          <a:xfrm>
-            <a:off x="365760" y="4096512"/>
-            <a:ext cx="1371600" cy="804672"/>
-          </a:xfrm>
-          <a:prstGeom prst="rect">
-            <a:avLst/>
-          </a:prstGeom>
-          <a:noFill/>
-          <a:ln/>
-        </p:spPr>
-        <p:txBody>
-          <a:bodyPr wrap="square" lIns="0" tIns="0" rIns="0" bIns="0" rtlCol="0" anchor="ctr"/>
-          <a:lstStyle/>
-          <a:p>
-            <a:pPr algn="ctr" indent="0" marL="0">
-              <a:buNone/>
-            </a:pPr>
-            <a:r>
-              <a:rPr lang="en-US" sz="1100" b="1" dirty="0">
-                <a:solidFill>
-                  <a:srgbClr val="475569"/>
-                </a:solidFill>
-                <a:latin typeface="Trebuchet MS" pitchFamily="34" charset="0"/>
-                <a:ea typeface="Trebuchet MS" pitchFamily="34" charset="-122"/>
-                <a:cs typeface="Trebuchet MS" pitchFamily="34" charset="-120"/>
-              </a:rPr>
-              <a:t>Phonemes</a:t>
-            </a:r>
-            <a:endParaRPr lang="en-US" sz="1100" dirty="0"/>
-          </a:p>
-        </p:txBody>
-      </p:sp>
-      <p:sp>
-        <p:nvSpPr>
-          <p:cNvPr id="29" name="Shape 27"/>
-          <p:cNvSpPr/>
-          <p:nvPr/>
-        </p:nvSpPr>
-        <p:spPr>
-          <a:xfrm>
-            <a:off x="1874520" y="4096512"/>
-            <a:ext cx="6903720" cy="804672"/>
-          </a:xfrm>
-          <a:prstGeom prst="rect">
-            <a:avLst>
-              <a:gd name="adj" fmla="val 6818"/>
-            </a:avLst>
-          </a:prstGeom>
-          <a:solidFill>
-            <a:srgbClr val="F8FAFC"/>
-          </a:solidFill>
-          <a:ln w="12700">
-            <a:solidFill>
-              <a:srgbClr val="E2E8F0"/>
-            </a:solidFill>
             <a:prstDash val="dash"/>
           </a:ln>
         </p:spPr>
       </p:sp>
       <p:sp>
         <p:nvSpPr>
-          <p:cNvPr id="30" name="Text 28"/>
+          <p:cNvPr id="29" name="Text 27"/>
           <p:cNvSpPr/>
           <p:nvPr/>
         </p:nvSpPr>
@@ -8706,7 +8667,7 @@
                 <a:ea typeface="Trebuchet MS" pitchFamily="34" charset="-122"/>
                 <a:cs typeface="Trebuchet MS" pitchFamily="34" charset="-120"/>
               </a:rPr>
-              <a:t>studious</a:t>
+              <a:t>ambitious</a:t>
             </a:r>
             <a:endParaRPr lang="en-US" sz="2800" dirty="0"/>
           </a:p>
@@ -8845,7 +8806,7 @@
                 <a:ea typeface="Trebuchet MS" pitchFamily="34" charset="-122"/>
                 <a:cs typeface="Trebuchet MS" pitchFamily="34" charset="-120"/>
               </a:rPr>
-              <a:t>studi</a:t>
+              <a:t>ambit</a:t>
             </a:r>
             <a:endParaRPr lang="en-US" sz="1300" dirty="0"/>
           </a:p>
@@ -8884,7 +8845,7 @@
                 <a:ea typeface="Calibri" pitchFamily="34" charset="-122"/>
                 <a:cs typeface="Calibri" pitchFamily="34" charset="-120"/>
               </a:rPr>
-              <a:t>to study or be eager to learn</a:t>
+              <a:t>to go around, strive</a:t>
             </a:r>
             <a:endParaRPr lang="en-US" sz="850" dirty="0"/>
           </a:p>
@@ -8907,11 +8868,11 @@
             </a:avLst>
           </a:prstGeom>
           <a:solidFill>
-            <a:srgbClr val="FCE7F3"/>
+            <a:srgbClr val="CCFBF1"/>
           </a:solidFill>
           <a:ln w="19050">
             <a:solidFill>
-              <a:srgbClr val="DB2777"/>
+              <a:srgbClr val="0D9488"/>
             </a:solidFill>
             <a:prstDash val="solid"/>
           </a:ln>
@@ -8951,13 +8912,13 @@
             <a:r>
               <a:rPr lang="en-US" sz="1300" b="1" dirty="0">
                 <a:solidFill>
-                  <a:srgbClr val="9D174D"/>
+                  <a:srgbClr val="0F766E"/>
                 </a:solidFill>
                 <a:latin typeface="Trebuchet MS" pitchFamily="34" charset="0"/>
                 <a:ea typeface="Trebuchet MS" pitchFamily="34" charset="-122"/>
                 <a:cs typeface="Trebuchet MS" pitchFamily="34" charset="-120"/>
               </a:rPr>
-              <a:t>ous</a:t>
+              <a:t>ious</a:t>
             </a:r>
             <a:endParaRPr lang="en-US" sz="1300" dirty="0"/>
           </a:p>
@@ -8996,7 +8957,7 @@
                 <a:ea typeface="Calibri" pitchFamily="34" charset="-122"/>
                 <a:cs typeface="Calibri" pitchFamily="34" charset="-120"/>
               </a:rPr>
-              <a:t>full of, having the quality of</a:t>
+              <a:t>full of, having quality</a:t>
             </a:r>
             <a:endParaRPr lang="en-US" sz="850" dirty="0"/>
           </a:p>
@@ -9004,46 +8965,7 @@
       </p:sp>
       <p:sp>
         <p:nvSpPr>
-          <p:cNvPr id="22" name="Text 20"/>
-          <p:cNvSpPr/>
-          <p:nvPr/>
-        </p:nvSpPr>
-        <p:spPr>
-          <a:xfrm>
-            <a:off x="5803392" y="2752344"/>
-            <a:ext cx="1828800" cy="182880"/>
-          </a:xfrm>
-          <a:prstGeom prst="rect">
-            <a:avLst/>
-          </a:prstGeom>
-          <a:noFill/>
-          <a:ln/>
-        </p:spPr>
-        <p:txBody>
-          <a:bodyPr wrap="square" lIns="0" tIns="0" rIns="0" bIns="0" rtlCol="0" anchor="t"/>
-          <a:lstStyle/>
-          <a:p>
-            <a:pPr algn="ctr" indent="0" marL="0">
-              <a:buNone/>
-            </a:pPr>
-            <a:r>
-              <a:rPr lang="en-US" sz="700" i="1" dirty="0">
-                <a:solidFill>
-                  <a:srgbClr val="94A3B8"/>
-                </a:solidFill>
-                <a:latin typeface="Calibri" pitchFamily="34" charset="0"/>
-                <a:ea typeface="Calibri" pitchFamily="34" charset="-122"/>
-                <a:cs typeface="Calibri" pitchFamily="34" charset="-120"/>
-              </a:rPr>
-              <a:t>'-ious' spelling simplified to '-ous' after 'i' already present in base</a:t>
-            </a:r>
-            <a:endParaRPr lang="en-US" sz="700" dirty="0"/>
-          </a:p>
-        </p:txBody>
-      </p:sp>
-      <p:sp>
-        <p:nvSpPr>
-          <p:cNvPr id="23" name="Shape 21"/>
+          <p:cNvPr id="22" name="Shape 20"/>
           <p:cNvSpPr/>
           <p:nvPr/>
         </p:nvSpPr>
@@ -9070,7 +8992,7 @@
       </p:sp>
       <p:sp>
         <p:nvSpPr>
-          <p:cNvPr id="24" name="Text 22"/>
+          <p:cNvPr id="23" name="Text 21"/>
           <p:cNvSpPr/>
           <p:nvPr/>
         </p:nvSpPr>
@@ -9109,7 +9031,7 @@
       </p:sp>
       <p:sp>
         <p:nvSpPr>
-          <p:cNvPr id="25" name="Shape 23"/>
+          <p:cNvPr id="24" name="Shape 22"/>
           <p:cNvSpPr/>
           <p:nvPr/>
         </p:nvSpPr>
@@ -9136,7 +9058,7 @@
       </p:sp>
       <p:sp>
         <p:nvSpPr>
-          <p:cNvPr id="26" name="Shape 24"/>
+          <p:cNvPr id="25" name="Shape 23"/>
           <p:cNvSpPr/>
           <p:nvPr/>
         </p:nvSpPr>
@@ -9163,7 +9085,7 @@
       </p:sp>
       <p:sp>
         <p:nvSpPr>
-          <p:cNvPr id="27" name="Text 25"/>
+          <p:cNvPr id="26" name="Text 24"/>
           <p:cNvSpPr/>
           <p:nvPr/>
         </p:nvSpPr>
@@ -9194,7 +9116,7 @@
                 <a:ea typeface="Trebuchet MS" pitchFamily="34" charset="-122"/>
                 <a:cs typeface="Trebuchet MS" pitchFamily="34" charset="-120"/>
               </a:rPr>
-              <a:t>stu</a:t>
+              <a:t>am</a:t>
             </a:r>
             <a:endParaRPr lang="en-US" sz="1400" dirty="0"/>
           </a:p>
@@ -9202,7 +9124,7 @@
       </p:sp>
       <p:sp>
         <p:nvSpPr>
-          <p:cNvPr id="28" name="Text 26"/>
+          <p:cNvPr id="27" name="Text 25"/>
           <p:cNvSpPr/>
           <p:nvPr/>
         </p:nvSpPr>
@@ -9241,7 +9163,7 @@
       </p:sp>
       <p:sp>
         <p:nvSpPr>
-          <p:cNvPr id="29" name="Shape 27"/>
+          <p:cNvPr id="28" name="Shape 26"/>
           <p:cNvSpPr/>
           <p:nvPr/>
         </p:nvSpPr>
@@ -9268,7 +9190,7 @@
       </p:sp>
       <p:sp>
         <p:nvSpPr>
-          <p:cNvPr id="30" name="Text 28"/>
+          <p:cNvPr id="29" name="Text 27"/>
           <p:cNvSpPr/>
           <p:nvPr/>
         </p:nvSpPr>
@@ -9299,7 +9221,7 @@
                 <a:ea typeface="Trebuchet MS" pitchFamily="34" charset="-122"/>
                 <a:cs typeface="Trebuchet MS" pitchFamily="34" charset="-120"/>
               </a:rPr>
-              <a:t>di</a:t>
+              <a:t>bit</a:t>
             </a:r>
             <a:endParaRPr lang="en-US" sz="1400" dirty="0"/>
           </a:p>
@@ -9307,7 +9229,7 @@
       </p:sp>
       <p:sp>
         <p:nvSpPr>
-          <p:cNvPr id="31" name="Text 29"/>
+          <p:cNvPr id="30" name="Text 28"/>
           <p:cNvSpPr/>
           <p:nvPr/>
         </p:nvSpPr>
@@ -9346,7 +9268,7 @@
       </p:sp>
       <p:sp>
         <p:nvSpPr>
-          <p:cNvPr id="32" name="Shape 30"/>
+          <p:cNvPr id="31" name="Shape 29"/>
           <p:cNvSpPr/>
           <p:nvPr/>
         </p:nvSpPr>
@@ -9373,7 +9295,7 @@
       </p:sp>
       <p:sp>
         <p:nvSpPr>
-          <p:cNvPr id="33" name="Text 31"/>
+          <p:cNvPr id="32" name="Text 30"/>
           <p:cNvSpPr/>
           <p:nvPr/>
         </p:nvSpPr>
@@ -9404,7 +9326,7 @@
                 <a:ea typeface="Trebuchet MS" pitchFamily="34" charset="-122"/>
                 <a:cs typeface="Trebuchet MS" pitchFamily="34" charset="-120"/>
               </a:rPr>
-              <a:t>ous</a:t>
+              <a:t>ious</a:t>
             </a:r>
             <a:endParaRPr lang="en-US" sz="1400" dirty="0"/>
           </a:p>
@@ -9412,7 +9334,7 @@
       </p:sp>
       <p:sp>
         <p:nvSpPr>
-          <p:cNvPr id="34" name="Shape 32"/>
+          <p:cNvPr id="33" name="Shape 31"/>
           <p:cNvSpPr/>
           <p:nvPr/>
         </p:nvSpPr>
@@ -9439,7 +9361,7 @@
       </p:sp>
       <p:sp>
         <p:nvSpPr>
-          <p:cNvPr id="35" name="Text 33"/>
+          <p:cNvPr id="34" name="Text 32"/>
           <p:cNvSpPr/>
           <p:nvPr/>
         </p:nvSpPr>
@@ -9478,7 +9400,7 @@
       </p:sp>
       <p:sp>
         <p:nvSpPr>
-          <p:cNvPr id="36" name="Shape 34"/>
+          <p:cNvPr id="35" name="Shape 33"/>
           <p:cNvSpPr/>
           <p:nvPr/>
         </p:nvSpPr>
@@ -9505,7 +9427,7 @@
       </p:sp>
       <p:sp>
         <p:nvSpPr>
-          <p:cNvPr id="37" name="Text 35"/>
+          <p:cNvPr id="36" name="Text 34"/>
           <p:cNvSpPr/>
           <p:nvPr/>
         </p:nvSpPr>
@@ -9967,7 +9889,7 @@
                 <a:ea typeface="Trebuchet MS" pitchFamily="34" charset="-122"/>
                 <a:cs typeface="Trebuchet MS" pitchFamily="34" charset="-120"/>
               </a:rPr>
-              <a:t>studious</a:t>
+              <a:t>ambitious</a:t>
             </a:r>
             <a:endParaRPr lang="en-US" sz="2800" dirty="0"/>
           </a:p>
@@ -10106,7 +10028,7 @@
                 <a:ea typeface="Trebuchet MS" pitchFamily="34" charset="-122"/>
                 <a:cs typeface="Trebuchet MS" pitchFamily="34" charset="-120"/>
               </a:rPr>
-              <a:t>studi</a:t>
+              <a:t>ambit</a:t>
             </a:r>
             <a:endParaRPr lang="en-US" sz="1300" dirty="0"/>
           </a:p>
@@ -10145,7 +10067,7 @@
                 <a:ea typeface="Calibri" pitchFamily="34" charset="-122"/>
                 <a:cs typeface="Calibri" pitchFamily="34" charset="-120"/>
               </a:rPr>
-              <a:t>to study or be eager to learn</a:t>
+              <a:t>to go around, strive</a:t>
             </a:r>
             <a:endParaRPr lang="en-US" sz="850" dirty="0"/>
           </a:p>
@@ -10168,11 +10090,11 @@
             </a:avLst>
           </a:prstGeom>
           <a:solidFill>
-            <a:srgbClr val="FCE7F3"/>
+            <a:srgbClr val="CCFBF1"/>
           </a:solidFill>
           <a:ln w="19050">
             <a:solidFill>
-              <a:srgbClr val="DB2777"/>
+              <a:srgbClr val="0D9488"/>
             </a:solidFill>
             <a:prstDash val="solid"/>
           </a:ln>
@@ -10212,13 +10134,13 @@
             <a:r>
               <a:rPr lang="en-US" sz="1300" b="1" dirty="0">
                 <a:solidFill>
-                  <a:srgbClr val="9D174D"/>
+                  <a:srgbClr val="0F766E"/>
                 </a:solidFill>
                 <a:latin typeface="Trebuchet MS" pitchFamily="34" charset="0"/>
                 <a:ea typeface="Trebuchet MS" pitchFamily="34" charset="-122"/>
                 <a:cs typeface="Trebuchet MS" pitchFamily="34" charset="-120"/>
               </a:rPr>
-              <a:t>ous</a:t>
+              <a:t>ious</a:t>
             </a:r>
             <a:endParaRPr lang="en-US" sz="1300" dirty="0"/>
           </a:p>
@@ -10257,7 +10179,7 @@
                 <a:ea typeface="Calibri" pitchFamily="34" charset="-122"/>
                 <a:cs typeface="Calibri" pitchFamily="34" charset="-120"/>
               </a:rPr>
-              <a:t>full of, having the quality of</a:t>
+              <a:t>full of, having quality</a:t>
             </a:r>
             <a:endParaRPr lang="en-US" sz="850" dirty="0"/>
           </a:p>
@@ -10265,14 +10187,872 @@
       </p:sp>
       <p:sp>
         <p:nvSpPr>
-          <p:cNvPr id="22" name="Text 20"/>
-          <p:cNvSpPr/>
-          <p:nvPr/>
-        </p:nvSpPr>
-        <p:spPr>
-          <a:xfrm>
-            <a:off x="5803392" y="2752344"/>
-            <a:ext cx="1828800" cy="182880"/>
+          <p:cNvPr id="22" name="Shape 20"/>
+          <p:cNvSpPr/>
+          <p:nvPr/>
+        </p:nvSpPr>
+        <p:spPr>
+          <a:xfrm>
+            <a:off x="365760" y="3273552"/>
+            <a:ext cx="1371600" cy="658368"/>
+          </a:xfrm>
+          <a:prstGeom prst="rect">
+            <a:avLst>
+              <a:gd name="adj" fmla="val 8333"/>
+            </a:avLst>
+          </a:prstGeom>
+          <a:solidFill>
+            <a:srgbClr val="E2E8F0"/>
+          </a:solidFill>
+          <a:ln w="12700">
+            <a:solidFill>
+              <a:srgbClr val="E2E8F0"/>
+            </a:solidFill>
+            <a:prstDash val="solid"/>
+          </a:ln>
+        </p:spPr>
+      </p:sp>
+      <p:sp>
+        <p:nvSpPr>
+          <p:cNvPr id="23" name="Text 21"/>
+          <p:cNvSpPr/>
+          <p:nvPr/>
+        </p:nvSpPr>
+        <p:spPr>
+          <a:xfrm>
+            <a:off x="365760" y="3273552"/>
+            <a:ext cx="1371600" cy="658368"/>
+          </a:xfrm>
+          <a:prstGeom prst="rect">
+            <a:avLst/>
+          </a:prstGeom>
+          <a:noFill/>
+          <a:ln/>
+        </p:spPr>
+        <p:txBody>
+          <a:bodyPr wrap="square" lIns="0" tIns="0" rIns="0" bIns="0" rtlCol="0" anchor="ctr"/>
+          <a:lstStyle/>
+          <a:p>
+            <a:pPr algn="ctr" indent="0" marL="0">
+              <a:buNone/>
+            </a:pPr>
+            <a:r>
+              <a:rPr lang="en-US" sz="1100" b="1" dirty="0">
+                <a:solidFill>
+                  <a:srgbClr val="475569"/>
+                </a:solidFill>
+                <a:latin typeface="Trebuchet MS" pitchFamily="34" charset="0"/>
+                <a:ea typeface="Trebuchet MS" pitchFamily="34" charset="-122"/>
+                <a:cs typeface="Trebuchet MS" pitchFamily="34" charset="-120"/>
+              </a:rPr>
+              <a:t>Syllables</a:t>
+            </a:r>
+            <a:endParaRPr lang="en-US" sz="1100" dirty="0"/>
+          </a:p>
+        </p:txBody>
+      </p:sp>
+      <p:sp>
+        <p:nvSpPr>
+          <p:cNvPr id="24" name="Shape 22"/>
+          <p:cNvSpPr/>
+          <p:nvPr/>
+        </p:nvSpPr>
+        <p:spPr>
+          <a:xfrm>
+            <a:off x="1874520" y="3273552"/>
+            <a:ext cx="6903720" cy="658368"/>
+          </a:xfrm>
+          <a:prstGeom prst="rect">
+            <a:avLst>
+              <a:gd name="adj" fmla="val 8333"/>
+            </a:avLst>
+          </a:prstGeom>
+          <a:solidFill>
+            <a:srgbClr val="CCFBF1"/>
+          </a:solidFill>
+          <a:ln w="12700">
+            <a:solidFill>
+              <a:srgbClr val="0D9488"/>
+            </a:solidFill>
+            <a:prstDash val="solid"/>
+          </a:ln>
+        </p:spPr>
+      </p:sp>
+      <p:sp>
+        <p:nvSpPr>
+          <p:cNvPr id="25" name="Shape 23"/>
+          <p:cNvSpPr/>
+          <p:nvPr/>
+        </p:nvSpPr>
+        <p:spPr>
+          <a:xfrm>
+            <a:off x="2313432" y="3364992"/>
+            <a:ext cx="1645920" cy="475488"/>
+          </a:xfrm>
+          <a:prstGeom prst="rect">
+            <a:avLst>
+              <a:gd name="adj" fmla="val 9615"/>
+            </a:avLst>
+          </a:prstGeom>
+          <a:solidFill>
+            <a:srgbClr val="FFFFFF"/>
+          </a:solidFill>
+          <a:ln w="12700">
+            <a:solidFill>
+              <a:srgbClr val="0D9488"/>
+            </a:solidFill>
+            <a:prstDash val="solid"/>
+          </a:ln>
+        </p:spPr>
+      </p:sp>
+      <p:sp>
+        <p:nvSpPr>
+          <p:cNvPr id="26" name="Text 24"/>
+          <p:cNvSpPr/>
+          <p:nvPr/>
+        </p:nvSpPr>
+        <p:spPr>
+          <a:xfrm>
+            <a:off x="2313432" y="3364992"/>
+            <a:ext cx="1645920" cy="475488"/>
+          </a:xfrm>
+          <a:prstGeom prst="rect">
+            <a:avLst/>
+          </a:prstGeom>
+          <a:noFill/>
+          <a:ln/>
+        </p:spPr>
+        <p:txBody>
+          <a:bodyPr wrap="square" lIns="0" tIns="0" rIns="0" bIns="0" rtlCol="0" anchor="ctr"/>
+          <a:lstStyle/>
+          <a:p>
+            <a:pPr algn="ctr" indent="0" marL="0">
+              <a:buNone/>
+            </a:pPr>
+            <a:r>
+              <a:rPr lang="en-US" sz="1400" b="1" dirty="0">
+                <a:solidFill>
+                  <a:srgbClr val="0D9488"/>
+                </a:solidFill>
+                <a:latin typeface="Trebuchet MS" pitchFamily="34" charset="0"/>
+                <a:ea typeface="Trebuchet MS" pitchFamily="34" charset="-122"/>
+                <a:cs typeface="Trebuchet MS" pitchFamily="34" charset="-120"/>
+              </a:rPr>
+              <a:t>am</a:t>
+            </a:r>
+            <a:endParaRPr lang="en-US" sz="1400" dirty="0"/>
+          </a:p>
+        </p:txBody>
+      </p:sp>
+      <p:sp>
+        <p:nvSpPr>
+          <p:cNvPr id="27" name="Text 25"/>
+          <p:cNvSpPr/>
+          <p:nvPr/>
+        </p:nvSpPr>
+        <p:spPr>
+          <a:xfrm>
+            <a:off x="3959352" y="3364992"/>
+            <a:ext cx="411480" cy="475488"/>
+          </a:xfrm>
+          <a:prstGeom prst="rect">
+            <a:avLst/>
+          </a:prstGeom>
+          <a:noFill/>
+          <a:ln/>
+        </p:spPr>
+        <p:txBody>
+          <a:bodyPr wrap="square" lIns="0" tIns="0" rIns="0" bIns="0" rtlCol="0" anchor="ctr"/>
+          <a:lstStyle/>
+          <a:p>
+            <a:pPr algn="ctr" indent="0" marL="0">
+              <a:buNone/>
+            </a:pPr>
+            <a:r>
+              <a:rPr lang="en-US" sz="1600" b="1" dirty="0">
+                <a:solidFill>
+                  <a:srgbClr val="0D9488"/>
+                </a:solidFill>
+                <a:latin typeface="Trebuchet MS" pitchFamily="34" charset="0"/>
+                <a:ea typeface="Trebuchet MS" pitchFamily="34" charset="-122"/>
+                <a:cs typeface="Trebuchet MS" pitchFamily="34" charset="-120"/>
+              </a:rPr>
+              <a:t>·</a:t>
+            </a:r>
+            <a:endParaRPr lang="en-US" sz="1600" dirty="0"/>
+          </a:p>
+        </p:txBody>
+      </p:sp>
+      <p:sp>
+        <p:nvSpPr>
+          <p:cNvPr id="28" name="Shape 26"/>
+          <p:cNvSpPr/>
+          <p:nvPr/>
+        </p:nvSpPr>
+        <p:spPr>
+          <a:xfrm>
+            <a:off x="4370832" y="3364992"/>
+            <a:ext cx="1645920" cy="475488"/>
+          </a:xfrm>
+          <a:prstGeom prst="rect">
+            <a:avLst>
+              <a:gd name="adj" fmla="val 9615"/>
+            </a:avLst>
+          </a:prstGeom>
+          <a:solidFill>
+            <a:srgbClr val="FFFFFF"/>
+          </a:solidFill>
+          <a:ln w="12700">
+            <a:solidFill>
+              <a:srgbClr val="0D9488"/>
+            </a:solidFill>
+            <a:prstDash val="solid"/>
+          </a:ln>
+        </p:spPr>
+      </p:sp>
+      <p:sp>
+        <p:nvSpPr>
+          <p:cNvPr id="29" name="Text 27"/>
+          <p:cNvSpPr/>
+          <p:nvPr/>
+        </p:nvSpPr>
+        <p:spPr>
+          <a:xfrm>
+            <a:off x="4370832" y="3364992"/>
+            <a:ext cx="1645920" cy="475488"/>
+          </a:xfrm>
+          <a:prstGeom prst="rect">
+            <a:avLst/>
+          </a:prstGeom>
+          <a:noFill/>
+          <a:ln/>
+        </p:spPr>
+        <p:txBody>
+          <a:bodyPr wrap="square" lIns="0" tIns="0" rIns="0" bIns="0" rtlCol="0" anchor="ctr"/>
+          <a:lstStyle/>
+          <a:p>
+            <a:pPr algn="ctr" indent="0" marL="0">
+              <a:buNone/>
+            </a:pPr>
+            <a:r>
+              <a:rPr lang="en-US" sz="1400" b="1" dirty="0">
+                <a:solidFill>
+                  <a:srgbClr val="0D9488"/>
+                </a:solidFill>
+                <a:latin typeface="Trebuchet MS" pitchFamily="34" charset="0"/>
+                <a:ea typeface="Trebuchet MS" pitchFamily="34" charset="-122"/>
+                <a:cs typeface="Trebuchet MS" pitchFamily="34" charset="-120"/>
+              </a:rPr>
+              <a:t>bit</a:t>
+            </a:r>
+            <a:endParaRPr lang="en-US" sz="1400" dirty="0"/>
+          </a:p>
+        </p:txBody>
+      </p:sp>
+      <p:sp>
+        <p:nvSpPr>
+          <p:cNvPr id="30" name="Text 28"/>
+          <p:cNvSpPr/>
+          <p:nvPr/>
+        </p:nvSpPr>
+        <p:spPr>
+          <a:xfrm>
+            <a:off x="6016752" y="3364992"/>
+            <a:ext cx="411480" cy="475488"/>
+          </a:xfrm>
+          <a:prstGeom prst="rect">
+            <a:avLst/>
+          </a:prstGeom>
+          <a:noFill/>
+          <a:ln/>
+        </p:spPr>
+        <p:txBody>
+          <a:bodyPr wrap="square" lIns="0" tIns="0" rIns="0" bIns="0" rtlCol="0" anchor="ctr"/>
+          <a:lstStyle/>
+          <a:p>
+            <a:pPr algn="ctr" indent="0" marL="0">
+              <a:buNone/>
+            </a:pPr>
+            <a:r>
+              <a:rPr lang="en-US" sz="1600" b="1" dirty="0">
+                <a:solidFill>
+                  <a:srgbClr val="0D9488"/>
+                </a:solidFill>
+                <a:latin typeface="Trebuchet MS" pitchFamily="34" charset="0"/>
+                <a:ea typeface="Trebuchet MS" pitchFamily="34" charset="-122"/>
+                <a:cs typeface="Trebuchet MS" pitchFamily="34" charset="-120"/>
+              </a:rPr>
+              <a:t>·</a:t>
+            </a:r>
+            <a:endParaRPr lang="en-US" sz="1600" dirty="0"/>
+          </a:p>
+        </p:txBody>
+      </p:sp>
+      <p:sp>
+        <p:nvSpPr>
+          <p:cNvPr id="31" name="Shape 29"/>
+          <p:cNvSpPr/>
+          <p:nvPr/>
+        </p:nvSpPr>
+        <p:spPr>
+          <a:xfrm>
+            <a:off x="6428232" y="3364992"/>
+            <a:ext cx="1645920" cy="475488"/>
+          </a:xfrm>
+          <a:prstGeom prst="rect">
+            <a:avLst>
+              <a:gd name="adj" fmla="val 9615"/>
+            </a:avLst>
+          </a:prstGeom>
+          <a:solidFill>
+            <a:srgbClr val="FFFFFF"/>
+          </a:solidFill>
+          <a:ln w="12700">
+            <a:solidFill>
+              <a:srgbClr val="0D9488"/>
+            </a:solidFill>
+            <a:prstDash val="solid"/>
+          </a:ln>
+        </p:spPr>
+      </p:sp>
+      <p:sp>
+        <p:nvSpPr>
+          <p:cNvPr id="32" name="Text 30"/>
+          <p:cNvSpPr/>
+          <p:nvPr/>
+        </p:nvSpPr>
+        <p:spPr>
+          <a:xfrm>
+            <a:off x="6428232" y="3364992"/>
+            <a:ext cx="1645920" cy="475488"/>
+          </a:xfrm>
+          <a:prstGeom prst="rect">
+            <a:avLst/>
+          </a:prstGeom>
+          <a:noFill/>
+          <a:ln/>
+        </p:spPr>
+        <p:txBody>
+          <a:bodyPr wrap="square" lIns="0" tIns="0" rIns="0" bIns="0" rtlCol="0" anchor="ctr"/>
+          <a:lstStyle/>
+          <a:p>
+            <a:pPr algn="ctr" indent="0" marL="0">
+              <a:buNone/>
+            </a:pPr>
+            <a:r>
+              <a:rPr lang="en-US" sz="1400" b="1" dirty="0">
+                <a:solidFill>
+                  <a:srgbClr val="0D9488"/>
+                </a:solidFill>
+                <a:latin typeface="Trebuchet MS" pitchFamily="34" charset="0"/>
+                <a:ea typeface="Trebuchet MS" pitchFamily="34" charset="-122"/>
+                <a:cs typeface="Trebuchet MS" pitchFamily="34" charset="-120"/>
+              </a:rPr>
+              <a:t>ious</a:t>
+            </a:r>
+            <a:endParaRPr lang="en-US" sz="1400" dirty="0"/>
+          </a:p>
+        </p:txBody>
+      </p:sp>
+      <p:sp>
+        <p:nvSpPr>
+          <p:cNvPr id="33" name="Shape 31"/>
+          <p:cNvSpPr/>
+          <p:nvPr/>
+        </p:nvSpPr>
+        <p:spPr>
+          <a:xfrm>
+            <a:off x="365760" y="4096512"/>
+            <a:ext cx="1371600" cy="804672"/>
+          </a:xfrm>
+          <a:prstGeom prst="rect">
+            <a:avLst>
+              <a:gd name="adj" fmla="val 6818"/>
+            </a:avLst>
+          </a:prstGeom>
+          <a:solidFill>
+            <a:srgbClr val="E2E8F0"/>
+          </a:solidFill>
+          <a:ln w="12700">
+            <a:solidFill>
+              <a:srgbClr val="E2E8F0"/>
+            </a:solidFill>
+            <a:prstDash val="solid"/>
+          </a:ln>
+        </p:spPr>
+      </p:sp>
+      <p:sp>
+        <p:nvSpPr>
+          <p:cNvPr id="34" name="Text 32"/>
+          <p:cNvSpPr/>
+          <p:nvPr/>
+        </p:nvSpPr>
+        <p:spPr>
+          <a:xfrm>
+            <a:off x="365760" y="4096512"/>
+            <a:ext cx="1371600" cy="804672"/>
+          </a:xfrm>
+          <a:prstGeom prst="rect">
+            <a:avLst/>
+          </a:prstGeom>
+          <a:noFill/>
+          <a:ln/>
+        </p:spPr>
+        <p:txBody>
+          <a:bodyPr wrap="square" lIns="0" tIns="0" rIns="0" bIns="0" rtlCol="0" anchor="ctr"/>
+          <a:lstStyle/>
+          <a:p>
+            <a:pPr algn="ctr" indent="0" marL="0">
+              <a:buNone/>
+            </a:pPr>
+            <a:r>
+              <a:rPr lang="en-US" sz="1100" b="1" dirty="0">
+                <a:solidFill>
+                  <a:srgbClr val="475569"/>
+                </a:solidFill>
+                <a:latin typeface="Trebuchet MS" pitchFamily="34" charset="0"/>
+                <a:ea typeface="Trebuchet MS" pitchFamily="34" charset="-122"/>
+                <a:cs typeface="Trebuchet MS" pitchFamily="34" charset="-120"/>
+              </a:rPr>
+              <a:t>Phonemes</a:t>
+            </a:r>
+            <a:endParaRPr lang="en-US" sz="1100" dirty="0"/>
+          </a:p>
+        </p:txBody>
+      </p:sp>
+      <p:sp>
+        <p:nvSpPr>
+          <p:cNvPr id="35" name="Shape 33"/>
+          <p:cNvSpPr/>
+          <p:nvPr/>
+        </p:nvSpPr>
+        <p:spPr>
+          <a:xfrm>
+            <a:off x="1874520" y="4096512"/>
+            <a:ext cx="6903720" cy="804672"/>
+          </a:xfrm>
+          <a:prstGeom prst="rect">
+            <a:avLst>
+              <a:gd name="adj" fmla="val 6818"/>
+            </a:avLst>
+          </a:prstGeom>
+          <a:solidFill>
+            <a:srgbClr val="FCE7F3"/>
+          </a:solidFill>
+          <a:ln w="12700">
+            <a:solidFill>
+              <a:srgbClr val="DB2777"/>
+            </a:solidFill>
+            <a:prstDash val="solid"/>
+          </a:ln>
+        </p:spPr>
+      </p:sp>
+      <p:sp>
+        <p:nvSpPr>
+          <p:cNvPr id="36" name="Shape 34"/>
+          <p:cNvSpPr/>
+          <p:nvPr/>
+        </p:nvSpPr>
+        <p:spPr>
+          <a:xfrm>
+            <a:off x="2023872" y="4169664"/>
+            <a:ext cx="685800" cy="384048"/>
+          </a:xfrm>
+          <a:prstGeom prst="rect">
+            <a:avLst>
+              <a:gd name="adj" fmla="val 9524"/>
+            </a:avLst>
+          </a:prstGeom>
+          <a:solidFill>
+            <a:srgbClr val="FFFFFF"/>
+          </a:solidFill>
+          <a:ln w="12700">
+            <a:solidFill>
+              <a:srgbClr val="DB2777"/>
+            </a:solidFill>
+            <a:prstDash val="solid"/>
+          </a:ln>
+        </p:spPr>
+      </p:sp>
+      <p:sp>
+        <p:nvSpPr>
+          <p:cNvPr id="37" name="Text 35"/>
+          <p:cNvSpPr/>
+          <p:nvPr/>
+        </p:nvSpPr>
+        <p:spPr>
+          <a:xfrm>
+            <a:off x="2023872" y="4169664"/>
+            <a:ext cx="685800" cy="384048"/>
+          </a:xfrm>
+          <a:prstGeom prst="rect">
+            <a:avLst/>
+          </a:prstGeom>
+          <a:noFill/>
+          <a:ln/>
+        </p:spPr>
+        <p:txBody>
+          <a:bodyPr wrap="square" lIns="0" tIns="0" rIns="0" bIns="0" rtlCol="0" anchor="ctr"/>
+          <a:lstStyle/>
+          <a:p>
+            <a:pPr algn="ctr" indent="0" marL="0">
+              <a:buNone/>
+            </a:pPr>
+            <a:r>
+              <a:rPr lang="en-US" sz="900" b="1" dirty="0">
+                <a:solidFill>
+                  <a:srgbClr val="9D174D"/>
+                </a:solidFill>
+                <a:latin typeface="Trebuchet MS" pitchFamily="34" charset="0"/>
+                <a:ea typeface="Trebuchet MS" pitchFamily="34" charset="-122"/>
+                <a:cs typeface="Trebuchet MS" pitchFamily="34" charset="-120"/>
+              </a:rPr>
+              <a:t>a</a:t>
+            </a:r>
+            <a:endParaRPr lang="en-US" sz="900" dirty="0"/>
+          </a:p>
+        </p:txBody>
+      </p:sp>
+      <p:sp>
+        <p:nvSpPr>
+          <p:cNvPr id="38" name="Shape 36"/>
+          <p:cNvSpPr/>
+          <p:nvPr/>
+        </p:nvSpPr>
+        <p:spPr>
+          <a:xfrm>
+            <a:off x="2831592" y="4169664"/>
+            <a:ext cx="685800" cy="384048"/>
+          </a:xfrm>
+          <a:prstGeom prst="rect">
+            <a:avLst>
+              <a:gd name="adj" fmla="val 9524"/>
+            </a:avLst>
+          </a:prstGeom>
+          <a:solidFill>
+            <a:srgbClr val="FFFFFF"/>
+          </a:solidFill>
+          <a:ln w="12700">
+            <a:solidFill>
+              <a:srgbClr val="DB2777"/>
+            </a:solidFill>
+            <a:prstDash val="solid"/>
+          </a:ln>
+        </p:spPr>
+      </p:sp>
+      <p:sp>
+        <p:nvSpPr>
+          <p:cNvPr id="39" name="Text 37"/>
+          <p:cNvSpPr/>
+          <p:nvPr/>
+        </p:nvSpPr>
+        <p:spPr>
+          <a:xfrm>
+            <a:off x="2831592" y="4169664"/>
+            <a:ext cx="685800" cy="384048"/>
+          </a:xfrm>
+          <a:prstGeom prst="rect">
+            <a:avLst/>
+          </a:prstGeom>
+          <a:noFill/>
+          <a:ln/>
+        </p:spPr>
+        <p:txBody>
+          <a:bodyPr wrap="square" lIns="0" tIns="0" rIns="0" bIns="0" rtlCol="0" anchor="ctr"/>
+          <a:lstStyle/>
+          <a:p>
+            <a:pPr algn="ctr" indent="0" marL="0">
+              <a:buNone/>
+            </a:pPr>
+            <a:r>
+              <a:rPr lang="en-US" sz="900" b="1" dirty="0">
+                <a:solidFill>
+                  <a:srgbClr val="9D174D"/>
+                </a:solidFill>
+                <a:latin typeface="Trebuchet MS" pitchFamily="34" charset="0"/>
+                <a:ea typeface="Trebuchet MS" pitchFamily="34" charset="-122"/>
+                <a:cs typeface="Trebuchet MS" pitchFamily="34" charset="-120"/>
+              </a:rPr>
+              <a:t>m</a:t>
+            </a:r>
+            <a:endParaRPr lang="en-US" sz="900" dirty="0"/>
+          </a:p>
+        </p:txBody>
+      </p:sp>
+      <p:sp>
+        <p:nvSpPr>
+          <p:cNvPr id="40" name="Shape 38"/>
+          <p:cNvSpPr/>
+          <p:nvPr/>
+        </p:nvSpPr>
+        <p:spPr>
+          <a:xfrm>
+            <a:off x="3639312" y="4169664"/>
+            <a:ext cx="685800" cy="384048"/>
+          </a:xfrm>
+          <a:prstGeom prst="rect">
+            <a:avLst>
+              <a:gd name="adj" fmla="val 9524"/>
+            </a:avLst>
+          </a:prstGeom>
+          <a:solidFill>
+            <a:srgbClr val="FFFFFF"/>
+          </a:solidFill>
+          <a:ln w="12700">
+            <a:solidFill>
+              <a:srgbClr val="DB2777"/>
+            </a:solidFill>
+            <a:prstDash val="solid"/>
+          </a:ln>
+        </p:spPr>
+      </p:sp>
+      <p:sp>
+        <p:nvSpPr>
+          <p:cNvPr id="41" name="Text 39"/>
+          <p:cNvSpPr/>
+          <p:nvPr/>
+        </p:nvSpPr>
+        <p:spPr>
+          <a:xfrm>
+            <a:off x="3639312" y="4169664"/>
+            <a:ext cx="685800" cy="384048"/>
+          </a:xfrm>
+          <a:prstGeom prst="rect">
+            <a:avLst/>
+          </a:prstGeom>
+          <a:noFill/>
+          <a:ln/>
+        </p:spPr>
+        <p:txBody>
+          <a:bodyPr wrap="square" lIns="0" tIns="0" rIns="0" bIns="0" rtlCol="0" anchor="ctr"/>
+          <a:lstStyle/>
+          <a:p>
+            <a:pPr algn="ctr" indent="0" marL="0">
+              <a:buNone/>
+            </a:pPr>
+            <a:r>
+              <a:rPr lang="en-US" sz="900" b="1" dirty="0">
+                <a:solidFill>
+                  <a:srgbClr val="9D174D"/>
+                </a:solidFill>
+                <a:latin typeface="Trebuchet MS" pitchFamily="34" charset="0"/>
+                <a:ea typeface="Trebuchet MS" pitchFamily="34" charset="-122"/>
+                <a:cs typeface="Trebuchet MS" pitchFamily="34" charset="-120"/>
+              </a:rPr>
+              <a:t>b</a:t>
+            </a:r>
+            <a:endParaRPr lang="en-US" sz="900" dirty="0"/>
+          </a:p>
+        </p:txBody>
+      </p:sp>
+      <p:sp>
+        <p:nvSpPr>
+          <p:cNvPr id="42" name="Shape 40"/>
+          <p:cNvSpPr/>
+          <p:nvPr/>
+        </p:nvSpPr>
+        <p:spPr>
+          <a:xfrm>
+            <a:off x="4447032" y="4169664"/>
+            <a:ext cx="685800" cy="384048"/>
+          </a:xfrm>
+          <a:prstGeom prst="rect">
+            <a:avLst>
+              <a:gd name="adj" fmla="val 9524"/>
+            </a:avLst>
+          </a:prstGeom>
+          <a:solidFill>
+            <a:srgbClr val="FFFFFF"/>
+          </a:solidFill>
+          <a:ln w="12700">
+            <a:solidFill>
+              <a:srgbClr val="DB2777"/>
+            </a:solidFill>
+            <a:prstDash val="solid"/>
+          </a:ln>
+        </p:spPr>
+      </p:sp>
+      <p:sp>
+        <p:nvSpPr>
+          <p:cNvPr id="43" name="Text 41"/>
+          <p:cNvSpPr/>
+          <p:nvPr/>
+        </p:nvSpPr>
+        <p:spPr>
+          <a:xfrm>
+            <a:off x="4447032" y="4169664"/>
+            <a:ext cx="685800" cy="384048"/>
+          </a:xfrm>
+          <a:prstGeom prst="rect">
+            <a:avLst/>
+          </a:prstGeom>
+          <a:noFill/>
+          <a:ln/>
+        </p:spPr>
+        <p:txBody>
+          <a:bodyPr wrap="square" lIns="0" tIns="0" rIns="0" bIns="0" rtlCol="0" anchor="ctr"/>
+          <a:lstStyle/>
+          <a:p>
+            <a:pPr algn="ctr" indent="0" marL="0">
+              <a:buNone/>
+            </a:pPr>
+            <a:r>
+              <a:rPr lang="en-US" sz="900" b="1" dirty="0">
+                <a:solidFill>
+                  <a:srgbClr val="9D174D"/>
+                </a:solidFill>
+                <a:latin typeface="Trebuchet MS" pitchFamily="34" charset="0"/>
+                <a:ea typeface="Trebuchet MS" pitchFamily="34" charset="-122"/>
+                <a:cs typeface="Trebuchet MS" pitchFamily="34" charset="-120"/>
+              </a:rPr>
+              <a:t>i</a:t>
+            </a:r>
+            <a:endParaRPr lang="en-US" sz="900" dirty="0"/>
+          </a:p>
+        </p:txBody>
+      </p:sp>
+      <p:sp>
+        <p:nvSpPr>
+          <p:cNvPr id="44" name="Shape 42"/>
+          <p:cNvSpPr/>
+          <p:nvPr/>
+        </p:nvSpPr>
+        <p:spPr>
+          <a:xfrm>
+            <a:off x="5254752" y="4169664"/>
+            <a:ext cx="685800" cy="384048"/>
+          </a:xfrm>
+          <a:prstGeom prst="rect">
+            <a:avLst>
+              <a:gd name="adj" fmla="val 9524"/>
+            </a:avLst>
+          </a:prstGeom>
+          <a:solidFill>
+            <a:srgbClr val="FFFFFF"/>
+          </a:solidFill>
+          <a:ln w="12700">
+            <a:solidFill>
+              <a:srgbClr val="DB2777"/>
+            </a:solidFill>
+            <a:prstDash val="solid"/>
+          </a:ln>
+        </p:spPr>
+      </p:sp>
+      <p:sp>
+        <p:nvSpPr>
+          <p:cNvPr id="45" name="Text 43"/>
+          <p:cNvSpPr/>
+          <p:nvPr/>
+        </p:nvSpPr>
+        <p:spPr>
+          <a:xfrm>
+            <a:off x="5254752" y="4169664"/>
+            <a:ext cx="685800" cy="384048"/>
+          </a:xfrm>
+          <a:prstGeom prst="rect">
+            <a:avLst/>
+          </a:prstGeom>
+          <a:noFill/>
+          <a:ln/>
+        </p:spPr>
+        <p:txBody>
+          <a:bodyPr wrap="square" lIns="0" tIns="0" rIns="0" bIns="0" rtlCol="0" anchor="ctr"/>
+          <a:lstStyle/>
+          <a:p>
+            <a:pPr algn="ctr" indent="0" marL="0">
+              <a:buNone/>
+            </a:pPr>
+            <a:r>
+              <a:rPr lang="en-US" sz="900" b="1" dirty="0">
+                <a:solidFill>
+                  <a:srgbClr val="9D174D"/>
+                </a:solidFill>
+                <a:latin typeface="Trebuchet MS" pitchFamily="34" charset="0"/>
+                <a:ea typeface="Trebuchet MS" pitchFamily="34" charset="-122"/>
+                <a:cs typeface="Trebuchet MS" pitchFamily="34" charset="-120"/>
+              </a:rPr>
+              <a:t>t</a:t>
+            </a:r>
+            <a:endParaRPr lang="en-US" sz="900" dirty="0"/>
+          </a:p>
+        </p:txBody>
+      </p:sp>
+      <p:sp>
+        <p:nvSpPr>
+          <p:cNvPr id="46" name="Shape 44"/>
+          <p:cNvSpPr/>
+          <p:nvPr/>
+        </p:nvSpPr>
+        <p:spPr>
+          <a:xfrm>
+            <a:off x="6062472" y="4169664"/>
+            <a:ext cx="685800" cy="384048"/>
+          </a:xfrm>
+          <a:prstGeom prst="rect">
+            <a:avLst>
+              <a:gd name="adj" fmla="val 9524"/>
+            </a:avLst>
+          </a:prstGeom>
+          <a:solidFill>
+            <a:srgbClr val="FFFFFF"/>
+          </a:solidFill>
+          <a:ln w="12700">
+            <a:solidFill>
+              <a:srgbClr val="DB2777"/>
+            </a:solidFill>
+            <a:prstDash val="solid"/>
+          </a:ln>
+        </p:spPr>
+      </p:sp>
+      <p:sp>
+        <p:nvSpPr>
+          <p:cNvPr id="47" name="Text 45"/>
+          <p:cNvSpPr/>
+          <p:nvPr/>
+        </p:nvSpPr>
+        <p:spPr>
+          <a:xfrm>
+            <a:off x="6062472" y="4169664"/>
+            <a:ext cx="685800" cy="384048"/>
+          </a:xfrm>
+          <a:prstGeom prst="rect">
+            <a:avLst/>
+          </a:prstGeom>
+          <a:noFill/>
+          <a:ln/>
+        </p:spPr>
+        <p:txBody>
+          <a:bodyPr wrap="square" lIns="0" tIns="0" rIns="0" bIns="0" rtlCol="0" anchor="ctr"/>
+          <a:lstStyle/>
+          <a:p>
+            <a:pPr algn="ctr" indent="0" marL="0">
+              <a:buNone/>
+            </a:pPr>
+            <a:r>
+              <a:rPr lang="en-US" sz="900" b="1" dirty="0">
+                <a:solidFill>
+                  <a:srgbClr val="9D174D"/>
+                </a:solidFill>
+                <a:latin typeface="Trebuchet MS" pitchFamily="34" charset="0"/>
+                <a:ea typeface="Trebuchet MS" pitchFamily="34" charset="-122"/>
+                <a:cs typeface="Trebuchet MS" pitchFamily="34" charset="-120"/>
+              </a:rPr>
+              <a:t>i</a:t>
+            </a:r>
+            <a:endParaRPr lang="en-US" sz="900" dirty="0"/>
+          </a:p>
+        </p:txBody>
+      </p:sp>
+      <p:sp>
+        <p:nvSpPr>
+          <p:cNvPr id="48" name="Text 46"/>
+          <p:cNvSpPr/>
+          <p:nvPr/>
+        </p:nvSpPr>
+        <p:spPr>
+          <a:xfrm>
+            <a:off x="6062472" y="4572000"/>
+            <a:ext cx="685800" cy="219456"/>
           </a:xfrm>
           <a:prstGeom prst="rect">
             <a:avLst/>
@@ -10288,7 +11068,7 @@
               <a:buNone/>
             </a:pPr>
             <a:r>
-              <a:rPr lang="en-US" sz="700" i="1" dirty="0">
+              <a:rPr lang="en-US" sz="750" i="1" dirty="0">
                 <a:solidFill>
                   <a:srgbClr val="94A3B8"/>
                 </a:solidFill>
@@ -10296,483 +11076,87 @@
                 <a:ea typeface="Calibri" pitchFamily="34" charset="-122"/>
                 <a:cs typeface="Calibri" pitchFamily="34" charset="-120"/>
               </a:rPr>
-              <a:t>'-ious' spelling simplified to '-ous' after 'i' already present in base</a:t>
-            </a:r>
-            <a:endParaRPr lang="en-US" sz="700" dirty="0"/>
-          </a:p>
-        </p:txBody>
-      </p:sp>
-      <p:sp>
-        <p:nvSpPr>
-          <p:cNvPr id="23" name="Shape 21"/>
-          <p:cNvSpPr/>
-          <p:nvPr/>
-        </p:nvSpPr>
-        <p:spPr>
-          <a:xfrm>
-            <a:off x="365760" y="3273552"/>
-            <a:ext cx="1371600" cy="658368"/>
+              <a:t>/sh/</a:t>
+            </a:r>
+            <a:endParaRPr lang="en-US" sz="750" dirty="0"/>
+          </a:p>
+        </p:txBody>
+      </p:sp>
+      <p:sp>
+        <p:nvSpPr>
+          <p:cNvPr id="49" name="Shape 47"/>
+          <p:cNvSpPr/>
+          <p:nvPr/>
+        </p:nvSpPr>
+        <p:spPr>
+          <a:xfrm>
+            <a:off x="6870192" y="4169664"/>
+            <a:ext cx="685800" cy="384048"/>
           </a:xfrm>
           <a:prstGeom prst="rect">
             <a:avLst>
-              <a:gd name="adj" fmla="val 8333"/>
+              <a:gd name="adj" fmla="val 9524"/>
             </a:avLst>
           </a:prstGeom>
           <a:solidFill>
-            <a:srgbClr val="E2E8F0"/>
-          </a:solidFill>
-          <a:ln w="12700">
-            <a:solidFill>
-              <a:srgbClr val="E2E8F0"/>
-            </a:solidFill>
-            <a:prstDash val="solid"/>
-          </a:ln>
-        </p:spPr>
-      </p:sp>
-      <p:sp>
-        <p:nvSpPr>
-          <p:cNvPr id="24" name="Text 22"/>
-          <p:cNvSpPr/>
-          <p:nvPr/>
-        </p:nvSpPr>
-        <p:spPr>
-          <a:xfrm>
-            <a:off x="365760" y="3273552"/>
-            <a:ext cx="1371600" cy="658368"/>
-          </a:xfrm>
-          <a:prstGeom prst="rect">
-            <a:avLst/>
-          </a:prstGeom>
-          <a:noFill/>
-          <a:ln/>
-        </p:spPr>
-        <p:txBody>
-          <a:bodyPr wrap="square" lIns="0" tIns="0" rIns="0" bIns="0" rtlCol="0" anchor="ctr"/>
-          <a:lstStyle/>
-          <a:p>
-            <a:pPr algn="ctr" indent="0" marL="0">
-              <a:buNone/>
-            </a:pPr>
-            <a:r>
-              <a:rPr lang="en-US" sz="1100" b="1" dirty="0">
-                <a:solidFill>
-                  <a:srgbClr val="475569"/>
+            <a:srgbClr val="FFFFFF"/>
+          </a:solidFill>
+          <a:ln w="12700">
+            <a:solidFill>
+              <a:srgbClr val="DB2777"/>
+            </a:solidFill>
+            <a:prstDash val="solid"/>
+          </a:ln>
+        </p:spPr>
+      </p:sp>
+      <p:sp>
+        <p:nvSpPr>
+          <p:cNvPr id="50" name="Text 48"/>
+          <p:cNvSpPr/>
+          <p:nvPr/>
+        </p:nvSpPr>
+        <p:spPr>
+          <a:xfrm>
+            <a:off x="6870192" y="4169664"/>
+            <a:ext cx="685800" cy="384048"/>
+          </a:xfrm>
+          <a:prstGeom prst="rect">
+            <a:avLst/>
+          </a:prstGeom>
+          <a:noFill/>
+          <a:ln/>
+        </p:spPr>
+        <p:txBody>
+          <a:bodyPr wrap="square" lIns="0" tIns="0" rIns="0" bIns="0" rtlCol="0" anchor="ctr"/>
+          <a:lstStyle/>
+          <a:p>
+            <a:pPr algn="ctr" indent="0" marL="0">
+              <a:buNone/>
+            </a:pPr>
+            <a:r>
+              <a:rPr lang="en-US" sz="900" b="1" dirty="0">
+                <a:solidFill>
+                  <a:srgbClr val="9D174D"/>
                 </a:solidFill>
                 <a:latin typeface="Trebuchet MS" pitchFamily="34" charset="0"/>
                 <a:ea typeface="Trebuchet MS" pitchFamily="34" charset="-122"/>
                 <a:cs typeface="Trebuchet MS" pitchFamily="34" charset="-120"/>
               </a:rPr>
-              <a:t>Syllables</a:t>
-            </a:r>
-            <a:endParaRPr lang="en-US" sz="1100" dirty="0"/>
-          </a:p>
-        </p:txBody>
-      </p:sp>
-      <p:sp>
-        <p:nvSpPr>
-          <p:cNvPr id="25" name="Shape 23"/>
-          <p:cNvSpPr/>
-          <p:nvPr/>
-        </p:nvSpPr>
-        <p:spPr>
-          <a:xfrm>
-            <a:off x="1874520" y="3273552"/>
-            <a:ext cx="6903720" cy="658368"/>
-          </a:xfrm>
-          <a:prstGeom prst="rect">
-            <a:avLst>
-              <a:gd name="adj" fmla="val 8333"/>
-            </a:avLst>
-          </a:prstGeom>
-          <a:solidFill>
-            <a:srgbClr val="CCFBF1"/>
-          </a:solidFill>
-          <a:ln w="12700">
-            <a:solidFill>
-              <a:srgbClr val="0D9488"/>
-            </a:solidFill>
-            <a:prstDash val="solid"/>
-          </a:ln>
-        </p:spPr>
-      </p:sp>
-      <p:sp>
-        <p:nvSpPr>
-          <p:cNvPr id="26" name="Shape 24"/>
-          <p:cNvSpPr/>
-          <p:nvPr/>
-        </p:nvSpPr>
-        <p:spPr>
-          <a:xfrm>
-            <a:off x="2313432" y="3364992"/>
-            <a:ext cx="1645920" cy="475488"/>
-          </a:xfrm>
-          <a:prstGeom prst="rect">
-            <a:avLst>
-              <a:gd name="adj" fmla="val 9615"/>
-            </a:avLst>
-          </a:prstGeom>
-          <a:solidFill>
-            <a:srgbClr val="FFFFFF"/>
-          </a:solidFill>
-          <a:ln w="12700">
-            <a:solidFill>
-              <a:srgbClr val="0D9488"/>
-            </a:solidFill>
-            <a:prstDash val="solid"/>
-          </a:ln>
-        </p:spPr>
-      </p:sp>
-      <p:sp>
-        <p:nvSpPr>
-          <p:cNvPr id="27" name="Text 25"/>
-          <p:cNvSpPr/>
-          <p:nvPr/>
-        </p:nvSpPr>
-        <p:spPr>
-          <a:xfrm>
-            <a:off x="2313432" y="3364992"/>
-            <a:ext cx="1645920" cy="475488"/>
-          </a:xfrm>
-          <a:prstGeom prst="rect">
-            <a:avLst/>
-          </a:prstGeom>
-          <a:noFill/>
-          <a:ln/>
-        </p:spPr>
-        <p:txBody>
-          <a:bodyPr wrap="square" lIns="0" tIns="0" rIns="0" bIns="0" rtlCol="0" anchor="ctr"/>
-          <a:lstStyle/>
-          <a:p>
-            <a:pPr algn="ctr" indent="0" marL="0">
-              <a:buNone/>
-            </a:pPr>
-            <a:r>
-              <a:rPr lang="en-US" sz="1400" b="1" dirty="0">
-                <a:solidFill>
-                  <a:srgbClr val="0D9488"/>
-                </a:solidFill>
-                <a:latin typeface="Trebuchet MS" pitchFamily="34" charset="0"/>
-                <a:ea typeface="Trebuchet MS" pitchFamily="34" charset="-122"/>
-                <a:cs typeface="Trebuchet MS" pitchFamily="34" charset="-120"/>
-              </a:rPr>
-              <a:t>stu</a:t>
-            </a:r>
-            <a:endParaRPr lang="en-US" sz="1400" dirty="0"/>
-          </a:p>
-        </p:txBody>
-      </p:sp>
-      <p:sp>
-        <p:nvSpPr>
-          <p:cNvPr id="28" name="Text 26"/>
-          <p:cNvSpPr/>
-          <p:nvPr/>
-        </p:nvSpPr>
-        <p:spPr>
-          <a:xfrm>
-            <a:off x="3959352" y="3364992"/>
-            <a:ext cx="411480" cy="475488"/>
-          </a:xfrm>
-          <a:prstGeom prst="rect">
-            <a:avLst/>
-          </a:prstGeom>
-          <a:noFill/>
-          <a:ln/>
-        </p:spPr>
-        <p:txBody>
-          <a:bodyPr wrap="square" lIns="0" tIns="0" rIns="0" bIns="0" rtlCol="0" anchor="ctr"/>
-          <a:lstStyle/>
-          <a:p>
-            <a:pPr algn="ctr" indent="0" marL="0">
-              <a:buNone/>
-            </a:pPr>
-            <a:r>
-              <a:rPr lang="en-US" sz="1600" b="1" dirty="0">
-                <a:solidFill>
-                  <a:srgbClr val="0D9488"/>
-                </a:solidFill>
-                <a:latin typeface="Trebuchet MS" pitchFamily="34" charset="0"/>
-                <a:ea typeface="Trebuchet MS" pitchFamily="34" charset="-122"/>
-                <a:cs typeface="Trebuchet MS" pitchFamily="34" charset="-120"/>
-              </a:rPr>
-              <a:t>·</a:t>
-            </a:r>
-            <a:endParaRPr lang="en-US" sz="1600" dirty="0"/>
-          </a:p>
-        </p:txBody>
-      </p:sp>
-      <p:sp>
-        <p:nvSpPr>
-          <p:cNvPr id="29" name="Shape 27"/>
-          <p:cNvSpPr/>
-          <p:nvPr/>
-        </p:nvSpPr>
-        <p:spPr>
-          <a:xfrm>
-            <a:off x="4370832" y="3364992"/>
-            <a:ext cx="1645920" cy="475488"/>
-          </a:xfrm>
-          <a:prstGeom prst="rect">
-            <a:avLst>
-              <a:gd name="adj" fmla="val 9615"/>
-            </a:avLst>
-          </a:prstGeom>
-          <a:solidFill>
-            <a:srgbClr val="FFFFFF"/>
-          </a:solidFill>
-          <a:ln w="12700">
-            <a:solidFill>
-              <a:srgbClr val="0D9488"/>
-            </a:solidFill>
-            <a:prstDash val="solid"/>
-          </a:ln>
-        </p:spPr>
-      </p:sp>
-      <p:sp>
-        <p:nvSpPr>
-          <p:cNvPr id="30" name="Text 28"/>
-          <p:cNvSpPr/>
-          <p:nvPr/>
-        </p:nvSpPr>
-        <p:spPr>
-          <a:xfrm>
-            <a:off x="4370832" y="3364992"/>
-            <a:ext cx="1645920" cy="475488"/>
-          </a:xfrm>
-          <a:prstGeom prst="rect">
-            <a:avLst/>
-          </a:prstGeom>
-          <a:noFill/>
-          <a:ln/>
-        </p:spPr>
-        <p:txBody>
-          <a:bodyPr wrap="square" lIns="0" tIns="0" rIns="0" bIns="0" rtlCol="0" anchor="ctr"/>
-          <a:lstStyle/>
-          <a:p>
-            <a:pPr algn="ctr" indent="0" marL="0">
-              <a:buNone/>
-            </a:pPr>
-            <a:r>
-              <a:rPr lang="en-US" sz="1400" b="1" dirty="0">
-                <a:solidFill>
-                  <a:srgbClr val="0D9488"/>
-                </a:solidFill>
-                <a:latin typeface="Trebuchet MS" pitchFamily="34" charset="0"/>
-                <a:ea typeface="Trebuchet MS" pitchFamily="34" charset="-122"/>
-                <a:cs typeface="Trebuchet MS" pitchFamily="34" charset="-120"/>
-              </a:rPr>
-              <a:t>di</a:t>
-            </a:r>
-            <a:endParaRPr lang="en-US" sz="1400" dirty="0"/>
-          </a:p>
-        </p:txBody>
-      </p:sp>
-      <p:sp>
-        <p:nvSpPr>
-          <p:cNvPr id="31" name="Text 29"/>
-          <p:cNvSpPr/>
-          <p:nvPr/>
-        </p:nvSpPr>
-        <p:spPr>
-          <a:xfrm>
-            <a:off x="6016752" y="3364992"/>
-            <a:ext cx="411480" cy="475488"/>
-          </a:xfrm>
-          <a:prstGeom prst="rect">
-            <a:avLst/>
-          </a:prstGeom>
-          <a:noFill/>
-          <a:ln/>
-        </p:spPr>
-        <p:txBody>
-          <a:bodyPr wrap="square" lIns="0" tIns="0" rIns="0" bIns="0" rtlCol="0" anchor="ctr"/>
-          <a:lstStyle/>
-          <a:p>
-            <a:pPr algn="ctr" indent="0" marL="0">
-              <a:buNone/>
-            </a:pPr>
-            <a:r>
-              <a:rPr lang="en-US" sz="1600" b="1" dirty="0">
-                <a:solidFill>
-                  <a:srgbClr val="0D9488"/>
-                </a:solidFill>
-                <a:latin typeface="Trebuchet MS" pitchFamily="34" charset="0"/>
-                <a:ea typeface="Trebuchet MS" pitchFamily="34" charset="-122"/>
-                <a:cs typeface="Trebuchet MS" pitchFamily="34" charset="-120"/>
-              </a:rPr>
-              <a:t>·</a:t>
-            </a:r>
-            <a:endParaRPr lang="en-US" sz="1600" dirty="0"/>
-          </a:p>
-        </p:txBody>
-      </p:sp>
-      <p:sp>
-        <p:nvSpPr>
-          <p:cNvPr id="32" name="Shape 30"/>
-          <p:cNvSpPr/>
-          <p:nvPr/>
-        </p:nvSpPr>
-        <p:spPr>
-          <a:xfrm>
-            <a:off x="6428232" y="3364992"/>
-            <a:ext cx="1645920" cy="475488"/>
-          </a:xfrm>
-          <a:prstGeom prst="rect">
-            <a:avLst>
-              <a:gd name="adj" fmla="val 9615"/>
-            </a:avLst>
-          </a:prstGeom>
-          <a:solidFill>
-            <a:srgbClr val="FFFFFF"/>
-          </a:solidFill>
-          <a:ln w="12700">
-            <a:solidFill>
-              <a:srgbClr val="0D9488"/>
-            </a:solidFill>
-            <a:prstDash val="solid"/>
-          </a:ln>
-        </p:spPr>
-      </p:sp>
-      <p:sp>
-        <p:nvSpPr>
-          <p:cNvPr id="33" name="Text 31"/>
-          <p:cNvSpPr/>
-          <p:nvPr/>
-        </p:nvSpPr>
-        <p:spPr>
-          <a:xfrm>
-            <a:off x="6428232" y="3364992"/>
-            <a:ext cx="1645920" cy="475488"/>
-          </a:xfrm>
-          <a:prstGeom prst="rect">
-            <a:avLst/>
-          </a:prstGeom>
-          <a:noFill/>
-          <a:ln/>
-        </p:spPr>
-        <p:txBody>
-          <a:bodyPr wrap="square" lIns="0" tIns="0" rIns="0" bIns="0" rtlCol="0" anchor="ctr"/>
-          <a:lstStyle/>
-          <a:p>
-            <a:pPr algn="ctr" indent="0" marL="0">
-              <a:buNone/>
-            </a:pPr>
-            <a:r>
-              <a:rPr lang="en-US" sz="1400" b="1" dirty="0">
-                <a:solidFill>
-                  <a:srgbClr val="0D9488"/>
-                </a:solidFill>
-                <a:latin typeface="Trebuchet MS" pitchFamily="34" charset="0"/>
-                <a:ea typeface="Trebuchet MS" pitchFamily="34" charset="-122"/>
-                <a:cs typeface="Trebuchet MS" pitchFamily="34" charset="-120"/>
-              </a:rPr>
-              <a:t>ous</a:t>
-            </a:r>
-            <a:endParaRPr lang="en-US" sz="1400" dirty="0"/>
-          </a:p>
-        </p:txBody>
-      </p:sp>
-      <p:sp>
-        <p:nvSpPr>
-          <p:cNvPr id="34" name="Shape 32"/>
-          <p:cNvSpPr/>
-          <p:nvPr/>
-        </p:nvSpPr>
-        <p:spPr>
-          <a:xfrm>
-            <a:off x="365760" y="4096512"/>
-            <a:ext cx="1371600" cy="804672"/>
-          </a:xfrm>
-          <a:prstGeom prst="rect">
-            <a:avLst>
-              <a:gd name="adj" fmla="val 6818"/>
-            </a:avLst>
-          </a:prstGeom>
-          <a:solidFill>
-            <a:srgbClr val="E2E8F0"/>
-          </a:solidFill>
-          <a:ln w="12700">
-            <a:solidFill>
-              <a:srgbClr val="E2E8F0"/>
-            </a:solidFill>
-            <a:prstDash val="solid"/>
-          </a:ln>
-        </p:spPr>
-      </p:sp>
-      <p:sp>
-        <p:nvSpPr>
-          <p:cNvPr id="35" name="Text 33"/>
-          <p:cNvSpPr/>
-          <p:nvPr/>
-        </p:nvSpPr>
-        <p:spPr>
-          <a:xfrm>
-            <a:off x="365760" y="4096512"/>
-            <a:ext cx="1371600" cy="804672"/>
-          </a:xfrm>
-          <a:prstGeom prst="rect">
-            <a:avLst/>
-          </a:prstGeom>
-          <a:noFill/>
-          <a:ln/>
-        </p:spPr>
-        <p:txBody>
-          <a:bodyPr wrap="square" lIns="0" tIns="0" rIns="0" bIns="0" rtlCol="0" anchor="ctr"/>
-          <a:lstStyle/>
-          <a:p>
-            <a:pPr algn="ctr" indent="0" marL="0">
-              <a:buNone/>
-            </a:pPr>
-            <a:r>
-              <a:rPr lang="en-US" sz="1100" b="1" dirty="0">
-                <a:solidFill>
-                  <a:srgbClr val="475569"/>
-                </a:solidFill>
-                <a:latin typeface="Trebuchet MS" pitchFamily="34" charset="0"/>
-                <a:ea typeface="Trebuchet MS" pitchFamily="34" charset="-122"/>
-                <a:cs typeface="Trebuchet MS" pitchFamily="34" charset="-120"/>
-              </a:rPr>
-              <a:t>Phonemes</a:t>
-            </a:r>
-            <a:endParaRPr lang="en-US" sz="1100" dirty="0"/>
-          </a:p>
-        </p:txBody>
-      </p:sp>
-      <p:sp>
-        <p:nvSpPr>
-          <p:cNvPr id="36" name="Shape 34"/>
-          <p:cNvSpPr/>
-          <p:nvPr/>
-        </p:nvSpPr>
-        <p:spPr>
-          <a:xfrm>
-            <a:off x="1874520" y="4096512"/>
-            <a:ext cx="6903720" cy="804672"/>
-          </a:xfrm>
-          <a:prstGeom prst="rect">
-            <a:avLst>
-              <a:gd name="adj" fmla="val 6818"/>
-            </a:avLst>
-          </a:prstGeom>
-          <a:solidFill>
-            <a:srgbClr val="FCE7F3"/>
-          </a:solidFill>
-          <a:ln w="12700">
-            <a:solidFill>
-              <a:srgbClr val="DB2777"/>
-            </a:solidFill>
-            <a:prstDash val="solid"/>
-          </a:ln>
-        </p:spPr>
-      </p:sp>
-      <p:sp>
-        <p:nvSpPr>
-          <p:cNvPr id="37" name="Shape 35"/>
-          <p:cNvSpPr/>
-          <p:nvPr/>
-        </p:nvSpPr>
-        <p:spPr>
-          <a:xfrm>
-            <a:off x="2124837" y="4169664"/>
+              <a:t>ou</a:t>
+            </a:r>
+            <a:endParaRPr lang="en-US" sz="900" dirty="0"/>
+          </a:p>
+        </p:txBody>
+      </p:sp>
+      <p:sp>
+        <p:nvSpPr>
+          <p:cNvPr id="51" name="Shape 49"/>
+          <p:cNvSpPr/>
+          <p:nvPr/>
+        </p:nvSpPr>
+        <p:spPr>
+          <a:xfrm>
+            <a:off x="7677912" y="4169664"/>
             <a:ext cx="685800" cy="384048"/>
           </a:xfrm>
           <a:prstGeom prst="rect">
@@ -10793,448 +11177,13 @@
       </p:sp>
       <p:sp>
         <p:nvSpPr>
-          <p:cNvPr id="38" name="Text 36"/>
-          <p:cNvSpPr/>
-          <p:nvPr/>
-        </p:nvSpPr>
-        <p:spPr>
-          <a:xfrm>
-            <a:off x="2124837" y="4169664"/>
-            <a:ext cx="685800" cy="384048"/>
-          </a:xfrm>
-          <a:prstGeom prst="rect">
-            <a:avLst/>
-          </a:prstGeom>
-          <a:noFill/>
-          <a:ln/>
-        </p:spPr>
-        <p:txBody>
-          <a:bodyPr wrap="square" lIns="0" tIns="0" rIns="0" bIns="0" rtlCol="0" anchor="ctr"/>
-          <a:lstStyle/>
-          <a:p>
-            <a:pPr algn="ctr" indent="0" marL="0">
-              <a:buNone/>
-            </a:pPr>
-            <a:r>
-              <a:rPr lang="en-US" sz="900" b="1" dirty="0">
-                <a:solidFill>
-                  <a:srgbClr val="9D174D"/>
-                </a:solidFill>
-                <a:latin typeface="Trebuchet MS" pitchFamily="34" charset="0"/>
-                <a:ea typeface="Trebuchet MS" pitchFamily="34" charset="-122"/>
-                <a:cs typeface="Trebuchet MS" pitchFamily="34" charset="-120"/>
-              </a:rPr>
-              <a:t>s</a:t>
-            </a:r>
-            <a:endParaRPr lang="en-US" sz="900" dirty="0"/>
-          </a:p>
-        </p:txBody>
-      </p:sp>
-      <p:sp>
-        <p:nvSpPr>
-          <p:cNvPr id="39" name="Shape 37"/>
-          <p:cNvSpPr/>
-          <p:nvPr/>
-        </p:nvSpPr>
-        <p:spPr>
-          <a:xfrm>
-            <a:off x="3033522" y="4169664"/>
-            <a:ext cx="685800" cy="384048"/>
-          </a:xfrm>
-          <a:prstGeom prst="rect">
-            <a:avLst>
-              <a:gd name="adj" fmla="val 9524"/>
-            </a:avLst>
-          </a:prstGeom>
-          <a:solidFill>
-            <a:srgbClr val="FFFFFF"/>
-          </a:solidFill>
-          <a:ln w="12700">
-            <a:solidFill>
-              <a:srgbClr val="DB2777"/>
-            </a:solidFill>
-            <a:prstDash val="solid"/>
-          </a:ln>
-        </p:spPr>
-      </p:sp>
-      <p:sp>
-        <p:nvSpPr>
-          <p:cNvPr id="40" name="Text 38"/>
-          <p:cNvSpPr/>
-          <p:nvPr/>
-        </p:nvSpPr>
-        <p:spPr>
-          <a:xfrm>
-            <a:off x="3033522" y="4169664"/>
-            <a:ext cx="685800" cy="384048"/>
-          </a:xfrm>
-          <a:prstGeom prst="rect">
-            <a:avLst/>
-          </a:prstGeom>
-          <a:noFill/>
-          <a:ln/>
-        </p:spPr>
-        <p:txBody>
-          <a:bodyPr wrap="square" lIns="0" tIns="0" rIns="0" bIns="0" rtlCol="0" anchor="ctr"/>
-          <a:lstStyle/>
-          <a:p>
-            <a:pPr algn="ctr" indent="0" marL="0">
-              <a:buNone/>
-            </a:pPr>
-            <a:r>
-              <a:rPr lang="en-US" sz="900" b="1" dirty="0">
-                <a:solidFill>
-                  <a:srgbClr val="9D174D"/>
-                </a:solidFill>
-                <a:latin typeface="Trebuchet MS" pitchFamily="34" charset="0"/>
-                <a:ea typeface="Trebuchet MS" pitchFamily="34" charset="-122"/>
-                <a:cs typeface="Trebuchet MS" pitchFamily="34" charset="-120"/>
-              </a:rPr>
-              <a:t>t</a:t>
-            </a:r>
-            <a:endParaRPr lang="en-US" sz="900" dirty="0"/>
-          </a:p>
-        </p:txBody>
-      </p:sp>
-      <p:sp>
-        <p:nvSpPr>
-          <p:cNvPr id="41" name="Shape 39"/>
-          <p:cNvSpPr/>
-          <p:nvPr/>
-        </p:nvSpPr>
-        <p:spPr>
-          <a:xfrm>
-            <a:off x="3942207" y="4169664"/>
-            <a:ext cx="685800" cy="384048"/>
-          </a:xfrm>
-          <a:prstGeom prst="rect">
-            <a:avLst>
-              <a:gd name="adj" fmla="val 9524"/>
-            </a:avLst>
-          </a:prstGeom>
-          <a:solidFill>
-            <a:srgbClr val="FFFFFF"/>
-          </a:solidFill>
-          <a:ln w="12700">
-            <a:solidFill>
-              <a:srgbClr val="DB2777"/>
-            </a:solidFill>
-            <a:prstDash val="solid"/>
-          </a:ln>
-        </p:spPr>
-      </p:sp>
-      <p:sp>
-        <p:nvSpPr>
-          <p:cNvPr id="42" name="Text 40"/>
-          <p:cNvSpPr/>
-          <p:nvPr/>
-        </p:nvSpPr>
-        <p:spPr>
-          <a:xfrm>
-            <a:off x="3942207" y="4169664"/>
-            <a:ext cx="685800" cy="384048"/>
-          </a:xfrm>
-          <a:prstGeom prst="rect">
-            <a:avLst/>
-          </a:prstGeom>
-          <a:noFill/>
-          <a:ln/>
-        </p:spPr>
-        <p:txBody>
-          <a:bodyPr wrap="square" lIns="0" tIns="0" rIns="0" bIns="0" rtlCol="0" anchor="ctr"/>
-          <a:lstStyle/>
-          <a:p>
-            <a:pPr algn="ctr" indent="0" marL="0">
-              <a:buNone/>
-            </a:pPr>
-            <a:r>
-              <a:rPr lang="en-US" sz="900" b="1" dirty="0">
-                <a:solidFill>
-                  <a:srgbClr val="9D174D"/>
-                </a:solidFill>
-                <a:latin typeface="Trebuchet MS" pitchFamily="34" charset="0"/>
-                <a:ea typeface="Trebuchet MS" pitchFamily="34" charset="-122"/>
-                <a:cs typeface="Trebuchet MS" pitchFamily="34" charset="-120"/>
-              </a:rPr>
-              <a:t>u</a:t>
-            </a:r>
-            <a:endParaRPr lang="en-US" sz="900" dirty="0"/>
-          </a:p>
-        </p:txBody>
-      </p:sp>
-      <p:sp>
-        <p:nvSpPr>
-          <p:cNvPr id="43" name="Shape 41"/>
-          <p:cNvSpPr/>
-          <p:nvPr/>
-        </p:nvSpPr>
-        <p:spPr>
-          <a:xfrm>
-            <a:off x="4850892" y="4169664"/>
-            <a:ext cx="685800" cy="384048"/>
-          </a:xfrm>
-          <a:prstGeom prst="rect">
-            <a:avLst>
-              <a:gd name="adj" fmla="val 9524"/>
-            </a:avLst>
-          </a:prstGeom>
-          <a:solidFill>
-            <a:srgbClr val="FFFFFF"/>
-          </a:solidFill>
-          <a:ln w="12700">
-            <a:solidFill>
-              <a:srgbClr val="DB2777"/>
-            </a:solidFill>
-            <a:prstDash val="solid"/>
-          </a:ln>
-        </p:spPr>
-      </p:sp>
-      <p:sp>
-        <p:nvSpPr>
-          <p:cNvPr id="44" name="Text 42"/>
-          <p:cNvSpPr/>
-          <p:nvPr/>
-        </p:nvSpPr>
-        <p:spPr>
-          <a:xfrm>
-            <a:off x="4850892" y="4169664"/>
-            <a:ext cx="685800" cy="384048"/>
-          </a:xfrm>
-          <a:prstGeom prst="rect">
-            <a:avLst/>
-          </a:prstGeom>
-          <a:noFill/>
-          <a:ln/>
-        </p:spPr>
-        <p:txBody>
-          <a:bodyPr wrap="square" lIns="0" tIns="0" rIns="0" bIns="0" rtlCol="0" anchor="ctr"/>
-          <a:lstStyle/>
-          <a:p>
-            <a:pPr algn="ctr" indent="0" marL="0">
-              <a:buNone/>
-            </a:pPr>
-            <a:r>
-              <a:rPr lang="en-US" sz="900" b="1" dirty="0">
-                <a:solidFill>
-                  <a:srgbClr val="9D174D"/>
-                </a:solidFill>
-                <a:latin typeface="Trebuchet MS" pitchFamily="34" charset="0"/>
-                <a:ea typeface="Trebuchet MS" pitchFamily="34" charset="-122"/>
-                <a:cs typeface="Trebuchet MS" pitchFamily="34" charset="-120"/>
-              </a:rPr>
-              <a:t>d</a:t>
-            </a:r>
-            <a:endParaRPr lang="en-US" sz="900" dirty="0"/>
-          </a:p>
-        </p:txBody>
-      </p:sp>
-      <p:sp>
-        <p:nvSpPr>
-          <p:cNvPr id="45" name="Shape 43"/>
-          <p:cNvSpPr/>
-          <p:nvPr/>
-        </p:nvSpPr>
-        <p:spPr>
-          <a:xfrm>
-            <a:off x="5759577" y="4169664"/>
-            <a:ext cx="685800" cy="384048"/>
-          </a:xfrm>
-          <a:prstGeom prst="rect">
-            <a:avLst>
-              <a:gd name="adj" fmla="val 9524"/>
-            </a:avLst>
-          </a:prstGeom>
-          <a:solidFill>
-            <a:srgbClr val="FFFFFF"/>
-          </a:solidFill>
-          <a:ln w="12700">
-            <a:solidFill>
-              <a:srgbClr val="DB2777"/>
-            </a:solidFill>
-            <a:prstDash val="solid"/>
-          </a:ln>
-        </p:spPr>
-      </p:sp>
-      <p:sp>
-        <p:nvSpPr>
-          <p:cNvPr id="46" name="Text 44"/>
-          <p:cNvSpPr/>
-          <p:nvPr/>
-        </p:nvSpPr>
-        <p:spPr>
-          <a:xfrm>
-            <a:off x="5759577" y="4169664"/>
-            <a:ext cx="685800" cy="384048"/>
-          </a:xfrm>
-          <a:prstGeom prst="rect">
-            <a:avLst/>
-          </a:prstGeom>
-          <a:noFill/>
-          <a:ln/>
-        </p:spPr>
-        <p:txBody>
-          <a:bodyPr wrap="square" lIns="0" tIns="0" rIns="0" bIns="0" rtlCol="0" anchor="ctr"/>
-          <a:lstStyle/>
-          <a:p>
-            <a:pPr algn="ctr" indent="0" marL="0">
-              <a:buNone/>
-            </a:pPr>
-            <a:r>
-              <a:rPr lang="en-US" sz="900" b="1" dirty="0">
-                <a:solidFill>
-                  <a:srgbClr val="9D174D"/>
-                </a:solidFill>
-                <a:latin typeface="Trebuchet MS" pitchFamily="34" charset="0"/>
-                <a:ea typeface="Trebuchet MS" pitchFamily="34" charset="-122"/>
-                <a:cs typeface="Trebuchet MS" pitchFamily="34" charset="-120"/>
-              </a:rPr>
-              <a:t>i</a:t>
-            </a:r>
-            <a:endParaRPr lang="en-US" sz="900" dirty="0"/>
-          </a:p>
-        </p:txBody>
-      </p:sp>
-      <p:sp>
-        <p:nvSpPr>
-          <p:cNvPr id="47" name="Shape 45"/>
-          <p:cNvSpPr/>
-          <p:nvPr/>
-        </p:nvSpPr>
-        <p:spPr>
-          <a:xfrm>
-            <a:off x="6668262" y="4169664"/>
-            <a:ext cx="685800" cy="384048"/>
-          </a:xfrm>
-          <a:prstGeom prst="rect">
-            <a:avLst>
-              <a:gd name="adj" fmla="val 9524"/>
-            </a:avLst>
-          </a:prstGeom>
-          <a:solidFill>
-            <a:srgbClr val="FFFFFF"/>
-          </a:solidFill>
-          <a:ln w="12700">
-            <a:solidFill>
-              <a:srgbClr val="DB2777"/>
-            </a:solidFill>
-            <a:prstDash val="solid"/>
-          </a:ln>
-        </p:spPr>
-      </p:sp>
-      <p:sp>
-        <p:nvSpPr>
-          <p:cNvPr id="48" name="Text 46"/>
-          <p:cNvSpPr/>
-          <p:nvPr/>
-        </p:nvSpPr>
-        <p:spPr>
-          <a:xfrm>
-            <a:off x="6668262" y="4169664"/>
-            <a:ext cx="685800" cy="384048"/>
-          </a:xfrm>
-          <a:prstGeom prst="rect">
-            <a:avLst/>
-          </a:prstGeom>
-          <a:noFill/>
-          <a:ln/>
-        </p:spPr>
-        <p:txBody>
-          <a:bodyPr wrap="square" lIns="0" tIns="0" rIns="0" bIns="0" rtlCol="0" anchor="ctr"/>
-          <a:lstStyle/>
-          <a:p>
-            <a:pPr algn="ctr" indent="0" marL="0">
-              <a:buNone/>
-            </a:pPr>
-            <a:r>
-              <a:rPr lang="en-US" sz="900" b="1" dirty="0">
-                <a:solidFill>
-                  <a:srgbClr val="9D174D"/>
-                </a:solidFill>
-                <a:latin typeface="Trebuchet MS" pitchFamily="34" charset="0"/>
-                <a:ea typeface="Trebuchet MS" pitchFamily="34" charset="-122"/>
-                <a:cs typeface="Trebuchet MS" pitchFamily="34" charset="-120"/>
-              </a:rPr>
-              <a:t>ou</a:t>
-            </a:r>
-            <a:endParaRPr lang="en-US" sz="900" dirty="0"/>
-          </a:p>
-        </p:txBody>
-      </p:sp>
-      <p:sp>
-        <p:nvSpPr>
-          <p:cNvPr id="49" name="Text 47"/>
-          <p:cNvSpPr/>
-          <p:nvPr/>
-        </p:nvSpPr>
-        <p:spPr>
-          <a:xfrm>
-            <a:off x="6668262" y="4572000"/>
-            <a:ext cx="685800" cy="219456"/>
-          </a:xfrm>
-          <a:prstGeom prst="rect">
-            <a:avLst/>
-          </a:prstGeom>
-          <a:noFill/>
-          <a:ln/>
-        </p:spPr>
-        <p:txBody>
-          <a:bodyPr wrap="square" lIns="0" tIns="0" rIns="0" bIns="0" rtlCol="0" anchor="t"/>
-          <a:lstStyle/>
-          <a:p>
-            <a:pPr algn="ctr" indent="0" marL="0">
-              <a:buNone/>
-            </a:pPr>
-            <a:r>
-              <a:rPr lang="en-US" sz="750" i="1" dirty="0">
-                <a:solidFill>
-                  <a:srgbClr val="94A3B8"/>
-                </a:solidFill>
-                <a:latin typeface="Calibri" pitchFamily="34" charset="0"/>
-                <a:ea typeface="Calibri" pitchFamily="34" charset="-122"/>
-                <a:cs typeface="Calibri" pitchFamily="34" charset="-120"/>
-              </a:rPr>
-              <a:t>/u/</a:t>
-            </a:r>
-            <a:endParaRPr lang="en-US" sz="750" dirty="0"/>
-          </a:p>
-        </p:txBody>
-      </p:sp>
-      <p:sp>
-        <p:nvSpPr>
-          <p:cNvPr id="50" name="Shape 48"/>
-          <p:cNvSpPr/>
-          <p:nvPr/>
-        </p:nvSpPr>
-        <p:spPr>
-          <a:xfrm>
-            <a:off x="7576947" y="4169664"/>
-            <a:ext cx="685800" cy="384048"/>
-          </a:xfrm>
-          <a:prstGeom prst="rect">
-            <a:avLst>
-              <a:gd name="adj" fmla="val 9524"/>
-            </a:avLst>
-          </a:prstGeom>
-          <a:solidFill>
-            <a:srgbClr val="FFFFFF"/>
-          </a:solidFill>
-          <a:ln w="12700">
-            <a:solidFill>
-              <a:srgbClr val="DB2777"/>
-            </a:solidFill>
-            <a:prstDash val="solid"/>
-          </a:ln>
-        </p:spPr>
-      </p:sp>
-      <p:sp>
-        <p:nvSpPr>
-          <p:cNvPr id="51" name="Text 49"/>
-          <p:cNvSpPr/>
-          <p:nvPr/>
-        </p:nvSpPr>
-        <p:spPr>
-          <a:xfrm>
-            <a:off x="7576947" y="4169664"/>
+          <p:cNvPr id="52" name="Text 50"/>
+          <p:cNvSpPr/>
+          <p:nvPr/>
+        </p:nvSpPr>
+        <p:spPr>
+          <a:xfrm>
+            <a:off x="7677912" y="4169664"/>
             <a:ext cx="685800" cy="384048"/>
           </a:xfrm>
           <a:prstGeom prst="rect">
@@ -11690,7 +11639,7 @@
                 <a:ea typeface="Trebuchet MS" pitchFamily="34" charset="-122"/>
                 <a:cs typeface="Trebuchet MS" pitchFamily="34" charset="-120"/>
               </a:rPr>
-              <a:t>curious</a:t>
+              <a:t>serious</a:t>
             </a:r>
             <a:endParaRPr lang="en-US" sz="2800" dirty="0"/>
           </a:p>
@@ -12517,7 +12466,7 @@
                 <a:ea typeface="Trebuchet MS" pitchFamily="34" charset="-122"/>
                 <a:cs typeface="Trebuchet MS" pitchFamily="34" charset="-120"/>
               </a:rPr>
-              <a:t>curious</a:t>
+              <a:t>serious</a:t>
             </a:r>
             <a:endParaRPr lang="en-US" sz="2800" dirty="0"/>
           </a:p>
@@ -12656,7 +12605,7 @@
                 <a:ea typeface="Trebuchet MS" pitchFamily="34" charset="-122"/>
                 <a:cs typeface="Trebuchet MS" pitchFamily="34" charset="-120"/>
               </a:rPr>
-              <a:t>curi</a:t>
+              <a:t>seri</a:t>
             </a:r>
             <a:endParaRPr lang="en-US" sz="1300" dirty="0"/>
           </a:p>
@@ -12695,7 +12644,7 @@
                 <a:ea typeface="Calibri" pitchFamily="34" charset="-122"/>
                 <a:cs typeface="Calibri" pitchFamily="34" charset="-120"/>
               </a:rPr>
-              <a:t>care, concern, eagerness to know</a:t>
+              <a:t>grave, important</a:t>
             </a:r>
             <a:endParaRPr lang="en-US" sz="850" dirty="0"/>
           </a:p>
@@ -12807,7 +12756,7 @@
                 <a:ea typeface="Calibri" pitchFamily="34" charset="-122"/>
                 <a:cs typeface="Calibri" pitchFamily="34" charset="-120"/>
               </a:rPr>
-              <a:t>full of, having the quality of</a:t>
+              <a:t>full of, having quality</a:t>
             </a:r>
             <a:endParaRPr lang="en-US" sz="850" dirty="0"/>
           </a:p>
@@ -12846,7 +12795,7 @@
                 <a:ea typeface="Calibri" pitchFamily="34" charset="-122"/>
                 <a:cs typeface="Calibri" pitchFamily="34" charset="-120"/>
               </a:rPr>
-              <a:t>'-ious' spelling simplified to '-ous' after 'i' already present in base</a:t>
+              <a:t>variant of -ious after vowel</a:t>
             </a:r>
             <a:endParaRPr lang="en-US" sz="700" dirty="0"/>
           </a:p>
@@ -13541,7 +13490,7 @@
                 <a:ea typeface="Trebuchet MS" pitchFamily="34" charset="-122"/>
                 <a:cs typeface="Trebuchet MS" pitchFamily="34" charset="-120"/>
               </a:rPr>
-              <a:t>curious</a:t>
+              <a:t>serious</a:t>
             </a:r>
             <a:endParaRPr lang="en-US" sz="2800" dirty="0"/>
           </a:p>
@@ -13680,7 +13629,7 @@
                 <a:ea typeface="Trebuchet MS" pitchFamily="34" charset="-122"/>
                 <a:cs typeface="Trebuchet MS" pitchFamily="34" charset="-120"/>
               </a:rPr>
-              <a:t>curi</a:t>
+              <a:t>seri</a:t>
             </a:r>
             <a:endParaRPr lang="en-US" sz="1300" dirty="0"/>
           </a:p>
@@ -13719,7 +13668,7 @@
                 <a:ea typeface="Calibri" pitchFamily="34" charset="-122"/>
                 <a:cs typeface="Calibri" pitchFamily="34" charset="-120"/>
               </a:rPr>
-              <a:t>care, concern, eagerness to know</a:t>
+              <a:t>grave, important</a:t>
             </a:r>
             <a:endParaRPr lang="en-US" sz="850" dirty="0"/>
           </a:p>
@@ -13831,7 +13780,7 @@
                 <a:ea typeface="Calibri" pitchFamily="34" charset="-122"/>
                 <a:cs typeface="Calibri" pitchFamily="34" charset="-120"/>
               </a:rPr>
-              <a:t>full of, having the quality of</a:t>
+              <a:t>full of, having quality</a:t>
             </a:r>
             <a:endParaRPr lang="en-US" sz="850" dirty="0"/>
           </a:p>
@@ -13870,7 +13819,7 @@
                 <a:ea typeface="Calibri" pitchFamily="34" charset="-122"/>
                 <a:cs typeface="Calibri" pitchFamily="34" charset="-120"/>
               </a:rPr>
-              <a:t>'-ious' spelling simplified to '-ous' after 'i' already present in base</a:t>
+              <a:t>variant of -ious after vowel</a:t>
             </a:r>
             <a:endParaRPr lang="en-US" sz="700" dirty="0"/>
           </a:p>
@@ -14029,7 +13978,7 @@
                 <a:ea typeface="Trebuchet MS" pitchFamily="34" charset="-122"/>
                 <a:cs typeface="Trebuchet MS" pitchFamily="34" charset="-120"/>
               </a:rPr>
-              <a:t>cu</a:t>
+              <a:t>se</a:t>
             </a:r>
             <a:endParaRPr lang="en-US" sz="1400" dirty="0"/>
           </a:p>
@@ -15067,7 +15016,7 @@
                 <a:ea typeface="Trebuchet MS" pitchFamily="34" charset="-122"/>
                 <a:cs typeface="Trebuchet MS" pitchFamily="34" charset="-120"/>
               </a:rPr>
-              <a:t>curious</a:t>
+              <a:t>serious</a:t>
             </a:r>
             <a:endParaRPr lang="en-US" sz="2800" dirty="0"/>
           </a:p>
@@ -15206,7 +15155,7 @@
                 <a:ea typeface="Trebuchet MS" pitchFamily="34" charset="-122"/>
                 <a:cs typeface="Trebuchet MS" pitchFamily="34" charset="-120"/>
               </a:rPr>
-              <a:t>curi</a:t>
+              <a:t>seri</a:t>
             </a:r>
             <a:endParaRPr lang="en-US" sz="1300" dirty="0"/>
           </a:p>
@@ -15245,7 +15194,7 @@
                 <a:ea typeface="Calibri" pitchFamily="34" charset="-122"/>
                 <a:cs typeface="Calibri" pitchFamily="34" charset="-120"/>
               </a:rPr>
-              <a:t>care, concern, eagerness to know</a:t>
+              <a:t>grave, important</a:t>
             </a:r>
             <a:endParaRPr lang="en-US" sz="850" dirty="0"/>
           </a:p>
@@ -15357,7 +15306,7 @@
                 <a:ea typeface="Calibri" pitchFamily="34" charset="-122"/>
                 <a:cs typeface="Calibri" pitchFamily="34" charset="-120"/>
               </a:rPr>
-              <a:t>full of, having the quality of</a:t>
+              <a:t>full of, having quality</a:t>
             </a:r>
             <a:endParaRPr lang="en-US" sz="850" dirty="0"/>
           </a:p>
@@ -15396,7 +15345,7 @@
                 <a:ea typeface="Calibri" pitchFamily="34" charset="-122"/>
                 <a:cs typeface="Calibri" pitchFamily="34" charset="-120"/>
               </a:rPr>
-              <a:t>'-ious' spelling simplified to '-ous' after 'i' already present in base</a:t>
+              <a:t>variant of -ious after vowel</a:t>
             </a:r>
             <a:endParaRPr lang="en-US" sz="700" dirty="0"/>
           </a:p>
@@ -15555,7 +15504,7 @@
                 <a:ea typeface="Trebuchet MS" pitchFamily="34" charset="-122"/>
                 <a:cs typeface="Trebuchet MS" pitchFamily="34" charset="-120"/>
               </a:rPr>
-              <a:t>cu</a:t>
+              <a:t>se</a:t>
             </a:r>
             <a:endParaRPr lang="en-US" sz="1400" dirty="0"/>
           </a:p>
@@ -15846,11 +15795,11 @@
         <p:spPr>
           <a:xfrm>
             <a:off x="1874520" y="4096512"/>
-            <a:ext cx="6903720" cy="804672"/>
+            <a:ext cx="6903720" cy="658368"/>
           </a:xfrm>
           <a:prstGeom prst="rect">
             <a:avLst>
-              <a:gd name="adj" fmla="val 6818"/>
+              <a:gd name="adj" fmla="val 8333"/>
             </a:avLst>
           </a:prstGeom>
           <a:solidFill>
@@ -15873,11 +15822,11 @@
         <p:spPr>
           <a:xfrm>
             <a:off x="2254649" y="4169664"/>
-            <a:ext cx="685800" cy="384048"/>
+            <a:ext cx="685800" cy="475488"/>
           </a:xfrm>
           <a:prstGeom prst="rect">
             <a:avLst>
-              <a:gd name="adj" fmla="val 9524"/>
+              <a:gd name="adj" fmla="val 7692"/>
             </a:avLst>
           </a:prstGeom>
           <a:solidFill>
@@ -15900,7 +15849,7 @@
         <p:spPr>
           <a:xfrm>
             <a:off x="2254649" y="4169664"/>
-            <a:ext cx="685800" cy="384048"/>
+            <a:ext cx="685800" cy="475488"/>
           </a:xfrm>
           <a:prstGeom prst="rect">
             <a:avLst/>
@@ -15924,7 +15873,7 @@
                 <a:ea typeface="Trebuchet MS" pitchFamily="34" charset="-122"/>
                 <a:cs typeface="Trebuchet MS" pitchFamily="34" charset="-120"/>
               </a:rPr>
-              <a:t>c</a:t>
+              <a:t>s</a:t>
             </a:r>
             <a:endParaRPr lang="en-US" sz="900" dirty="0"/>
           </a:p>
@@ -15932,57 +15881,18 @@
       </p:sp>
       <p:sp>
         <p:nvSpPr>
-          <p:cNvPr id="39" name="Text 37"/>
-          <p:cNvSpPr/>
-          <p:nvPr/>
-        </p:nvSpPr>
-        <p:spPr>
-          <a:xfrm>
-            <a:off x="2254649" y="4572000"/>
-            <a:ext cx="685800" cy="219456"/>
-          </a:xfrm>
-          <a:prstGeom prst="rect">
-            <a:avLst/>
-          </a:prstGeom>
-          <a:noFill/>
-          <a:ln/>
-        </p:spPr>
-        <p:txBody>
-          <a:bodyPr wrap="square" lIns="0" tIns="0" rIns="0" bIns="0" rtlCol="0" anchor="t"/>
-          <a:lstStyle/>
-          <a:p>
-            <a:pPr algn="ctr" indent="0" marL="0">
-              <a:buNone/>
-            </a:pPr>
-            <a:r>
-              <a:rPr lang="en-US" sz="750" i="1" dirty="0">
-                <a:solidFill>
-                  <a:srgbClr val="94A3B8"/>
-                </a:solidFill>
-                <a:latin typeface="Calibri" pitchFamily="34" charset="0"/>
-                <a:ea typeface="Calibri" pitchFamily="34" charset="-122"/>
-                <a:cs typeface="Calibri" pitchFamily="34" charset="-120"/>
-              </a:rPr>
-              <a:t>/k/</a:t>
-            </a:r>
-            <a:endParaRPr lang="en-US" sz="750" dirty="0"/>
-          </a:p>
-        </p:txBody>
-      </p:sp>
-      <p:sp>
-        <p:nvSpPr>
-          <p:cNvPr id="40" name="Shape 38"/>
+          <p:cNvPr id="39" name="Shape 37"/>
           <p:cNvSpPr/>
           <p:nvPr/>
         </p:nvSpPr>
         <p:spPr>
           <a:xfrm>
             <a:off x="3293146" y="4169664"/>
-            <a:ext cx="685800" cy="384048"/>
+            <a:ext cx="685800" cy="475488"/>
           </a:xfrm>
           <a:prstGeom prst="rect">
             <a:avLst>
-              <a:gd name="adj" fmla="val 9524"/>
+              <a:gd name="adj" fmla="val 7692"/>
             </a:avLst>
           </a:prstGeom>
           <a:solidFill>
@@ -15998,14 +15908,14 @@
       </p:sp>
       <p:sp>
         <p:nvSpPr>
-          <p:cNvPr id="41" name="Text 39"/>
+          <p:cNvPr id="40" name="Text 38"/>
           <p:cNvSpPr/>
           <p:nvPr/>
         </p:nvSpPr>
         <p:spPr>
           <a:xfrm>
             <a:off x="3293146" y="4169664"/>
-            <a:ext cx="685800" cy="384048"/>
+            <a:ext cx="685800" cy="475488"/>
           </a:xfrm>
           <a:prstGeom prst="rect">
             <a:avLst/>
@@ -16029,7 +15939,7 @@
                 <a:ea typeface="Trebuchet MS" pitchFamily="34" charset="-122"/>
                 <a:cs typeface="Trebuchet MS" pitchFamily="34" charset="-120"/>
               </a:rPr>
-              <a:t>u</a:t>
+              <a:t>e</a:t>
             </a:r>
             <a:endParaRPr lang="en-US" sz="900" dirty="0"/>
           </a:p>
@@ -16037,18 +15947,18 @@
       </p:sp>
       <p:sp>
         <p:nvSpPr>
-          <p:cNvPr id="42" name="Shape 40"/>
+          <p:cNvPr id="41" name="Shape 39"/>
           <p:cNvSpPr/>
           <p:nvPr/>
         </p:nvSpPr>
         <p:spPr>
           <a:xfrm>
             <a:off x="4331643" y="4169664"/>
-            <a:ext cx="685800" cy="384048"/>
+            <a:ext cx="685800" cy="475488"/>
           </a:xfrm>
           <a:prstGeom prst="rect">
             <a:avLst>
-              <a:gd name="adj" fmla="val 9524"/>
+              <a:gd name="adj" fmla="val 7692"/>
             </a:avLst>
           </a:prstGeom>
           <a:solidFill>
@@ -16064,14 +15974,14 @@
       </p:sp>
       <p:sp>
         <p:nvSpPr>
-          <p:cNvPr id="43" name="Text 41"/>
+          <p:cNvPr id="42" name="Text 40"/>
           <p:cNvSpPr/>
           <p:nvPr/>
         </p:nvSpPr>
         <p:spPr>
           <a:xfrm>
             <a:off x="4331643" y="4169664"/>
-            <a:ext cx="685800" cy="384048"/>
+            <a:ext cx="685800" cy="475488"/>
           </a:xfrm>
           <a:prstGeom prst="rect">
             <a:avLst/>
@@ -16103,18 +16013,18 @@
       </p:sp>
       <p:sp>
         <p:nvSpPr>
-          <p:cNvPr id="44" name="Shape 42"/>
+          <p:cNvPr id="43" name="Shape 41"/>
           <p:cNvSpPr/>
           <p:nvPr/>
         </p:nvSpPr>
         <p:spPr>
           <a:xfrm>
             <a:off x="5370141" y="4169664"/>
-            <a:ext cx="685800" cy="384048"/>
+            <a:ext cx="685800" cy="475488"/>
           </a:xfrm>
           <a:prstGeom prst="rect">
             <a:avLst>
-              <a:gd name="adj" fmla="val 9524"/>
+              <a:gd name="adj" fmla="val 7692"/>
             </a:avLst>
           </a:prstGeom>
           <a:solidFill>
@@ -16130,14 +16040,14 @@
       </p:sp>
       <p:sp>
         <p:nvSpPr>
-          <p:cNvPr id="45" name="Text 43"/>
+          <p:cNvPr id="44" name="Text 42"/>
           <p:cNvSpPr/>
           <p:nvPr/>
         </p:nvSpPr>
         <p:spPr>
           <a:xfrm>
             <a:off x="5370141" y="4169664"/>
-            <a:ext cx="685800" cy="384048"/>
+            <a:ext cx="685800" cy="475488"/>
           </a:xfrm>
           <a:prstGeom prst="rect">
             <a:avLst/>
@@ -16169,18 +16079,18 @@
       </p:sp>
       <p:sp>
         <p:nvSpPr>
-          <p:cNvPr id="46" name="Shape 44"/>
+          <p:cNvPr id="45" name="Shape 43"/>
           <p:cNvSpPr/>
           <p:nvPr/>
         </p:nvSpPr>
         <p:spPr>
           <a:xfrm>
             <a:off x="6408638" y="4169664"/>
-            <a:ext cx="685800" cy="384048"/>
+            <a:ext cx="685800" cy="475488"/>
           </a:xfrm>
           <a:prstGeom prst="rect">
             <a:avLst>
-              <a:gd name="adj" fmla="val 9524"/>
+              <a:gd name="adj" fmla="val 7692"/>
             </a:avLst>
           </a:prstGeom>
           <a:solidFill>
@@ -16196,14 +16106,14 @@
       </p:sp>
       <p:sp>
         <p:nvSpPr>
-          <p:cNvPr id="47" name="Text 45"/>
+          <p:cNvPr id="46" name="Text 44"/>
           <p:cNvSpPr/>
           <p:nvPr/>
         </p:nvSpPr>
         <p:spPr>
           <a:xfrm>
             <a:off x="6408638" y="4169664"/>
-            <a:ext cx="685800" cy="384048"/>
+            <a:ext cx="685800" cy="475488"/>
           </a:xfrm>
           <a:prstGeom prst="rect">
             <a:avLst/>
@@ -16235,80 +16145,41 @@
       </p:sp>
       <p:sp>
         <p:nvSpPr>
+          <p:cNvPr id="47" name="Shape 45"/>
+          <p:cNvSpPr/>
+          <p:nvPr/>
+        </p:nvSpPr>
+        <p:spPr>
+          <a:xfrm>
+            <a:off x="7447135" y="4169664"/>
+            <a:ext cx="685800" cy="475488"/>
+          </a:xfrm>
+          <a:prstGeom prst="rect">
+            <a:avLst>
+              <a:gd name="adj" fmla="val 7692"/>
+            </a:avLst>
+          </a:prstGeom>
+          <a:solidFill>
+            <a:srgbClr val="FFFFFF"/>
+          </a:solidFill>
+          <a:ln w="12700">
+            <a:solidFill>
+              <a:srgbClr val="DB2777"/>
+            </a:solidFill>
+            <a:prstDash val="solid"/>
+          </a:ln>
+        </p:spPr>
+      </p:sp>
+      <p:sp>
+        <p:nvSpPr>
           <p:cNvPr id="48" name="Text 46"/>
           <p:cNvSpPr/>
           <p:nvPr/>
         </p:nvSpPr>
         <p:spPr>
           <a:xfrm>
-            <a:off x="6408638" y="4572000"/>
-            <a:ext cx="685800" cy="219456"/>
-          </a:xfrm>
-          <a:prstGeom prst="rect">
-            <a:avLst/>
-          </a:prstGeom>
-          <a:noFill/>
-          <a:ln/>
-        </p:spPr>
-        <p:txBody>
-          <a:bodyPr wrap="square" lIns="0" tIns="0" rIns="0" bIns="0" rtlCol="0" anchor="t"/>
-          <a:lstStyle/>
-          <a:p>
-            <a:pPr algn="ctr" indent="0" marL="0">
-              <a:buNone/>
-            </a:pPr>
-            <a:r>
-              <a:rPr lang="en-US" sz="750" i="1" dirty="0">
-                <a:solidFill>
-                  <a:srgbClr val="94A3B8"/>
-                </a:solidFill>
-                <a:latin typeface="Calibri" pitchFamily="34" charset="0"/>
-                <a:ea typeface="Calibri" pitchFamily="34" charset="-122"/>
-                <a:cs typeface="Calibri" pitchFamily="34" charset="-120"/>
-              </a:rPr>
-              <a:t>/u/</a:t>
-            </a:r>
-            <a:endParaRPr lang="en-US" sz="750" dirty="0"/>
-          </a:p>
-        </p:txBody>
-      </p:sp>
-      <p:sp>
-        <p:nvSpPr>
-          <p:cNvPr id="49" name="Shape 47"/>
-          <p:cNvSpPr/>
-          <p:nvPr/>
-        </p:nvSpPr>
-        <p:spPr>
-          <a:xfrm>
             <a:off x="7447135" y="4169664"/>
-            <a:ext cx="685800" cy="384048"/>
-          </a:xfrm>
-          <a:prstGeom prst="rect">
-            <a:avLst>
-              <a:gd name="adj" fmla="val 9524"/>
-            </a:avLst>
-          </a:prstGeom>
-          <a:solidFill>
-            <a:srgbClr val="FFFFFF"/>
-          </a:solidFill>
-          <a:ln w="12700">
-            <a:solidFill>
-              <a:srgbClr val="DB2777"/>
-            </a:solidFill>
-            <a:prstDash val="solid"/>
-          </a:ln>
-        </p:spPr>
-      </p:sp>
-      <p:sp>
-        <p:nvSpPr>
-          <p:cNvPr id="50" name="Text 48"/>
-          <p:cNvSpPr/>
-          <p:nvPr/>
-        </p:nvSpPr>
-        <p:spPr>
-          <a:xfrm>
-            <a:off x="7447135" y="4169664"/>
-            <a:ext cx="685800" cy="384048"/>
+            <a:ext cx="685800" cy="475488"/>
           </a:xfrm>
           <a:prstGeom prst="rect">
             <a:avLst/>
@@ -17675,7 +17546,7 @@
                 <a:ea typeface="Calibri" pitchFamily="34" charset="-122"/>
                 <a:cs typeface="Calibri" pitchFamily="34" charset="-120"/>
               </a:rPr>
-              <a:t>victorious</a:t>
+              <a:t>curious</a:t>
             </a:r>
             <a:pPr algn="l" indent="0" marL="0">
               <a:buNone/>
@@ -17689,7 +17560,7 @@
                 <a:ea typeface="Calibri" pitchFamily="34" charset="-122"/>
                 <a:cs typeface="Calibri" pitchFamily="34" charset="-120"/>
               </a:rPr>
-              <a:t> and </a:t>
+              <a:t> explorer made a </a:t>
             </a:r>
             <a:pPr algn="l" indent="0" marL="0">
               <a:buNone/>
@@ -17706,7 +17577,7 @@
                 <a:ea typeface="Calibri" pitchFamily="34" charset="-122"/>
                 <a:cs typeface="Calibri" pitchFamily="34" charset="-120"/>
               </a:rPr>
-              <a:t>ambitious</a:t>
+              <a:t>glorious</a:t>
             </a:r>
             <a:pPr algn="l" indent="0" marL="0">
               <a:buNone/>
@@ -17720,7 +17591,7 @@
                 <a:ea typeface="Calibri" pitchFamily="34" charset="-122"/>
                 <a:cs typeface="Calibri" pitchFamily="34" charset="-120"/>
               </a:rPr>
-              <a:t> team felt </a:t>
+              <a:t> discovery in the </a:t>
             </a:r>
             <a:pPr algn="l" indent="0" marL="0">
               <a:buNone/>
@@ -17737,7 +17608,7 @@
                 <a:ea typeface="Calibri" pitchFamily="34" charset="-122"/>
                 <a:cs typeface="Calibri" pitchFamily="34" charset="-120"/>
               </a:rPr>
-              <a:t>furious</a:t>
+              <a:t>mysterious</a:t>
             </a:r>
             <a:pPr algn="l" indent="0" marL="0">
               <a:buNone/>
@@ -17751,7 +17622,7 @@
                 <a:ea typeface="Calibri" pitchFamily="34" charset="-122"/>
                 <a:cs typeface="Calibri" pitchFamily="34" charset="-120"/>
               </a:rPr>
-              <a:t> when their trophy was lost.</a:t>
+              <a:t> jungle cave.</a:t>
             </a:r>
             <a:endParaRPr lang="en-US" sz="1800" dirty="0"/>
           </a:p>
@@ -17906,7 +17777,7 @@
                 <a:ea typeface="Trebuchet MS" pitchFamily="34" charset="-122"/>
                 <a:cs typeface="Trebuchet MS" pitchFamily="34" charset="-120"/>
               </a:rPr>
-              <a:t>victorious</a:t>
+              <a:t>curious</a:t>
             </a:r>
             <a:endParaRPr lang="en-US" sz="1400" dirty="0"/>
           </a:p>
@@ -18034,7 +17905,7 @@
                 <a:ea typeface="Trebuchet MS" pitchFamily="34" charset="-122"/>
                 <a:cs typeface="Trebuchet MS" pitchFamily="34" charset="-120"/>
               </a:rPr>
-              <a:t>ambitious</a:t>
+              <a:t>glorious</a:t>
             </a:r>
             <a:endParaRPr lang="en-US" sz="1400" dirty="0"/>
           </a:p>
@@ -18162,7 +18033,7 @@
                 <a:ea typeface="Trebuchet MS" pitchFamily="34" charset="-122"/>
                 <a:cs typeface="Trebuchet MS" pitchFamily="34" charset="-120"/>
               </a:rPr>
-              <a:t>furious</a:t>
+              <a:t>mysterious</a:t>
             </a:r>
             <a:endParaRPr lang="en-US" sz="1400" dirty="0"/>
           </a:p>
@@ -18632,7 +18503,7 @@
                 <a:ea typeface="Trebuchet MS" pitchFamily="34" charset="-122"/>
                 <a:cs typeface="Trebuchet MS" pitchFamily="34" charset="-120"/>
               </a:rPr>
-              <a:t>victorious</a:t>
+              <a:t>curious</a:t>
             </a:r>
             <a:endParaRPr lang="en-US" sz="2800" dirty="0"/>
           </a:p>
@@ -19459,7 +19330,7 @@
                 <a:ea typeface="Trebuchet MS" pitchFamily="34" charset="-122"/>
                 <a:cs typeface="Trebuchet MS" pitchFamily="34" charset="-120"/>
               </a:rPr>
-              <a:t>victorious</a:t>
+              <a:t>curious</a:t>
             </a:r>
             <a:endParaRPr lang="en-US" sz="2800" dirty="0"/>
           </a:p>
@@ -19539,7 +19410,7 @@
         </p:nvSpPr>
         <p:spPr>
           <a:xfrm>
-            <a:off x="2221992" y="2258568"/>
+            <a:off x="2938272" y="2258568"/>
             <a:ext cx="1828800" cy="292608"/>
           </a:xfrm>
           <a:prstGeom prst="rect">
@@ -19573,7 +19444,7 @@
         </p:nvSpPr>
         <p:spPr>
           <a:xfrm>
-            <a:off x="2221992" y="2258568"/>
+            <a:off x="2938272" y="2258568"/>
             <a:ext cx="1828800" cy="292608"/>
           </a:xfrm>
           <a:prstGeom prst="rect">
@@ -19598,7 +19469,7 @@
                 <a:ea typeface="Trebuchet MS" pitchFamily="34" charset="-122"/>
                 <a:cs typeface="Trebuchet MS" pitchFamily="34" charset="-120"/>
               </a:rPr>
-              <a:t>vict</a:t>
+              <a:t>curi</a:t>
             </a:r>
             <a:endParaRPr lang="en-US" sz="1300" dirty="0"/>
           </a:p>
@@ -19612,7 +19483,7 @@
         </p:nvSpPr>
         <p:spPr>
           <a:xfrm>
-            <a:off x="2221992" y="2569464"/>
+            <a:off x="2938272" y="2569464"/>
             <a:ext cx="1828800" cy="201168"/>
           </a:xfrm>
           <a:prstGeom prst="rect">
@@ -19637,7 +19508,7 @@
                 <a:ea typeface="Calibri" pitchFamily="34" charset="-122"/>
                 <a:cs typeface="Calibri" pitchFamily="34" charset="-120"/>
               </a:rPr>
-              <a:t>to conquer or win</a:t>
+              <a:t>care, concern, interest</a:t>
             </a:r>
             <a:endParaRPr lang="en-US" sz="850" dirty="0"/>
           </a:p>
@@ -19651,7 +19522,7 @@
         </p:nvSpPr>
         <p:spPr>
           <a:xfrm>
-            <a:off x="4370832" y="2258568"/>
+            <a:off x="5803392" y="2258568"/>
             <a:ext cx="1828800" cy="292608"/>
           </a:xfrm>
           <a:prstGeom prst="rect">
@@ -19685,7 +19556,7 @@
         </p:nvSpPr>
         <p:spPr>
           <a:xfrm>
-            <a:off x="4370832" y="2258568"/>
+            <a:off x="5803392" y="2258568"/>
             <a:ext cx="1828800" cy="292608"/>
           </a:xfrm>
           <a:prstGeom prst="rect">
@@ -19710,7 +19581,7 @@
                 <a:ea typeface="Trebuchet MS" pitchFamily="34" charset="-122"/>
                 <a:cs typeface="Trebuchet MS" pitchFamily="34" charset="-120"/>
               </a:rPr>
-              <a:t>or</a:t>
+              <a:t>ous</a:t>
             </a:r>
             <a:endParaRPr lang="en-US" sz="1300" dirty="0"/>
           </a:p>
@@ -19724,7 +19595,7 @@
         </p:nvSpPr>
         <p:spPr>
           <a:xfrm>
-            <a:off x="4370832" y="2569464"/>
+            <a:off x="5803392" y="2569464"/>
             <a:ext cx="1828800" cy="201168"/>
           </a:xfrm>
           <a:prstGeom prst="rect">
@@ -19749,7 +19620,7 @@
                 <a:ea typeface="Calibri" pitchFamily="34" charset="-122"/>
                 <a:cs typeface="Calibri" pitchFamily="34" charset="-120"/>
               </a:rPr>
-              <a:t>connecting element</a:t>
+              <a:t>full of, having quality</a:t>
             </a:r>
             <a:endParaRPr lang="en-US" sz="850" dirty="0"/>
           </a:p>
@@ -19757,130 +19628,189 @@
       </p:sp>
       <p:sp>
         <p:nvSpPr>
-          <p:cNvPr id="22" name="Shape 20"/>
-          <p:cNvSpPr/>
-          <p:nvPr/>
-        </p:nvSpPr>
-        <p:spPr>
-          <a:xfrm>
-            <a:off x="6519672" y="2258568"/>
-            <a:ext cx="1828800" cy="292608"/>
+          <p:cNvPr id="22" name="Text 20"/>
+          <p:cNvSpPr/>
+          <p:nvPr/>
+        </p:nvSpPr>
+        <p:spPr>
+          <a:xfrm>
+            <a:off x="5803392" y="2752344"/>
+            <a:ext cx="1828800" cy="182880"/>
+          </a:xfrm>
+          <a:prstGeom prst="rect">
+            <a:avLst/>
+          </a:prstGeom>
+          <a:noFill/>
+          <a:ln/>
+        </p:spPr>
+        <p:txBody>
+          <a:bodyPr wrap="square" lIns="0" tIns="0" rIns="0" bIns="0" rtlCol="0" anchor="t"/>
+          <a:lstStyle/>
+          <a:p>
+            <a:pPr algn="ctr" indent="0" marL="0">
+              <a:buNone/>
+            </a:pPr>
+            <a:r>
+              <a:rPr lang="en-US" sz="700" i="1" dirty="0">
+                <a:solidFill>
+                  <a:srgbClr val="94A3B8"/>
+                </a:solidFill>
+                <a:latin typeface="Calibri" pitchFamily="34" charset="0"/>
+                <a:ea typeface="Calibri" pitchFamily="34" charset="-122"/>
+                <a:cs typeface="Calibri" pitchFamily="34" charset="-120"/>
+              </a:rPr>
+              <a:t>variant of -ious after vowel</a:t>
+            </a:r>
+            <a:endParaRPr lang="en-US" sz="700" dirty="0"/>
+          </a:p>
+        </p:txBody>
+      </p:sp>
+      <p:sp>
+        <p:nvSpPr>
+          <p:cNvPr id="23" name="Shape 21"/>
+          <p:cNvSpPr/>
+          <p:nvPr/>
+        </p:nvSpPr>
+        <p:spPr>
+          <a:xfrm>
+            <a:off x="365760" y="3273552"/>
+            <a:ext cx="1371600" cy="658368"/>
           </a:xfrm>
           <a:prstGeom prst="rect">
             <a:avLst>
-              <a:gd name="adj" fmla="val 25000"/>
+              <a:gd name="adj" fmla="val 8333"/>
             </a:avLst>
           </a:prstGeom>
           <a:solidFill>
-            <a:srgbClr val="CCFBF1"/>
-          </a:solidFill>
-          <a:ln w="19050">
-            <a:solidFill>
-              <a:srgbClr val="0D9488"/>
-            </a:solidFill>
-            <a:prstDash val="solid"/>
-          </a:ln>
-          <a:effectLst>
-            <a:outerShdw sx="100000" sy="100000" kx="0" ky="0" algn="bl" rotWithShape="0" blurRad="101600" dist="38100" dir="8100000">
-              <a:srgbClr val="000000">
-                <a:alpha val="12000"/>
-              </a:srgbClr>
-            </a:outerShdw>
-          </a:effectLst>
-        </p:spPr>
-      </p:sp>
-      <p:sp>
-        <p:nvSpPr>
-          <p:cNvPr id="23" name="Text 21"/>
-          <p:cNvSpPr/>
-          <p:nvPr/>
-        </p:nvSpPr>
-        <p:spPr>
-          <a:xfrm>
-            <a:off x="6519672" y="2258568"/>
-            <a:ext cx="1828800" cy="292608"/>
-          </a:xfrm>
-          <a:prstGeom prst="rect">
-            <a:avLst/>
-          </a:prstGeom>
-          <a:noFill/>
-          <a:ln/>
-        </p:spPr>
-        <p:txBody>
-          <a:bodyPr wrap="square" lIns="0" tIns="0" rIns="0" bIns="0" rtlCol="0" anchor="ctr"/>
-          <a:lstStyle/>
-          <a:p>
-            <a:pPr algn="ctr" indent="0" marL="0">
-              <a:buNone/>
-            </a:pPr>
-            <a:r>
-              <a:rPr lang="en-US" sz="1300" b="1" dirty="0">
-                <a:solidFill>
-                  <a:srgbClr val="0F766E"/>
+            <a:srgbClr val="E2E8F0"/>
+          </a:solidFill>
+          <a:ln w="12700">
+            <a:solidFill>
+              <a:srgbClr val="E2E8F0"/>
+            </a:solidFill>
+            <a:prstDash val="solid"/>
+          </a:ln>
+        </p:spPr>
+      </p:sp>
+      <p:sp>
+        <p:nvSpPr>
+          <p:cNvPr id="24" name="Text 22"/>
+          <p:cNvSpPr/>
+          <p:nvPr/>
+        </p:nvSpPr>
+        <p:spPr>
+          <a:xfrm>
+            <a:off x="365760" y="3273552"/>
+            <a:ext cx="1371600" cy="658368"/>
+          </a:xfrm>
+          <a:prstGeom prst="rect">
+            <a:avLst/>
+          </a:prstGeom>
+          <a:noFill/>
+          <a:ln/>
+        </p:spPr>
+        <p:txBody>
+          <a:bodyPr wrap="square" lIns="0" tIns="0" rIns="0" bIns="0" rtlCol="0" anchor="ctr"/>
+          <a:lstStyle/>
+          <a:p>
+            <a:pPr algn="ctr" indent="0" marL="0">
+              <a:buNone/>
+            </a:pPr>
+            <a:r>
+              <a:rPr lang="en-US" sz="1100" b="1" dirty="0">
+                <a:solidFill>
+                  <a:srgbClr val="475569"/>
                 </a:solidFill>
                 <a:latin typeface="Trebuchet MS" pitchFamily="34" charset="0"/>
                 <a:ea typeface="Trebuchet MS" pitchFamily="34" charset="-122"/>
                 <a:cs typeface="Trebuchet MS" pitchFamily="34" charset="-120"/>
               </a:rPr>
-              <a:t>ious</a:t>
-            </a:r>
-            <a:endParaRPr lang="en-US" sz="1300" dirty="0"/>
-          </a:p>
-        </p:txBody>
-      </p:sp>
-      <p:sp>
-        <p:nvSpPr>
-          <p:cNvPr id="24" name="Text 22"/>
-          <p:cNvSpPr/>
-          <p:nvPr/>
-        </p:nvSpPr>
-        <p:spPr>
-          <a:xfrm>
-            <a:off x="6519672" y="2569464"/>
-            <a:ext cx="1828800" cy="201168"/>
-          </a:xfrm>
-          <a:prstGeom prst="rect">
-            <a:avLst/>
-          </a:prstGeom>
-          <a:noFill/>
-          <a:ln/>
-        </p:spPr>
-        <p:txBody>
-          <a:bodyPr wrap="square" lIns="0" tIns="0" rIns="0" bIns="0" rtlCol="0" anchor="t"/>
-          <a:lstStyle/>
-          <a:p>
-            <a:pPr algn="ctr" indent="0" marL="0">
-              <a:buNone/>
-            </a:pPr>
-            <a:r>
-              <a:rPr lang="en-US" sz="850" dirty="0">
-                <a:solidFill>
-                  <a:srgbClr val="475569"/>
+              <a:t>Syllables</a:t>
+            </a:r>
+            <a:endParaRPr lang="en-US" sz="1100" dirty="0"/>
+          </a:p>
+        </p:txBody>
+      </p:sp>
+      <p:sp>
+        <p:nvSpPr>
+          <p:cNvPr id="25" name="Shape 23"/>
+          <p:cNvSpPr/>
+          <p:nvPr/>
+        </p:nvSpPr>
+        <p:spPr>
+          <a:xfrm>
+            <a:off x="1874520" y="3273552"/>
+            <a:ext cx="6903720" cy="658368"/>
+          </a:xfrm>
+          <a:prstGeom prst="rect">
+            <a:avLst>
+              <a:gd name="adj" fmla="val 8333"/>
+            </a:avLst>
+          </a:prstGeom>
+          <a:solidFill>
+            <a:srgbClr val="F8FAFC"/>
+          </a:solidFill>
+          <a:ln w="12700">
+            <a:solidFill>
+              <a:srgbClr val="E2E8F0"/>
+            </a:solidFill>
+            <a:prstDash val="dash"/>
+          </a:ln>
+        </p:spPr>
+      </p:sp>
+      <p:sp>
+        <p:nvSpPr>
+          <p:cNvPr id="26" name="Text 24"/>
+          <p:cNvSpPr/>
+          <p:nvPr/>
+        </p:nvSpPr>
+        <p:spPr>
+          <a:xfrm>
+            <a:off x="1874520" y="3273552"/>
+            <a:ext cx="6903720" cy="658368"/>
+          </a:xfrm>
+          <a:prstGeom prst="rect">
+            <a:avLst/>
+          </a:prstGeom>
+          <a:noFill/>
+          <a:ln/>
+        </p:spPr>
+        <p:txBody>
+          <a:bodyPr wrap="square" rtlCol="0" anchor="ctr"/>
+          <a:lstStyle/>
+          <a:p>
+            <a:pPr algn="ctr" indent="0" marL="0">
+              <a:buNone/>
+            </a:pPr>
+            <a:r>
+              <a:rPr lang="en-US" sz="1100" i="1" dirty="0">
+                <a:solidFill>
+                  <a:srgbClr val="CBD5E1"/>
                 </a:solidFill>
                 <a:latin typeface="Calibri" pitchFamily="34" charset="0"/>
                 <a:ea typeface="Calibri" pitchFamily="34" charset="-122"/>
                 <a:cs typeface="Calibri" pitchFamily="34" charset="-120"/>
               </a:rPr>
-              <a:t>full of, having the quality of</a:t>
-            </a:r>
-            <a:endParaRPr lang="en-US" sz="850" dirty="0"/>
-          </a:p>
-        </p:txBody>
-      </p:sp>
-      <p:sp>
-        <p:nvSpPr>
-          <p:cNvPr id="25" name="Shape 23"/>
-          <p:cNvSpPr/>
-          <p:nvPr/>
-        </p:nvSpPr>
-        <p:spPr>
-          <a:xfrm>
-            <a:off x="365760" y="3273552"/>
-            <a:ext cx="1371600" cy="658368"/>
+              <a:t>Write here...</a:t>
+            </a:r>
+            <a:endParaRPr lang="en-US" sz="1100" dirty="0"/>
+          </a:p>
+        </p:txBody>
+      </p:sp>
+      <p:sp>
+        <p:nvSpPr>
+          <p:cNvPr id="27" name="Shape 25"/>
+          <p:cNvSpPr/>
+          <p:nvPr/>
+        </p:nvSpPr>
+        <p:spPr>
+          <a:xfrm>
+            <a:off x="365760" y="4096512"/>
+            <a:ext cx="1371600" cy="804672"/>
           </a:xfrm>
           <a:prstGeom prst="rect">
             <a:avLst>
-              <a:gd name="adj" fmla="val 8333"/>
+              <a:gd name="adj" fmla="val 6818"/>
             </a:avLst>
           </a:prstGeom>
           <a:solidFill>
@@ -19896,14 +19826,14 @@
       </p:sp>
       <p:sp>
         <p:nvSpPr>
-          <p:cNvPr id="26" name="Text 24"/>
-          <p:cNvSpPr/>
-          <p:nvPr/>
-        </p:nvSpPr>
-        <p:spPr>
-          <a:xfrm>
-            <a:off x="365760" y="3273552"/>
-            <a:ext cx="1371600" cy="658368"/>
+          <p:cNvPr id="28" name="Text 26"/>
+          <p:cNvSpPr/>
+          <p:nvPr/>
+        </p:nvSpPr>
+        <p:spPr>
+          <a:xfrm>
+            <a:off x="365760" y="4096512"/>
+            <a:ext cx="1371600" cy="804672"/>
           </a:xfrm>
           <a:prstGeom prst="rect">
             <a:avLst/>
@@ -19927,7 +19857,7 @@
                 <a:ea typeface="Trebuchet MS" pitchFamily="34" charset="-122"/>
                 <a:cs typeface="Trebuchet MS" pitchFamily="34" charset="-120"/>
               </a:rPr>
-              <a:t>Syllables</a:t>
+              <a:t>Phonemes</a:t>
             </a:r>
             <a:endParaRPr lang="en-US" sz="1100" dirty="0"/>
           </a:p>
@@ -19935,80 +19865,14 @@
       </p:sp>
       <p:sp>
         <p:nvSpPr>
-          <p:cNvPr id="27" name="Shape 25"/>
-          <p:cNvSpPr/>
-          <p:nvPr/>
-        </p:nvSpPr>
-        <p:spPr>
-          <a:xfrm>
-            <a:off x="1874520" y="3273552"/>
-            <a:ext cx="6903720" cy="658368"/>
-          </a:xfrm>
-          <a:prstGeom prst="rect">
-            <a:avLst>
-              <a:gd name="adj" fmla="val 8333"/>
-            </a:avLst>
-          </a:prstGeom>
-          <a:solidFill>
-            <a:srgbClr val="F8FAFC"/>
-          </a:solidFill>
-          <a:ln w="12700">
-            <a:solidFill>
-              <a:srgbClr val="E2E8F0"/>
-            </a:solidFill>
-            <a:prstDash val="dash"/>
-          </a:ln>
-        </p:spPr>
-      </p:sp>
-      <p:sp>
-        <p:nvSpPr>
-          <p:cNvPr id="28" name="Text 26"/>
-          <p:cNvSpPr/>
-          <p:nvPr/>
-        </p:nvSpPr>
-        <p:spPr>
-          <a:xfrm>
-            <a:off x="1874520" y="3273552"/>
-            <a:ext cx="6903720" cy="658368"/>
-          </a:xfrm>
-          <a:prstGeom prst="rect">
-            <a:avLst/>
-          </a:prstGeom>
-          <a:noFill/>
-          <a:ln/>
-        </p:spPr>
-        <p:txBody>
-          <a:bodyPr wrap="square" rtlCol="0" anchor="ctr"/>
-          <a:lstStyle/>
-          <a:p>
-            <a:pPr algn="ctr" indent="0" marL="0">
-              <a:buNone/>
-            </a:pPr>
-            <a:r>
-              <a:rPr lang="en-US" sz="1100" i="1" dirty="0">
-                <a:solidFill>
-                  <a:srgbClr val="CBD5E1"/>
-                </a:solidFill>
-                <a:latin typeface="Calibri" pitchFamily="34" charset="0"/>
-                <a:ea typeface="Calibri" pitchFamily="34" charset="-122"/>
-                <a:cs typeface="Calibri" pitchFamily="34" charset="-120"/>
-              </a:rPr>
-              <a:t>Write here...</a:t>
-            </a:r>
-            <a:endParaRPr lang="en-US" sz="1100" dirty="0"/>
-          </a:p>
-        </p:txBody>
-      </p:sp>
-      <p:sp>
-        <p:nvSpPr>
           <p:cNvPr id="29" name="Shape 27"/>
           <p:cNvSpPr/>
           <p:nvPr/>
         </p:nvSpPr>
         <p:spPr>
           <a:xfrm>
-            <a:off x="365760" y="4096512"/>
-            <a:ext cx="1371600" cy="804672"/>
+            <a:off x="1874520" y="4096512"/>
+            <a:ext cx="6903720" cy="804672"/>
           </a:xfrm>
           <a:prstGeom prst="rect">
             <a:avLst>
@@ -20016,85 +19880,19 @@
             </a:avLst>
           </a:prstGeom>
           <a:solidFill>
-            <a:srgbClr val="E2E8F0"/>
+            <a:srgbClr val="F8FAFC"/>
           </a:solidFill>
           <a:ln w="12700">
             <a:solidFill>
               <a:srgbClr val="E2E8F0"/>
             </a:solidFill>
-            <a:prstDash val="solid"/>
+            <a:prstDash val="dash"/>
           </a:ln>
         </p:spPr>
       </p:sp>
       <p:sp>
         <p:nvSpPr>
           <p:cNvPr id="30" name="Text 28"/>
-          <p:cNvSpPr/>
-          <p:nvPr/>
-        </p:nvSpPr>
-        <p:spPr>
-          <a:xfrm>
-            <a:off x="365760" y="4096512"/>
-            <a:ext cx="1371600" cy="804672"/>
-          </a:xfrm>
-          <a:prstGeom prst="rect">
-            <a:avLst/>
-          </a:prstGeom>
-          <a:noFill/>
-          <a:ln/>
-        </p:spPr>
-        <p:txBody>
-          <a:bodyPr wrap="square" lIns="0" tIns="0" rIns="0" bIns="0" rtlCol="0" anchor="ctr"/>
-          <a:lstStyle/>
-          <a:p>
-            <a:pPr algn="ctr" indent="0" marL="0">
-              <a:buNone/>
-            </a:pPr>
-            <a:r>
-              <a:rPr lang="en-US" sz="1100" b="1" dirty="0">
-                <a:solidFill>
-                  <a:srgbClr val="475569"/>
-                </a:solidFill>
-                <a:latin typeface="Trebuchet MS" pitchFamily="34" charset="0"/>
-                <a:ea typeface="Trebuchet MS" pitchFamily="34" charset="-122"/>
-                <a:cs typeface="Trebuchet MS" pitchFamily="34" charset="-120"/>
-              </a:rPr>
-              <a:t>Phonemes</a:t>
-            </a:r>
-            <a:endParaRPr lang="en-US" sz="1100" dirty="0"/>
-          </a:p>
-        </p:txBody>
-      </p:sp>
-      <p:sp>
-        <p:nvSpPr>
-          <p:cNvPr id="31" name="Shape 29"/>
-          <p:cNvSpPr/>
-          <p:nvPr/>
-        </p:nvSpPr>
-        <p:spPr>
-          <a:xfrm>
-            <a:off x="1874520" y="4096512"/>
-            <a:ext cx="6903720" cy="804672"/>
-          </a:xfrm>
-          <a:prstGeom prst="rect">
-            <a:avLst>
-              <a:gd name="adj" fmla="val 6818"/>
-            </a:avLst>
-          </a:prstGeom>
-          <a:solidFill>
-            <a:srgbClr val="F8FAFC"/>
-          </a:solidFill>
-          <a:ln w="12700">
-            <a:solidFill>
-              <a:srgbClr val="E2E8F0"/>
-            </a:solidFill>
-            <a:prstDash val="dash"/>
-          </a:ln>
-        </p:spPr>
-      </p:sp>
-      <p:sp>
-        <p:nvSpPr>
-          <p:cNvPr id="32" name="Text 30"/>
           <p:cNvSpPr/>
           <p:nvPr/>
         </p:nvSpPr>
@@ -20556,7 +20354,7 @@
                 <a:ea typeface="Trebuchet MS" pitchFamily="34" charset="-122"/>
                 <a:cs typeface="Trebuchet MS" pitchFamily="34" charset="-120"/>
               </a:rPr>
-              <a:t>victorious</a:t>
+              <a:t>curious</a:t>
             </a:r>
             <a:endParaRPr lang="en-US" sz="2800" dirty="0"/>
           </a:p>
@@ -20636,7 +20434,7 @@
         </p:nvSpPr>
         <p:spPr>
           <a:xfrm>
-            <a:off x="2221992" y="2258568"/>
+            <a:off x="2938272" y="2258568"/>
             <a:ext cx="1828800" cy="292608"/>
           </a:xfrm>
           <a:prstGeom prst="rect">
@@ -20670,7 +20468,7 @@
         </p:nvSpPr>
         <p:spPr>
           <a:xfrm>
-            <a:off x="2221992" y="2258568"/>
+            <a:off x="2938272" y="2258568"/>
             <a:ext cx="1828800" cy="292608"/>
           </a:xfrm>
           <a:prstGeom prst="rect">
@@ -20695,7 +20493,7 @@
                 <a:ea typeface="Trebuchet MS" pitchFamily="34" charset="-122"/>
                 <a:cs typeface="Trebuchet MS" pitchFamily="34" charset="-120"/>
               </a:rPr>
-              <a:t>vict</a:t>
+              <a:t>curi</a:t>
             </a:r>
             <a:endParaRPr lang="en-US" sz="1300" dirty="0"/>
           </a:p>
@@ -20709,7 +20507,7 @@
         </p:nvSpPr>
         <p:spPr>
           <a:xfrm>
-            <a:off x="2221992" y="2569464"/>
+            <a:off x="2938272" y="2569464"/>
             <a:ext cx="1828800" cy="201168"/>
           </a:xfrm>
           <a:prstGeom prst="rect">
@@ -20734,7 +20532,7 @@
                 <a:ea typeface="Calibri" pitchFamily="34" charset="-122"/>
                 <a:cs typeface="Calibri" pitchFamily="34" charset="-120"/>
               </a:rPr>
-              <a:t>to conquer or win</a:t>
+              <a:t>care, concern, interest</a:t>
             </a:r>
             <a:endParaRPr lang="en-US" sz="850" dirty="0"/>
           </a:p>
@@ -20748,7 +20546,7 @@
         </p:nvSpPr>
         <p:spPr>
           <a:xfrm>
-            <a:off x="4370832" y="2258568"/>
+            <a:off x="5803392" y="2258568"/>
             <a:ext cx="1828800" cy="292608"/>
           </a:xfrm>
           <a:prstGeom prst="rect">
@@ -20782,7 +20580,7 @@
         </p:nvSpPr>
         <p:spPr>
           <a:xfrm>
-            <a:off x="4370832" y="2258568"/>
+            <a:off x="5803392" y="2258568"/>
             <a:ext cx="1828800" cy="292608"/>
           </a:xfrm>
           <a:prstGeom prst="rect">
@@ -20807,7 +20605,7 @@
                 <a:ea typeface="Trebuchet MS" pitchFamily="34" charset="-122"/>
                 <a:cs typeface="Trebuchet MS" pitchFamily="34" charset="-120"/>
               </a:rPr>
-              <a:t>or</a:t>
+              <a:t>ous</a:t>
             </a:r>
             <a:endParaRPr lang="en-US" sz="1300" dirty="0"/>
           </a:p>
@@ -20821,7 +20619,7 @@
         </p:nvSpPr>
         <p:spPr>
           <a:xfrm>
-            <a:off x="4370832" y="2569464"/>
+            <a:off x="5803392" y="2569464"/>
             <a:ext cx="1828800" cy="201168"/>
           </a:xfrm>
           <a:prstGeom prst="rect">
@@ -20846,7 +20644,7 @@
                 <a:ea typeface="Calibri" pitchFamily="34" charset="-122"/>
                 <a:cs typeface="Calibri" pitchFamily="34" charset="-120"/>
               </a:rPr>
-              <a:t>connecting element</a:t>
+              <a:t>full of, having quality</a:t>
             </a:r>
             <a:endParaRPr lang="en-US" sz="850" dirty="0"/>
           </a:p>
@@ -20854,113 +20652,106 @@
       </p:sp>
       <p:sp>
         <p:nvSpPr>
-          <p:cNvPr id="22" name="Shape 20"/>
-          <p:cNvSpPr/>
-          <p:nvPr/>
-        </p:nvSpPr>
-        <p:spPr>
-          <a:xfrm>
-            <a:off x="6519672" y="2258568"/>
-            <a:ext cx="1828800" cy="292608"/>
+          <p:cNvPr id="22" name="Text 20"/>
+          <p:cNvSpPr/>
+          <p:nvPr/>
+        </p:nvSpPr>
+        <p:spPr>
+          <a:xfrm>
+            <a:off x="5803392" y="2752344"/>
+            <a:ext cx="1828800" cy="182880"/>
+          </a:xfrm>
+          <a:prstGeom prst="rect">
+            <a:avLst/>
+          </a:prstGeom>
+          <a:noFill/>
+          <a:ln/>
+        </p:spPr>
+        <p:txBody>
+          <a:bodyPr wrap="square" lIns="0" tIns="0" rIns="0" bIns="0" rtlCol="0" anchor="t"/>
+          <a:lstStyle/>
+          <a:p>
+            <a:pPr algn="ctr" indent="0" marL="0">
+              <a:buNone/>
+            </a:pPr>
+            <a:r>
+              <a:rPr lang="en-US" sz="700" i="1" dirty="0">
+                <a:solidFill>
+                  <a:srgbClr val="94A3B8"/>
+                </a:solidFill>
+                <a:latin typeface="Calibri" pitchFamily="34" charset="0"/>
+                <a:ea typeface="Calibri" pitchFamily="34" charset="-122"/>
+                <a:cs typeface="Calibri" pitchFamily="34" charset="-120"/>
+              </a:rPr>
+              <a:t>variant of -ious after vowel</a:t>
+            </a:r>
+            <a:endParaRPr lang="en-US" sz="700" dirty="0"/>
+          </a:p>
+        </p:txBody>
+      </p:sp>
+      <p:sp>
+        <p:nvSpPr>
+          <p:cNvPr id="23" name="Shape 21"/>
+          <p:cNvSpPr/>
+          <p:nvPr/>
+        </p:nvSpPr>
+        <p:spPr>
+          <a:xfrm>
+            <a:off x="365760" y="3273552"/>
+            <a:ext cx="1371600" cy="658368"/>
           </a:xfrm>
           <a:prstGeom prst="rect">
             <a:avLst>
-              <a:gd name="adj" fmla="val 25000"/>
+              <a:gd name="adj" fmla="val 8333"/>
             </a:avLst>
           </a:prstGeom>
           <a:solidFill>
-            <a:srgbClr val="CCFBF1"/>
-          </a:solidFill>
-          <a:ln w="19050">
-            <a:solidFill>
-              <a:srgbClr val="0D9488"/>
-            </a:solidFill>
-            <a:prstDash val="solid"/>
-          </a:ln>
-          <a:effectLst>
-            <a:outerShdw sx="100000" sy="100000" kx="0" ky="0" algn="bl" rotWithShape="0" blurRad="101600" dist="38100" dir="8100000">
-              <a:srgbClr val="000000">
-                <a:alpha val="12000"/>
-              </a:srgbClr>
-            </a:outerShdw>
-          </a:effectLst>
-        </p:spPr>
-      </p:sp>
-      <p:sp>
-        <p:nvSpPr>
-          <p:cNvPr id="23" name="Text 21"/>
-          <p:cNvSpPr/>
-          <p:nvPr/>
-        </p:nvSpPr>
-        <p:spPr>
-          <a:xfrm>
-            <a:off x="6519672" y="2258568"/>
-            <a:ext cx="1828800" cy="292608"/>
-          </a:xfrm>
-          <a:prstGeom prst="rect">
-            <a:avLst/>
-          </a:prstGeom>
-          <a:noFill/>
-          <a:ln/>
-        </p:spPr>
-        <p:txBody>
-          <a:bodyPr wrap="square" lIns="0" tIns="0" rIns="0" bIns="0" rtlCol="0" anchor="ctr"/>
-          <a:lstStyle/>
-          <a:p>
-            <a:pPr algn="ctr" indent="0" marL="0">
-              <a:buNone/>
-            </a:pPr>
-            <a:r>
-              <a:rPr lang="en-US" sz="1300" b="1" dirty="0">
-                <a:solidFill>
-                  <a:srgbClr val="0F766E"/>
+            <a:srgbClr val="E2E8F0"/>
+          </a:solidFill>
+          <a:ln w="12700">
+            <a:solidFill>
+              <a:srgbClr val="E2E8F0"/>
+            </a:solidFill>
+            <a:prstDash val="solid"/>
+          </a:ln>
+        </p:spPr>
+      </p:sp>
+      <p:sp>
+        <p:nvSpPr>
+          <p:cNvPr id="24" name="Text 22"/>
+          <p:cNvSpPr/>
+          <p:nvPr/>
+        </p:nvSpPr>
+        <p:spPr>
+          <a:xfrm>
+            <a:off x="365760" y="3273552"/>
+            <a:ext cx="1371600" cy="658368"/>
+          </a:xfrm>
+          <a:prstGeom prst="rect">
+            <a:avLst/>
+          </a:prstGeom>
+          <a:noFill/>
+          <a:ln/>
+        </p:spPr>
+        <p:txBody>
+          <a:bodyPr wrap="square" lIns="0" tIns="0" rIns="0" bIns="0" rtlCol="0" anchor="ctr"/>
+          <a:lstStyle/>
+          <a:p>
+            <a:pPr algn="ctr" indent="0" marL="0">
+              <a:buNone/>
+            </a:pPr>
+            <a:r>
+              <a:rPr lang="en-US" sz="1100" b="1" dirty="0">
+                <a:solidFill>
+                  <a:srgbClr val="475569"/>
                 </a:solidFill>
                 <a:latin typeface="Trebuchet MS" pitchFamily="34" charset="0"/>
                 <a:ea typeface="Trebuchet MS" pitchFamily="34" charset="-122"/>
                 <a:cs typeface="Trebuchet MS" pitchFamily="34" charset="-120"/>
               </a:rPr>
-              <a:t>ious</a:t>
-            </a:r>
-            <a:endParaRPr lang="en-US" sz="1300" dirty="0"/>
-          </a:p>
-        </p:txBody>
-      </p:sp>
-      <p:sp>
-        <p:nvSpPr>
-          <p:cNvPr id="24" name="Text 22"/>
-          <p:cNvSpPr/>
-          <p:nvPr/>
-        </p:nvSpPr>
-        <p:spPr>
-          <a:xfrm>
-            <a:off x="6519672" y="2569464"/>
-            <a:ext cx="1828800" cy="201168"/>
-          </a:xfrm>
-          <a:prstGeom prst="rect">
-            <a:avLst/>
-          </a:prstGeom>
-          <a:noFill/>
-          <a:ln/>
-        </p:spPr>
-        <p:txBody>
-          <a:bodyPr wrap="square" lIns="0" tIns="0" rIns="0" bIns="0" rtlCol="0" anchor="t"/>
-          <a:lstStyle/>
-          <a:p>
-            <a:pPr algn="ctr" indent="0" marL="0">
-              <a:buNone/>
-            </a:pPr>
-            <a:r>
-              <a:rPr lang="en-US" sz="850" dirty="0">
-                <a:solidFill>
-                  <a:srgbClr val="475569"/>
-                </a:solidFill>
-                <a:latin typeface="Calibri" pitchFamily="34" charset="0"/>
-                <a:ea typeface="Calibri" pitchFamily="34" charset="-122"/>
-                <a:cs typeface="Calibri" pitchFamily="34" charset="-120"/>
-              </a:rPr>
-              <a:t>full of, having the quality of</a:t>
-            </a:r>
-            <a:endParaRPr lang="en-US" sz="850" dirty="0"/>
+              <a:t>Syllables</a:t>
+            </a:r>
+            <a:endParaRPr lang="en-US" sz="1100" dirty="0"/>
           </a:p>
         </p:txBody>
       </p:sp>
@@ -20972,8 +20763,8 @@
         </p:nvSpPr>
         <p:spPr>
           <a:xfrm>
-            <a:off x="365760" y="3273552"/>
-            <a:ext cx="1371600" cy="658368"/>
+            <a:off x="1874520" y="3273552"/>
+            <a:ext cx="6903720" cy="658368"/>
           </a:xfrm>
           <a:prstGeom prst="rect">
             <a:avLst>
@@ -20981,92 +20772,131 @@
             </a:avLst>
           </a:prstGeom>
           <a:solidFill>
-            <a:srgbClr val="E2E8F0"/>
-          </a:solidFill>
-          <a:ln w="12700">
-            <a:solidFill>
-              <a:srgbClr val="E2E8F0"/>
-            </a:solidFill>
-            <a:prstDash val="solid"/>
-          </a:ln>
-        </p:spPr>
-      </p:sp>
-      <p:sp>
-        <p:nvSpPr>
-          <p:cNvPr id="26" name="Text 24"/>
-          <p:cNvSpPr/>
-          <p:nvPr/>
-        </p:nvSpPr>
-        <p:spPr>
-          <a:xfrm>
-            <a:off x="365760" y="3273552"/>
-            <a:ext cx="1371600" cy="658368"/>
-          </a:xfrm>
-          <a:prstGeom prst="rect">
-            <a:avLst/>
-          </a:prstGeom>
-          <a:noFill/>
-          <a:ln/>
-        </p:spPr>
-        <p:txBody>
-          <a:bodyPr wrap="square" lIns="0" tIns="0" rIns="0" bIns="0" rtlCol="0" anchor="ctr"/>
-          <a:lstStyle/>
-          <a:p>
-            <a:pPr algn="ctr" indent="0" marL="0">
-              <a:buNone/>
-            </a:pPr>
-            <a:r>
-              <a:rPr lang="en-US" sz="1100" b="1" dirty="0">
-                <a:solidFill>
-                  <a:srgbClr val="475569"/>
+            <a:srgbClr val="CCFBF1"/>
+          </a:solidFill>
+          <a:ln w="12700">
+            <a:solidFill>
+              <a:srgbClr val="0D9488"/>
+            </a:solidFill>
+            <a:prstDash val="solid"/>
+          </a:ln>
+        </p:spPr>
+      </p:sp>
+      <p:sp>
+        <p:nvSpPr>
+          <p:cNvPr id="26" name="Shape 24"/>
+          <p:cNvSpPr/>
+          <p:nvPr/>
+        </p:nvSpPr>
+        <p:spPr>
+          <a:xfrm>
+            <a:off x="2313432" y="3364992"/>
+            <a:ext cx="1645920" cy="475488"/>
+          </a:xfrm>
+          <a:prstGeom prst="rect">
+            <a:avLst>
+              <a:gd name="adj" fmla="val 9615"/>
+            </a:avLst>
+          </a:prstGeom>
+          <a:solidFill>
+            <a:srgbClr val="FFFFFF"/>
+          </a:solidFill>
+          <a:ln w="12700">
+            <a:solidFill>
+              <a:srgbClr val="0D9488"/>
+            </a:solidFill>
+            <a:prstDash val="solid"/>
+          </a:ln>
+        </p:spPr>
+      </p:sp>
+      <p:sp>
+        <p:nvSpPr>
+          <p:cNvPr id="27" name="Text 25"/>
+          <p:cNvSpPr/>
+          <p:nvPr/>
+        </p:nvSpPr>
+        <p:spPr>
+          <a:xfrm>
+            <a:off x="2313432" y="3364992"/>
+            <a:ext cx="1645920" cy="475488"/>
+          </a:xfrm>
+          <a:prstGeom prst="rect">
+            <a:avLst/>
+          </a:prstGeom>
+          <a:noFill/>
+          <a:ln/>
+        </p:spPr>
+        <p:txBody>
+          <a:bodyPr wrap="square" lIns="0" tIns="0" rIns="0" bIns="0" rtlCol="0" anchor="ctr"/>
+          <a:lstStyle/>
+          <a:p>
+            <a:pPr algn="ctr" indent="0" marL="0">
+              <a:buNone/>
+            </a:pPr>
+            <a:r>
+              <a:rPr lang="en-US" sz="1400" b="1" dirty="0">
+                <a:solidFill>
+                  <a:srgbClr val="0D9488"/>
                 </a:solidFill>
                 <a:latin typeface="Trebuchet MS" pitchFamily="34" charset="0"/>
                 <a:ea typeface="Trebuchet MS" pitchFamily="34" charset="-122"/>
                 <a:cs typeface="Trebuchet MS" pitchFamily="34" charset="-120"/>
               </a:rPr>
-              <a:t>Syllables</a:t>
-            </a:r>
-            <a:endParaRPr lang="en-US" sz="1100" dirty="0"/>
-          </a:p>
-        </p:txBody>
-      </p:sp>
-      <p:sp>
-        <p:nvSpPr>
-          <p:cNvPr id="27" name="Shape 25"/>
-          <p:cNvSpPr/>
-          <p:nvPr/>
-        </p:nvSpPr>
-        <p:spPr>
-          <a:xfrm>
-            <a:off x="1874520" y="3273552"/>
-            <a:ext cx="6903720" cy="658368"/>
-          </a:xfrm>
-          <a:prstGeom prst="rect">
-            <a:avLst>
-              <a:gd name="adj" fmla="val 8333"/>
-            </a:avLst>
-          </a:prstGeom>
-          <a:solidFill>
-            <a:srgbClr val="CCFBF1"/>
-          </a:solidFill>
-          <a:ln w="12700">
-            <a:solidFill>
-              <a:srgbClr val="0D9488"/>
-            </a:solidFill>
-            <a:prstDash val="solid"/>
-          </a:ln>
-        </p:spPr>
-      </p:sp>
-      <p:sp>
-        <p:nvSpPr>
-          <p:cNvPr id="28" name="Shape 26"/>
-          <p:cNvSpPr/>
-          <p:nvPr/>
-        </p:nvSpPr>
-        <p:spPr>
-          <a:xfrm>
-            <a:off x="1975104" y="3364992"/>
-            <a:ext cx="1554480" cy="475488"/>
+              <a:t>cu</a:t>
+            </a:r>
+            <a:endParaRPr lang="en-US" sz="1400" dirty="0"/>
+          </a:p>
+        </p:txBody>
+      </p:sp>
+      <p:sp>
+        <p:nvSpPr>
+          <p:cNvPr id="28" name="Text 26"/>
+          <p:cNvSpPr/>
+          <p:nvPr/>
+        </p:nvSpPr>
+        <p:spPr>
+          <a:xfrm>
+            <a:off x="3959352" y="3364992"/>
+            <a:ext cx="411480" cy="475488"/>
+          </a:xfrm>
+          <a:prstGeom prst="rect">
+            <a:avLst/>
+          </a:prstGeom>
+          <a:noFill/>
+          <a:ln/>
+        </p:spPr>
+        <p:txBody>
+          <a:bodyPr wrap="square" lIns="0" tIns="0" rIns="0" bIns="0" rtlCol="0" anchor="ctr"/>
+          <a:lstStyle/>
+          <a:p>
+            <a:pPr algn="ctr" indent="0" marL="0">
+              <a:buNone/>
+            </a:pPr>
+            <a:r>
+              <a:rPr lang="en-US" sz="1600" b="1" dirty="0">
+                <a:solidFill>
+                  <a:srgbClr val="0D9488"/>
+                </a:solidFill>
+                <a:latin typeface="Trebuchet MS" pitchFamily="34" charset="0"/>
+                <a:ea typeface="Trebuchet MS" pitchFamily="34" charset="-122"/>
+                <a:cs typeface="Trebuchet MS" pitchFamily="34" charset="-120"/>
+              </a:rPr>
+              <a:t>·</a:t>
+            </a:r>
+            <a:endParaRPr lang="en-US" sz="1600" dirty="0"/>
+          </a:p>
+        </p:txBody>
+      </p:sp>
+      <p:sp>
+        <p:nvSpPr>
+          <p:cNvPr id="29" name="Shape 27"/>
+          <p:cNvSpPr/>
+          <p:nvPr/>
+        </p:nvSpPr>
+        <p:spPr>
+          <a:xfrm>
+            <a:off x="4370832" y="3364992"/>
+            <a:ext cx="1645920" cy="475488"/>
           </a:xfrm>
           <a:prstGeom prst="rect">
             <a:avLst>
@@ -21086,14 +20916,14 @@
       </p:sp>
       <p:sp>
         <p:nvSpPr>
-          <p:cNvPr id="29" name="Text 27"/>
-          <p:cNvSpPr/>
-          <p:nvPr/>
-        </p:nvSpPr>
-        <p:spPr>
-          <a:xfrm>
-            <a:off x="1975104" y="3364992"/>
-            <a:ext cx="1554480" cy="475488"/>
+          <p:cNvPr id="30" name="Text 28"/>
+          <p:cNvSpPr/>
+          <p:nvPr/>
+        </p:nvSpPr>
+        <p:spPr>
+          <a:xfrm>
+            <a:off x="4370832" y="3364992"/>
+            <a:ext cx="1645920" cy="475488"/>
           </a:xfrm>
           <a:prstGeom prst="rect">
             <a:avLst/>
@@ -21117,7 +20947,7 @@
                 <a:ea typeface="Trebuchet MS" pitchFamily="34" charset="-122"/>
                 <a:cs typeface="Trebuchet MS" pitchFamily="34" charset="-120"/>
               </a:rPr>
-              <a:t>vic</a:t>
+              <a:t>ri</a:t>
             </a:r>
             <a:endParaRPr lang="en-US" sz="1400" dirty="0"/>
           </a:p>
@@ -21125,14 +20955,14 @@
       </p:sp>
       <p:sp>
         <p:nvSpPr>
-          <p:cNvPr id="30" name="Text 28"/>
-          <p:cNvSpPr/>
-          <p:nvPr/>
-        </p:nvSpPr>
-        <p:spPr>
-          <a:xfrm>
-            <a:off x="3529584" y="3364992"/>
-            <a:ext cx="73152" cy="475488"/>
+          <p:cNvPr id="31" name="Text 29"/>
+          <p:cNvSpPr/>
+          <p:nvPr/>
+        </p:nvSpPr>
+        <p:spPr>
+          <a:xfrm>
+            <a:off x="6016752" y="3364992"/>
+            <a:ext cx="411480" cy="475488"/>
           </a:xfrm>
           <a:prstGeom prst="rect">
             <a:avLst/>
@@ -21164,14 +20994,14 @@
       </p:sp>
       <p:sp>
         <p:nvSpPr>
-          <p:cNvPr id="31" name="Shape 29"/>
-          <p:cNvSpPr/>
-          <p:nvPr/>
-        </p:nvSpPr>
-        <p:spPr>
-          <a:xfrm>
-            <a:off x="3602736" y="3364992"/>
-            <a:ext cx="1554480" cy="475488"/>
+          <p:cNvPr id="32" name="Shape 30"/>
+          <p:cNvSpPr/>
+          <p:nvPr/>
+        </p:nvSpPr>
+        <p:spPr>
+          <a:xfrm>
+            <a:off x="6428232" y="3364992"/>
+            <a:ext cx="1645920" cy="475488"/>
           </a:xfrm>
           <a:prstGeom prst="rect">
             <a:avLst>
@@ -21191,14 +21021,14 @@
       </p:sp>
       <p:sp>
         <p:nvSpPr>
-          <p:cNvPr id="32" name="Text 30"/>
-          <p:cNvSpPr/>
-          <p:nvPr/>
-        </p:nvSpPr>
-        <p:spPr>
-          <a:xfrm>
-            <a:off x="3602736" y="3364992"/>
-            <a:ext cx="1554480" cy="475488"/>
+          <p:cNvPr id="33" name="Text 31"/>
+          <p:cNvSpPr/>
+          <p:nvPr/>
+        </p:nvSpPr>
+        <p:spPr>
+          <a:xfrm>
+            <a:off x="6428232" y="3364992"/>
+            <a:ext cx="1645920" cy="475488"/>
           </a:xfrm>
           <a:prstGeom prst="rect">
             <a:avLst/>
@@ -21222,7 +21052,7 @@
                 <a:ea typeface="Trebuchet MS" pitchFamily="34" charset="-122"/>
                 <a:cs typeface="Trebuchet MS" pitchFamily="34" charset="-120"/>
               </a:rPr>
-              <a:t>tor</a:t>
+              <a:t>ous</a:t>
             </a:r>
             <a:endParaRPr lang="en-US" sz="1400" dirty="0"/>
           </a:p>
@@ -21230,224 +21060,80 @@
       </p:sp>
       <p:sp>
         <p:nvSpPr>
-          <p:cNvPr id="33" name="Text 31"/>
-          <p:cNvSpPr/>
-          <p:nvPr/>
-        </p:nvSpPr>
-        <p:spPr>
-          <a:xfrm>
-            <a:off x="5157216" y="3364992"/>
-            <a:ext cx="73152" cy="475488"/>
-          </a:xfrm>
-          <a:prstGeom prst="rect">
-            <a:avLst/>
-          </a:prstGeom>
-          <a:noFill/>
-          <a:ln/>
-        </p:spPr>
-        <p:txBody>
-          <a:bodyPr wrap="square" lIns="0" tIns="0" rIns="0" bIns="0" rtlCol="0" anchor="ctr"/>
-          <a:lstStyle/>
-          <a:p>
-            <a:pPr algn="ctr" indent="0" marL="0">
-              <a:buNone/>
-            </a:pPr>
-            <a:r>
-              <a:rPr lang="en-US" sz="1600" b="1" dirty="0">
-                <a:solidFill>
-                  <a:srgbClr val="0D9488"/>
+          <p:cNvPr id="34" name="Shape 32"/>
+          <p:cNvSpPr/>
+          <p:nvPr/>
+        </p:nvSpPr>
+        <p:spPr>
+          <a:xfrm>
+            <a:off x="365760" y="4096512"/>
+            <a:ext cx="1371600" cy="804672"/>
+          </a:xfrm>
+          <a:prstGeom prst="rect">
+            <a:avLst>
+              <a:gd name="adj" fmla="val 6818"/>
+            </a:avLst>
+          </a:prstGeom>
+          <a:solidFill>
+            <a:srgbClr val="E2E8F0"/>
+          </a:solidFill>
+          <a:ln w="12700">
+            <a:solidFill>
+              <a:srgbClr val="E2E8F0"/>
+            </a:solidFill>
+            <a:prstDash val="solid"/>
+          </a:ln>
+        </p:spPr>
+      </p:sp>
+      <p:sp>
+        <p:nvSpPr>
+          <p:cNvPr id="35" name="Text 33"/>
+          <p:cNvSpPr/>
+          <p:nvPr/>
+        </p:nvSpPr>
+        <p:spPr>
+          <a:xfrm>
+            <a:off x="365760" y="4096512"/>
+            <a:ext cx="1371600" cy="804672"/>
+          </a:xfrm>
+          <a:prstGeom prst="rect">
+            <a:avLst/>
+          </a:prstGeom>
+          <a:noFill/>
+          <a:ln/>
+        </p:spPr>
+        <p:txBody>
+          <a:bodyPr wrap="square" lIns="0" tIns="0" rIns="0" bIns="0" rtlCol="0" anchor="ctr"/>
+          <a:lstStyle/>
+          <a:p>
+            <a:pPr algn="ctr" indent="0" marL="0">
+              <a:buNone/>
+            </a:pPr>
+            <a:r>
+              <a:rPr lang="en-US" sz="1100" b="1" dirty="0">
+                <a:solidFill>
+                  <a:srgbClr val="475569"/>
                 </a:solidFill>
                 <a:latin typeface="Trebuchet MS" pitchFamily="34" charset="0"/>
                 <a:ea typeface="Trebuchet MS" pitchFamily="34" charset="-122"/>
                 <a:cs typeface="Trebuchet MS" pitchFamily="34" charset="-120"/>
               </a:rPr>
-              <a:t>·</a:t>
-            </a:r>
-            <a:endParaRPr lang="en-US" sz="1600" dirty="0"/>
-          </a:p>
-        </p:txBody>
-      </p:sp>
-      <p:sp>
-        <p:nvSpPr>
-          <p:cNvPr id="34" name="Shape 32"/>
-          <p:cNvSpPr/>
-          <p:nvPr/>
-        </p:nvSpPr>
-        <p:spPr>
-          <a:xfrm>
-            <a:off x="5230368" y="3364992"/>
-            <a:ext cx="1554480" cy="475488"/>
-          </a:xfrm>
-          <a:prstGeom prst="rect">
-            <a:avLst>
-              <a:gd name="adj" fmla="val 9615"/>
-            </a:avLst>
-          </a:prstGeom>
-          <a:solidFill>
-            <a:srgbClr val="FFFFFF"/>
-          </a:solidFill>
-          <a:ln w="12700">
-            <a:solidFill>
-              <a:srgbClr val="0D9488"/>
-            </a:solidFill>
-            <a:prstDash val="solid"/>
-          </a:ln>
-        </p:spPr>
-      </p:sp>
-      <p:sp>
-        <p:nvSpPr>
-          <p:cNvPr id="35" name="Text 33"/>
-          <p:cNvSpPr/>
-          <p:nvPr/>
-        </p:nvSpPr>
-        <p:spPr>
-          <a:xfrm>
-            <a:off x="5230368" y="3364992"/>
-            <a:ext cx="1554480" cy="475488"/>
-          </a:xfrm>
-          <a:prstGeom prst="rect">
-            <a:avLst/>
-          </a:prstGeom>
-          <a:noFill/>
-          <a:ln/>
-        </p:spPr>
-        <p:txBody>
-          <a:bodyPr wrap="square" lIns="0" tIns="0" rIns="0" bIns="0" rtlCol="0" anchor="ctr"/>
-          <a:lstStyle/>
-          <a:p>
-            <a:pPr algn="ctr" indent="0" marL="0">
-              <a:buNone/>
-            </a:pPr>
-            <a:r>
-              <a:rPr lang="en-US" sz="1400" b="1" dirty="0">
-                <a:solidFill>
-                  <a:srgbClr val="0D9488"/>
-                </a:solidFill>
-                <a:latin typeface="Trebuchet MS" pitchFamily="34" charset="0"/>
-                <a:ea typeface="Trebuchet MS" pitchFamily="34" charset="-122"/>
-                <a:cs typeface="Trebuchet MS" pitchFamily="34" charset="-120"/>
-              </a:rPr>
-              <a:t>i</a:t>
-            </a:r>
-            <a:endParaRPr lang="en-US" sz="1400" dirty="0"/>
-          </a:p>
-        </p:txBody>
-      </p:sp>
-      <p:sp>
-        <p:nvSpPr>
-          <p:cNvPr id="36" name="Text 34"/>
-          <p:cNvSpPr/>
-          <p:nvPr/>
-        </p:nvSpPr>
-        <p:spPr>
-          <a:xfrm>
-            <a:off x="6784848" y="3364992"/>
-            <a:ext cx="73152" cy="475488"/>
-          </a:xfrm>
-          <a:prstGeom prst="rect">
-            <a:avLst/>
-          </a:prstGeom>
-          <a:noFill/>
-          <a:ln/>
-        </p:spPr>
-        <p:txBody>
-          <a:bodyPr wrap="square" lIns="0" tIns="0" rIns="0" bIns="0" rtlCol="0" anchor="ctr"/>
-          <a:lstStyle/>
-          <a:p>
-            <a:pPr algn="ctr" indent="0" marL="0">
-              <a:buNone/>
-            </a:pPr>
-            <a:r>
-              <a:rPr lang="en-US" sz="1600" b="1" dirty="0">
-                <a:solidFill>
-                  <a:srgbClr val="0D9488"/>
-                </a:solidFill>
-                <a:latin typeface="Trebuchet MS" pitchFamily="34" charset="0"/>
-                <a:ea typeface="Trebuchet MS" pitchFamily="34" charset="-122"/>
-                <a:cs typeface="Trebuchet MS" pitchFamily="34" charset="-120"/>
-              </a:rPr>
-              <a:t>·</a:t>
-            </a:r>
-            <a:endParaRPr lang="en-US" sz="1600" dirty="0"/>
-          </a:p>
-        </p:txBody>
-      </p:sp>
-      <p:sp>
-        <p:nvSpPr>
-          <p:cNvPr id="37" name="Shape 35"/>
-          <p:cNvSpPr/>
-          <p:nvPr/>
-        </p:nvSpPr>
-        <p:spPr>
-          <a:xfrm>
-            <a:off x="6858000" y="3364992"/>
-            <a:ext cx="1554480" cy="475488"/>
-          </a:xfrm>
-          <a:prstGeom prst="rect">
-            <a:avLst>
-              <a:gd name="adj" fmla="val 9615"/>
-            </a:avLst>
-          </a:prstGeom>
-          <a:solidFill>
-            <a:srgbClr val="FFFFFF"/>
-          </a:solidFill>
-          <a:ln w="12700">
-            <a:solidFill>
-              <a:srgbClr val="0D9488"/>
-            </a:solidFill>
-            <a:prstDash val="solid"/>
-          </a:ln>
-        </p:spPr>
-      </p:sp>
-      <p:sp>
-        <p:nvSpPr>
-          <p:cNvPr id="38" name="Text 36"/>
-          <p:cNvSpPr/>
-          <p:nvPr/>
-        </p:nvSpPr>
-        <p:spPr>
-          <a:xfrm>
-            <a:off x="6858000" y="3364992"/>
-            <a:ext cx="1554480" cy="475488"/>
-          </a:xfrm>
-          <a:prstGeom prst="rect">
-            <a:avLst/>
-          </a:prstGeom>
-          <a:noFill/>
-          <a:ln/>
-        </p:spPr>
-        <p:txBody>
-          <a:bodyPr wrap="square" lIns="0" tIns="0" rIns="0" bIns="0" rtlCol="0" anchor="ctr"/>
-          <a:lstStyle/>
-          <a:p>
-            <a:pPr algn="ctr" indent="0" marL="0">
-              <a:buNone/>
-            </a:pPr>
-            <a:r>
-              <a:rPr lang="en-US" sz="1400" b="1" dirty="0">
-                <a:solidFill>
-                  <a:srgbClr val="0D9488"/>
-                </a:solidFill>
-                <a:latin typeface="Trebuchet MS" pitchFamily="34" charset="0"/>
-                <a:ea typeface="Trebuchet MS" pitchFamily="34" charset="-122"/>
-                <a:cs typeface="Trebuchet MS" pitchFamily="34" charset="-120"/>
-              </a:rPr>
-              <a:t>ous</a:t>
-            </a:r>
-            <a:endParaRPr lang="en-US" sz="1400" dirty="0"/>
-          </a:p>
-        </p:txBody>
-      </p:sp>
-      <p:sp>
-        <p:nvSpPr>
-          <p:cNvPr id="39" name="Shape 37"/>
-          <p:cNvSpPr/>
-          <p:nvPr/>
-        </p:nvSpPr>
-        <p:spPr>
-          <a:xfrm>
-            <a:off x="365760" y="4096512"/>
-            <a:ext cx="1371600" cy="804672"/>
+              <a:t>Phonemes</a:t>
+            </a:r>
+            <a:endParaRPr lang="en-US" sz="1100" dirty="0"/>
+          </a:p>
+        </p:txBody>
+      </p:sp>
+      <p:sp>
+        <p:nvSpPr>
+          <p:cNvPr id="36" name="Shape 34"/>
+          <p:cNvSpPr/>
+          <p:nvPr/>
+        </p:nvSpPr>
+        <p:spPr>
+          <a:xfrm>
+            <a:off x="1874520" y="4096512"/>
+            <a:ext cx="6903720" cy="804672"/>
           </a:xfrm>
           <a:prstGeom prst="rect">
             <a:avLst>
@@ -21455,85 +21141,19 @@
             </a:avLst>
           </a:prstGeom>
           <a:solidFill>
-            <a:srgbClr val="E2E8F0"/>
+            <a:srgbClr val="F8FAFC"/>
           </a:solidFill>
           <a:ln w="12700">
             <a:solidFill>
               <a:srgbClr val="E2E8F0"/>
             </a:solidFill>
-            <a:prstDash val="solid"/>
-          </a:ln>
-        </p:spPr>
-      </p:sp>
-      <p:sp>
-        <p:nvSpPr>
-          <p:cNvPr id="40" name="Text 38"/>
-          <p:cNvSpPr/>
-          <p:nvPr/>
-        </p:nvSpPr>
-        <p:spPr>
-          <a:xfrm>
-            <a:off x="365760" y="4096512"/>
-            <a:ext cx="1371600" cy="804672"/>
-          </a:xfrm>
-          <a:prstGeom prst="rect">
-            <a:avLst/>
-          </a:prstGeom>
-          <a:noFill/>
-          <a:ln/>
-        </p:spPr>
-        <p:txBody>
-          <a:bodyPr wrap="square" lIns="0" tIns="0" rIns="0" bIns="0" rtlCol="0" anchor="ctr"/>
-          <a:lstStyle/>
-          <a:p>
-            <a:pPr algn="ctr" indent="0" marL="0">
-              <a:buNone/>
-            </a:pPr>
-            <a:r>
-              <a:rPr lang="en-US" sz="1100" b="1" dirty="0">
-                <a:solidFill>
-                  <a:srgbClr val="475569"/>
-                </a:solidFill>
-                <a:latin typeface="Trebuchet MS" pitchFamily="34" charset="0"/>
-                <a:ea typeface="Trebuchet MS" pitchFamily="34" charset="-122"/>
-                <a:cs typeface="Trebuchet MS" pitchFamily="34" charset="-120"/>
-              </a:rPr>
-              <a:t>Phonemes</a:t>
-            </a:r>
-            <a:endParaRPr lang="en-US" sz="1100" dirty="0"/>
-          </a:p>
-        </p:txBody>
-      </p:sp>
-      <p:sp>
-        <p:nvSpPr>
-          <p:cNvPr id="41" name="Shape 39"/>
-          <p:cNvSpPr/>
-          <p:nvPr/>
-        </p:nvSpPr>
-        <p:spPr>
-          <a:xfrm>
-            <a:off x="1874520" y="4096512"/>
-            <a:ext cx="6903720" cy="804672"/>
-          </a:xfrm>
-          <a:prstGeom prst="rect">
-            <a:avLst>
-              <a:gd name="adj" fmla="val 6818"/>
-            </a:avLst>
-          </a:prstGeom>
-          <a:solidFill>
-            <a:srgbClr val="F8FAFC"/>
-          </a:solidFill>
-          <a:ln w="12700">
-            <a:solidFill>
-              <a:srgbClr val="E2E8F0"/>
-            </a:solidFill>
             <a:prstDash val="dash"/>
           </a:ln>
         </p:spPr>
       </p:sp>
       <p:sp>
         <p:nvSpPr>
-          <p:cNvPr id="42" name="Text 40"/>
+          <p:cNvPr id="37" name="Text 35"/>
           <p:cNvSpPr/>
           <p:nvPr/>
         </p:nvSpPr>
@@ -21995,7 +21615,7 @@
                 <a:ea typeface="Trebuchet MS" pitchFamily="34" charset="-122"/>
                 <a:cs typeface="Trebuchet MS" pitchFamily="34" charset="-120"/>
               </a:rPr>
-              <a:t>victorious</a:t>
+              <a:t>curious</a:t>
             </a:r>
             <a:endParaRPr lang="en-US" sz="2800" dirty="0"/>
           </a:p>
@@ -22075,7 +21695,7 @@
         </p:nvSpPr>
         <p:spPr>
           <a:xfrm>
-            <a:off x="2221992" y="2258568"/>
+            <a:off x="2938272" y="2258568"/>
             <a:ext cx="1828800" cy="292608"/>
           </a:xfrm>
           <a:prstGeom prst="rect">
@@ -22109,7 +21729,7 @@
         </p:nvSpPr>
         <p:spPr>
           <a:xfrm>
-            <a:off x="2221992" y="2258568"/>
+            <a:off x="2938272" y="2258568"/>
             <a:ext cx="1828800" cy="292608"/>
           </a:xfrm>
           <a:prstGeom prst="rect">
@@ -22134,7 +21754,7 @@
                 <a:ea typeface="Trebuchet MS" pitchFamily="34" charset="-122"/>
                 <a:cs typeface="Trebuchet MS" pitchFamily="34" charset="-120"/>
               </a:rPr>
-              <a:t>vict</a:t>
+              <a:t>curi</a:t>
             </a:r>
             <a:endParaRPr lang="en-US" sz="1300" dirty="0"/>
           </a:p>
@@ -22148,7 +21768,7 @@
         </p:nvSpPr>
         <p:spPr>
           <a:xfrm>
-            <a:off x="2221992" y="2569464"/>
+            <a:off x="2938272" y="2569464"/>
             <a:ext cx="1828800" cy="201168"/>
           </a:xfrm>
           <a:prstGeom prst="rect">
@@ -22173,7 +21793,7 @@
                 <a:ea typeface="Calibri" pitchFamily="34" charset="-122"/>
                 <a:cs typeface="Calibri" pitchFamily="34" charset="-120"/>
               </a:rPr>
-              <a:t>to conquer or win</a:t>
+              <a:t>care, concern, interest</a:t>
             </a:r>
             <a:endParaRPr lang="en-US" sz="850" dirty="0"/>
           </a:p>
@@ -22187,7 +21807,7 @@
         </p:nvSpPr>
         <p:spPr>
           <a:xfrm>
-            <a:off x="4370832" y="2258568"/>
+            <a:off x="5803392" y="2258568"/>
             <a:ext cx="1828800" cy="292608"/>
           </a:xfrm>
           <a:prstGeom prst="rect">
@@ -22221,7 +21841,7 @@
         </p:nvSpPr>
         <p:spPr>
           <a:xfrm>
-            <a:off x="4370832" y="2258568"/>
+            <a:off x="5803392" y="2258568"/>
             <a:ext cx="1828800" cy="292608"/>
           </a:xfrm>
           <a:prstGeom prst="rect">
@@ -22246,7 +21866,7 @@
                 <a:ea typeface="Trebuchet MS" pitchFamily="34" charset="-122"/>
                 <a:cs typeface="Trebuchet MS" pitchFamily="34" charset="-120"/>
               </a:rPr>
-              <a:t>or</a:t>
+              <a:t>ous</a:t>
             </a:r>
             <a:endParaRPr lang="en-US" sz="1300" dirty="0"/>
           </a:p>
@@ -22260,7 +21880,7 @@
         </p:nvSpPr>
         <p:spPr>
           <a:xfrm>
-            <a:off x="4370832" y="2569464"/>
+            <a:off x="5803392" y="2569464"/>
             <a:ext cx="1828800" cy="201168"/>
           </a:xfrm>
           <a:prstGeom prst="rect">
@@ -22285,7 +21905,7 @@
                 <a:ea typeface="Calibri" pitchFamily="34" charset="-122"/>
                 <a:cs typeface="Calibri" pitchFamily="34" charset="-120"/>
               </a:rPr>
-              <a:t>connecting element</a:t>
+              <a:t>full of, having quality</a:t>
             </a:r>
             <a:endParaRPr lang="en-US" sz="850" dirty="0"/>
           </a:p>
@@ -22293,87 +21913,581 @@
       </p:sp>
       <p:sp>
         <p:nvSpPr>
-          <p:cNvPr id="22" name="Shape 20"/>
-          <p:cNvSpPr/>
-          <p:nvPr/>
-        </p:nvSpPr>
-        <p:spPr>
-          <a:xfrm>
-            <a:off x="6519672" y="2258568"/>
-            <a:ext cx="1828800" cy="292608"/>
+          <p:cNvPr id="22" name="Text 20"/>
+          <p:cNvSpPr/>
+          <p:nvPr/>
+        </p:nvSpPr>
+        <p:spPr>
+          <a:xfrm>
+            <a:off x="5803392" y="2752344"/>
+            <a:ext cx="1828800" cy="182880"/>
+          </a:xfrm>
+          <a:prstGeom prst="rect">
+            <a:avLst/>
+          </a:prstGeom>
+          <a:noFill/>
+          <a:ln/>
+        </p:spPr>
+        <p:txBody>
+          <a:bodyPr wrap="square" lIns="0" tIns="0" rIns="0" bIns="0" rtlCol="0" anchor="t"/>
+          <a:lstStyle/>
+          <a:p>
+            <a:pPr algn="ctr" indent="0" marL="0">
+              <a:buNone/>
+            </a:pPr>
+            <a:r>
+              <a:rPr lang="en-US" sz="700" i="1" dirty="0">
+                <a:solidFill>
+                  <a:srgbClr val="94A3B8"/>
+                </a:solidFill>
+                <a:latin typeface="Calibri" pitchFamily="34" charset="0"/>
+                <a:ea typeface="Calibri" pitchFamily="34" charset="-122"/>
+                <a:cs typeface="Calibri" pitchFamily="34" charset="-120"/>
+              </a:rPr>
+              <a:t>variant of -ious after vowel</a:t>
+            </a:r>
+            <a:endParaRPr lang="en-US" sz="700" dirty="0"/>
+          </a:p>
+        </p:txBody>
+      </p:sp>
+      <p:sp>
+        <p:nvSpPr>
+          <p:cNvPr id="23" name="Shape 21"/>
+          <p:cNvSpPr/>
+          <p:nvPr/>
+        </p:nvSpPr>
+        <p:spPr>
+          <a:xfrm>
+            <a:off x="365760" y="3273552"/>
+            <a:ext cx="1371600" cy="658368"/>
           </a:xfrm>
           <a:prstGeom prst="rect">
             <a:avLst>
-              <a:gd name="adj" fmla="val 25000"/>
+              <a:gd name="adj" fmla="val 8333"/>
             </a:avLst>
           </a:prstGeom>
           <a:solidFill>
-            <a:srgbClr val="CCFBF1"/>
-          </a:solidFill>
-          <a:ln w="19050">
-            <a:solidFill>
-              <a:srgbClr val="0D9488"/>
-            </a:solidFill>
-            <a:prstDash val="solid"/>
-          </a:ln>
-          <a:effectLst>
-            <a:outerShdw sx="100000" sy="100000" kx="0" ky="0" algn="bl" rotWithShape="0" blurRad="101600" dist="38100" dir="8100000">
-              <a:srgbClr val="000000">
-                <a:alpha val="12000"/>
-              </a:srgbClr>
-            </a:outerShdw>
-          </a:effectLst>
-        </p:spPr>
-      </p:sp>
-      <p:sp>
-        <p:nvSpPr>
-          <p:cNvPr id="23" name="Text 21"/>
-          <p:cNvSpPr/>
-          <p:nvPr/>
-        </p:nvSpPr>
-        <p:spPr>
-          <a:xfrm>
-            <a:off x="6519672" y="2258568"/>
-            <a:ext cx="1828800" cy="292608"/>
-          </a:xfrm>
-          <a:prstGeom prst="rect">
-            <a:avLst/>
-          </a:prstGeom>
-          <a:noFill/>
-          <a:ln/>
-        </p:spPr>
-        <p:txBody>
-          <a:bodyPr wrap="square" lIns="0" tIns="0" rIns="0" bIns="0" rtlCol="0" anchor="ctr"/>
-          <a:lstStyle/>
-          <a:p>
-            <a:pPr algn="ctr" indent="0" marL="0">
-              <a:buNone/>
-            </a:pPr>
-            <a:r>
-              <a:rPr lang="en-US" sz="1300" b="1" dirty="0">
-                <a:solidFill>
-                  <a:srgbClr val="0F766E"/>
+            <a:srgbClr val="E2E8F0"/>
+          </a:solidFill>
+          <a:ln w="12700">
+            <a:solidFill>
+              <a:srgbClr val="E2E8F0"/>
+            </a:solidFill>
+            <a:prstDash val="solid"/>
+          </a:ln>
+        </p:spPr>
+      </p:sp>
+      <p:sp>
+        <p:nvSpPr>
+          <p:cNvPr id="24" name="Text 22"/>
+          <p:cNvSpPr/>
+          <p:nvPr/>
+        </p:nvSpPr>
+        <p:spPr>
+          <a:xfrm>
+            <a:off x="365760" y="3273552"/>
+            <a:ext cx="1371600" cy="658368"/>
+          </a:xfrm>
+          <a:prstGeom prst="rect">
+            <a:avLst/>
+          </a:prstGeom>
+          <a:noFill/>
+          <a:ln/>
+        </p:spPr>
+        <p:txBody>
+          <a:bodyPr wrap="square" lIns="0" tIns="0" rIns="0" bIns="0" rtlCol="0" anchor="ctr"/>
+          <a:lstStyle/>
+          <a:p>
+            <a:pPr algn="ctr" indent="0" marL="0">
+              <a:buNone/>
+            </a:pPr>
+            <a:r>
+              <a:rPr lang="en-US" sz="1100" b="1" dirty="0">
+                <a:solidFill>
+                  <a:srgbClr val="475569"/>
                 </a:solidFill>
                 <a:latin typeface="Trebuchet MS" pitchFamily="34" charset="0"/>
                 <a:ea typeface="Trebuchet MS" pitchFamily="34" charset="-122"/>
                 <a:cs typeface="Trebuchet MS" pitchFamily="34" charset="-120"/>
               </a:rPr>
-              <a:t>ious</a:t>
-            </a:r>
-            <a:endParaRPr lang="en-US" sz="1300" dirty="0"/>
-          </a:p>
-        </p:txBody>
-      </p:sp>
-      <p:sp>
-        <p:nvSpPr>
-          <p:cNvPr id="24" name="Text 22"/>
-          <p:cNvSpPr/>
-          <p:nvPr/>
-        </p:nvSpPr>
-        <p:spPr>
-          <a:xfrm>
-            <a:off x="6519672" y="2569464"/>
-            <a:ext cx="1828800" cy="201168"/>
+              <a:t>Syllables</a:t>
+            </a:r>
+            <a:endParaRPr lang="en-US" sz="1100" dirty="0"/>
+          </a:p>
+        </p:txBody>
+      </p:sp>
+      <p:sp>
+        <p:nvSpPr>
+          <p:cNvPr id="25" name="Shape 23"/>
+          <p:cNvSpPr/>
+          <p:nvPr/>
+        </p:nvSpPr>
+        <p:spPr>
+          <a:xfrm>
+            <a:off x="1874520" y="3273552"/>
+            <a:ext cx="6903720" cy="658368"/>
+          </a:xfrm>
+          <a:prstGeom prst="rect">
+            <a:avLst>
+              <a:gd name="adj" fmla="val 8333"/>
+            </a:avLst>
+          </a:prstGeom>
+          <a:solidFill>
+            <a:srgbClr val="CCFBF1"/>
+          </a:solidFill>
+          <a:ln w="12700">
+            <a:solidFill>
+              <a:srgbClr val="0D9488"/>
+            </a:solidFill>
+            <a:prstDash val="solid"/>
+          </a:ln>
+        </p:spPr>
+      </p:sp>
+      <p:sp>
+        <p:nvSpPr>
+          <p:cNvPr id="26" name="Shape 24"/>
+          <p:cNvSpPr/>
+          <p:nvPr/>
+        </p:nvSpPr>
+        <p:spPr>
+          <a:xfrm>
+            <a:off x="2313432" y="3364992"/>
+            <a:ext cx="1645920" cy="475488"/>
+          </a:xfrm>
+          <a:prstGeom prst="rect">
+            <a:avLst>
+              <a:gd name="adj" fmla="val 9615"/>
+            </a:avLst>
+          </a:prstGeom>
+          <a:solidFill>
+            <a:srgbClr val="FFFFFF"/>
+          </a:solidFill>
+          <a:ln w="12700">
+            <a:solidFill>
+              <a:srgbClr val="0D9488"/>
+            </a:solidFill>
+            <a:prstDash val="solid"/>
+          </a:ln>
+        </p:spPr>
+      </p:sp>
+      <p:sp>
+        <p:nvSpPr>
+          <p:cNvPr id="27" name="Text 25"/>
+          <p:cNvSpPr/>
+          <p:nvPr/>
+        </p:nvSpPr>
+        <p:spPr>
+          <a:xfrm>
+            <a:off x="2313432" y="3364992"/>
+            <a:ext cx="1645920" cy="475488"/>
+          </a:xfrm>
+          <a:prstGeom prst="rect">
+            <a:avLst/>
+          </a:prstGeom>
+          <a:noFill/>
+          <a:ln/>
+        </p:spPr>
+        <p:txBody>
+          <a:bodyPr wrap="square" lIns="0" tIns="0" rIns="0" bIns="0" rtlCol="0" anchor="ctr"/>
+          <a:lstStyle/>
+          <a:p>
+            <a:pPr algn="ctr" indent="0" marL="0">
+              <a:buNone/>
+            </a:pPr>
+            <a:r>
+              <a:rPr lang="en-US" sz="1400" b="1" dirty="0">
+                <a:solidFill>
+                  <a:srgbClr val="0D9488"/>
+                </a:solidFill>
+                <a:latin typeface="Trebuchet MS" pitchFamily="34" charset="0"/>
+                <a:ea typeface="Trebuchet MS" pitchFamily="34" charset="-122"/>
+                <a:cs typeface="Trebuchet MS" pitchFamily="34" charset="-120"/>
+              </a:rPr>
+              <a:t>cu</a:t>
+            </a:r>
+            <a:endParaRPr lang="en-US" sz="1400" dirty="0"/>
+          </a:p>
+        </p:txBody>
+      </p:sp>
+      <p:sp>
+        <p:nvSpPr>
+          <p:cNvPr id="28" name="Text 26"/>
+          <p:cNvSpPr/>
+          <p:nvPr/>
+        </p:nvSpPr>
+        <p:spPr>
+          <a:xfrm>
+            <a:off x="3959352" y="3364992"/>
+            <a:ext cx="411480" cy="475488"/>
+          </a:xfrm>
+          <a:prstGeom prst="rect">
+            <a:avLst/>
+          </a:prstGeom>
+          <a:noFill/>
+          <a:ln/>
+        </p:spPr>
+        <p:txBody>
+          <a:bodyPr wrap="square" lIns="0" tIns="0" rIns="0" bIns="0" rtlCol="0" anchor="ctr"/>
+          <a:lstStyle/>
+          <a:p>
+            <a:pPr algn="ctr" indent="0" marL="0">
+              <a:buNone/>
+            </a:pPr>
+            <a:r>
+              <a:rPr lang="en-US" sz="1600" b="1" dirty="0">
+                <a:solidFill>
+                  <a:srgbClr val="0D9488"/>
+                </a:solidFill>
+                <a:latin typeface="Trebuchet MS" pitchFamily="34" charset="0"/>
+                <a:ea typeface="Trebuchet MS" pitchFamily="34" charset="-122"/>
+                <a:cs typeface="Trebuchet MS" pitchFamily="34" charset="-120"/>
+              </a:rPr>
+              <a:t>·</a:t>
+            </a:r>
+            <a:endParaRPr lang="en-US" sz="1600" dirty="0"/>
+          </a:p>
+        </p:txBody>
+      </p:sp>
+      <p:sp>
+        <p:nvSpPr>
+          <p:cNvPr id="29" name="Shape 27"/>
+          <p:cNvSpPr/>
+          <p:nvPr/>
+        </p:nvSpPr>
+        <p:spPr>
+          <a:xfrm>
+            <a:off x="4370832" y="3364992"/>
+            <a:ext cx="1645920" cy="475488"/>
+          </a:xfrm>
+          <a:prstGeom prst="rect">
+            <a:avLst>
+              <a:gd name="adj" fmla="val 9615"/>
+            </a:avLst>
+          </a:prstGeom>
+          <a:solidFill>
+            <a:srgbClr val="FFFFFF"/>
+          </a:solidFill>
+          <a:ln w="12700">
+            <a:solidFill>
+              <a:srgbClr val="0D9488"/>
+            </a:solidFill>
+            <a:prstDash val="solid"/>
+          </a:ln>
+        </p:spPr>
+      </p:sp>
+      <p:sp>
+        <p:nvSpPr>
+          <p:cNvPr id="30" name="Text 28"/>
+          <p:cNvSpPr/>
+          <p:nvPr/>
+        </p:nvSpPr>
+        <p:spPr>
+          <a:xfrm>
+            <a:off x="4370832" y="3364992"/>
+            <a:ext cx="1645920" cy="475488"/>
+          </a:xfrm>
+          <a:prstGeom prst="rect">
+            <a:avLst/>
+          </a:prstGeom>
+          <a:noFill/>
+          <a:ln/>
+        </p:spPr>
+        <p:txBody>
+          <a:bodyPr wrap="square" lIns="0" tIns="0" rIns="0" bIns="0" rtlCol="0" anchor="ctr"/>
+          <a:lstStyle/>
+          <a:p>
+            <a:pPr algn="ctr" indent="0" marL="0">
+              <a:buNone/>
+            </a:pPr>
+            <a:r>
+              <a:rPr lang="en-US" sz="1400" b="1" dirty="0">
+                <a:solidFill>
+                  <a:srgbClr val="0D9488"/>
+                </a:solidFill>
+                <a:latin typeface="Trebuchet MS" pitchFamily="34" charset="0"/>
+                <a:ea typeface="Trebuchet MS" pitchFamily="34" charset="-122"/>
+                <a:cs typeface="Trebuchet MS" pitchFamily="34" charset="-120"/>
+              </a:rPr>
+              <a:t>ri</a:t>
+            </a:r>
+            <a:endParaRPr lang="en-US" sz="1400" dirty="0"/>
+          </a:p>
+        </p:txBody>
+      </p:sp>
+      <p:sp>
+        <p:nvSpPr>
+          <p:cNvPr id="31" name="Text 29"/>
+          <p:cNvSpPr/>
+          <p:nvPr/>
+        </p:nvSpPr>
+        <p:spPr>
+          <a:xfrm>
+            <a:off x="6016752" y="3364992"/>
+            <a:ext cx="411480" cy="475488"/>
+          </a:xfrm>
+          <a:prstGeom prst="rect">
+            <a:avLst/>
+          </a:prstGeom>
+          <a:noFill/>
+          <a:ln/>
+        </p:spPr>
+        <p:txBody>
+          <a:bodyPr wrap="square" lIns="0" tIns="0" rIns="0" bIns="0" rtlCol="0" anchor="ctr"/>
+          <a:lstStyle/>
+          <a:p>
+            <a:pPr algn="ctr" indent="0" marL="0">
+              <a:buNone/>
+            </a:pPr>
+            <a:r>
+              <a:rPr lang="en-US" sz="1600" b="1" dirty="0">
+                <a:solidFill>
+                  <a:srgbClr val="0D9488"/>
+                </a:solidFill>
+                <a:latin typeface="Trebuchet MS" pitchFamily="34" charset="0"/>
+                <a:ea typeface="Trebuchet MS" pitchFamily="34" charset="-122"/>
+                <a:cs typeface="Trebuchet MS" pitchFamily="34" charset="-120"/>
+              </a:rPr>
+              <a:t>·</a:t>
+            </a:r>
+            <a:endParaRPr lang="en-US" sz="1600" dirty="0"/>
+          </a:p>
+        </p:txBody>
+      </p:sp>
+      <p:sp>
+        <p:nvSpPr>
+          <p:cNvPr id="32" name="Shape 30"/>
+          <p:cNvSpPr/>
+          <p:nvPr/>
+        </p:nvSpPr>
+        <p:spPr>
+          <a:xfrm>
+            <a:off x="6428232" y="3364992"/>
+            <a:ext cx="1645920" cy="475488"/>
+          </a:xfrm>
+          <a:prstGeom prst="rect">
+            <a:avLst>
+              <a:gd name="adj" fmla="val 9615"/>
+            </a:avLst>
+          </a:prstGeom>
+          <a:solidFill>
+            <a:srgbClr val="FFFFFF"/>
+          </a:solidFill>
+          <a:ln w="12700">
+            <a:solidFill>
+              <a:srgbClr val="0D9488"/>
+            </a:solidFill>
+            <a:prstDash val="solid"/>
+          </a:ln>
+        </p:spPr>
+      </p:sp>
+      <p:sp>
+        <p:nvSpPr>
+          <p:cNvPr id="33" name="Text 31"/>
+          <p:cNvSpPr/>
+          <p:nvPr/>
+        </p:nvSpPr>
+        <p:spPr>
+          <a:xfrm>
+            <a:off x="6428232" y="3364992"/>
+            <a:ext cx="1645920" cy="475488"/>
+          </a:xfrm>
+          <a:prstGeom prst="rect">
+            <a:avLst/>
+          </a:prstGeom>
+          <a:noFill/>
+          <a:ln/>
+        </p:spPr>
+        <p:txBody>
+          <a:bodyPr wrap="square" lIns="0" tIns="0" rIns="0" bIns="0" rtlCol="0" anchor="ctr"/>
+          <a:lstStyle/>
+          <a:p>
+            <a:pPr algn="ctr" indent="0" marL="0">
+              <a:buNone/>
+            </a:pPr>
+            <a:r>
+              <a:rPr lang="en-US" sz="1400" b="1" dirty="0">
+                <a:solidFill>
+                  <a:srgbClr val="0D9488"/>
+                </a:solidFill>
+                <a:latin typeface="Trebuchet MS" pitchFamily="34" charset="0"/>
+                <a:ea typeface="Trebuchet MS" pitchFamily="34" charset="-122"/>
+                <a:cs typeface="Trebuchet MS" pitchFamily="34" charset="-120"/>
+              </a:rPr>
+              <a:t>ous</a:t>
+            </a:r>
+            <a:endParaRPr lang="en-US" sz="1400" dirty="0"/>
+          </a:p>
+        </p:txBody>
+      </p:sp>
+      <p:sp>
+        <p:nvSpPr>
+          <p:cNvPr id="34" name="Shape 32"/>
+          <p:cNvSpPr/>
+          <p:nvPr/>
+        </p:nvSpPr>
+        <p:spPr>
+          <a:xfrm>
+            <a:off x="365760" y="4096512"/>
+            <a:ext cx="1371600" cy="804672"/>
+          </a:xfrm>
+          <a:prstGeom prst="rect">
+            <a:avLst>
+              <a:gd name="adj" fmla="val 6818"/>
+            </a:avLst>
+          </a:prstGeom>
+          <a:solidFill>
+            <a:srgbClr val="E2E8F0"/>
+          </a:solidFill>
+          <a:ln w="12700">
+            <a:solidFill>
+              <a:srgbClr val="E2E8F0"/>
+            </a:solidFill>
+            <a:prstDash val="solid"/>
+          </a:ln>
+        </p:spPr>
+      </p:sp>
+      <p:sp>
+        <p:nvSpPr>
+          <p:cNvPr id="35" name="Text 33"/>
+          <p:cNvSpPr/>
+          <p:nvPr/>
+        </p:nvSpPr>
+        <p:spPr>
+          <a:xfrm>
+            <a:off x="365760" y="4096512"/>
+            <a:ext cx="1371600" cy="804672"/>
+          </a:xfrm>
+          <a:prstGeom prst="rect">
+            <a:avLst/>
+          </a:prstGeom>
+          <a:noFill/>
+          <a:ln/>
+        </p:spPr>
+        <p:txBody>
+          <a:bodyPr wrap="square" lIns="0" tIns="0" rIns="0" bIns="0" rtlCol="0" anchor="ctr"/>
+          <a:lstStyle/>
+          <a:p>
+            <a:pPr algn="ctr" indent="0" marL="0">
+              <a:buNone/>
+            </a:pPr>
+            <a:r>
+              <a:rPr lang="en-US" sz="1100" b="1" dirty="0">
+                <a:solidFill>
+                  <a:srgbClr val="475569"/>
+                </a:solidFill>
+                <a:latin typeface="Trebuchet MS" pitchFamily="34" charset="0"/>
+                <a:ea typeface="Trebuchet MS" pitchFamily="34" charset="-122"/>
+                <a:cs typeface="Trebuchet MS" pitchFamily="34" charset="-120"/>
+              </a:rPr>
+              <a:t>Phonemes</a:t>
+            </a:r>
+            <a:endParaRPr lang="en-US" sz="1100" dirty="0"/>
+          </a:p>
+        </p:txBody>
+      </p:sp>
+      <p:sp>
+        <p:nvSpPr>
+          <p:cNvPr id="36" name="Shape 34"/>
+          <p:cNvSpPr/>
+          <p:nvPr/>
+        </p:nvSpPr>
+        <p:spPr>
+          <a:xfrm>
+            <a:off x="1874520" y="4096512"/>
+            <a:ext cx="6903720" cy="804672"/>
+          </a:xfrm>
+          <a:prstGeom prst="rect">
+            <a:avLst>
+              <a:gd name="adj" fmla="val 6818"/>
+            </a:avLst>
+          </a:prstGeom>
+          <a:solidFill>
+            <a:srgbClr val="FCE7F3"/>
+          </a:solidFill>
+          <a:ln w="12700">
+            <a:solidFill>
+              <a:srgbClr val="DB2777"/>
+            </a:solidFill>
+            <a:prstDash val="solid"/>
+          </a:ln>
+        </p:spPr>
+      </p:sp>
+      <p:sp>
+        <p:nvSpPr>
+          <p:cNvPr id="37" name="Shape 35"/>
+          <p:cNvSpPr/>
+          <p:nvPr/>
+        </p:nvSpPr>
+        <p:spPr>
+          <a:xfrm>
+            <a:off x="2254649" y="4169664"/>
+            <a:ext cx="685800" cy="384048"/>
+          </a:xfrm>
+          <a:prstGeom prst="rect">
+            <a:avLst>
+              <a:gd name="adj" fmla="val 9524"/>
+            </a:avLst>
+          </a:prstGeom>
+          <a:solidFill>
+            <a:srgbClr val="FFFFFF"/>
+          </a:solidFill>
+          <a:ln w="12700">
+            <a:solidFill>
+              <a:srgbClr val="DB2777"/>
+            </a:solidFill>
+            <a:prstDash val="solid"/>
+          </a:ln>
+        </p:spPr>
+      </p:sp>
+      <p:sp>
+        <p:nvSpPr>
+          <p:cNvPr id="38" name="Text 36"/>
+          <p:cNvSpPr/>
+          <p:nvPr/>
+        </p:nvSpPr>
+        <p:spPr>
+          <a:xfrm>
+            <a:off x="2254649" y="4169664"/>
+            <a:ext cx="685800" cy="384048"/>
+          </a:xfrm>
+          <a:prstGeom prst="rect">
+            <a:avLst/>
+          </a:prstGeom>
+          <a:noFill/>
+          <a:ln/>
+        </p:spPr>
+        <p:txBody>
+          <a:bodyPr wrap="square" lIns="0" tIns="0" rIns="0" bIns="0" rtlCol="0" anchor="ctr"/>
+          <a:lstStyle/>
+          <a:p>
+            <a:pPr algn="ctr" indent="0" marL="0">
+              <a:buNone/>
+            </a:pPr>
+            <a:r>
+              <a:rPr lang="en-US" sz="900" b="1" dirty="0">
+                <a:solidFill>
+                  <a:srgbClr val="9D174D"/>
+                </a:solidFill>
+                <a:latin typeface="Trebuchet MS" pitchFamily="34" charset="0"/>
+                <a:ea typeface="Trebuchet MS" pitchFamily="34" charset="-122"/>
+                <a:cs typeface="Trebuchet MS" pitchFamily="34" charset="-120"/>
+              </a:rPr>
+              <a:t>c</a:t>
+            </a:r>
+            <a:endParaRPr lang="en-US" sz="900" dirty="0"/>
+          </a:p>
+        </p:txBody>
+      </p:sp>
+      <p:sp>
+        <p:nvSpPr>
+          <p:cNvPr id="39" name="Text 37"/>
+          <p:cNvSpPr/>
+          <p:nvPr/>
+        </p:nvSpPr>
+        <p:spPr>
+          <a:xfrm>
+            <a:off x="2254649" y="4572000"/>
+            <a:ext cx="685800" cy="219456"/>
           </a:xfrm>
           <a:prstGeom prst="rect">
             <a:avLst/>
@@ -22389,232 +22503,232 @@
               <a:buNone/>
             </a:pPr>
             <a:r>
-              <a:rPr lang="en-US" sz="850" dirty="0">
-                <a:solidFill>
-                  <a:srgbClr val="475569"/>
+              <a:rPr lang="en-US" sz="750" i="1" dirty="0">
+                <a:solidFill>
+                  <a:srgbClr val="94A3B8"/>
                 </a:solidFill>
                 <a:latin typeface="Calibri" pitchFamily="34" charset="0"/>
                 <a:ea typeface="Calibri" pitchFamily="34" charset="-122"/>
                 <a:cs typeface="Calibri" pitchFamily="34" charset="-120"/>
               </a:rPr>
-              <a:t>full of, having the quality of</a:t>
-            </a:r>
-            <a:endParaRPr lang="en-US" sz="850" dirty="0"/>
-          </a:p>
-        </p:txBody>
-      </p:sp>
-      <p:sp>
-        <p:nvSpPr>
-          <p:cNvPr id="25" name="Shape 23"/>
-          <p:cNvSpPr/>
-          <p:nvPr/>
-        </p:nvSpPr>
-        <p:spPr>
-          <a:xfrm>
-            <a:off x="365760" y="3273552"/>
-            <a:ext cx="1371600" cy="658368"/>
+              <a:t>/k/</a:t>
+            </a:r>
+            <a:endParaRPr lang="en-US" sz="750" dirty="0"/>
+          </a:p>
+        </p:txBody>
+      </p:sp>
+      <p:sp>
+        <p:nvSpPr>
+          <p:cNvPr id="40" name="Shape 38"/>
+          <p:cNvSpPr/>
+          <p:nvPr/>
+        </p:nvSpPr>
+        <p:spPr>
+          <a:xfrm>
+            <a:off x="3293146" y="4169664"/>
+            <a:ext cx="685800" cy="384048"/>
           </a:xfrm>
           <a:prstGeom prst="rect">
             <a:avLst>
-              <a:gd name="adj" fmla="val 8333"/>
+              <a:gd name="adj" fmla="val 9524"/>
             </a:avLst>
           </a:prstGeom>
           <a:solidFill>
-            <a:srgbClr val="E2E8F0"/>
-          </a:solidFill>
-          <a:ln w="12700">
-            <a:solidFill>
-              <a:srgbClr val="E2E8F0"/>
-            </a:solidFill>
-            <a:prstDash val="solid"/>
-          </a:ln>
-        </p:spPr>
-      </p:sp>
-      <p:sp>
-        <p:nvSpPr>
-          <p:cNvPr id="26" name="Text 24"/>
-          <p:cNvSpPr/>
-          <p:nvPr/>
-        </p:nvSpPr>
-        <p:spPr>
-          <a:xfrm>
-            <a:off x="365760" y="3273552"/>
-            <a:ext cx="1371600" cy="658368"/>
-          </a:xfrm>
-          <a:prstGeom prst="rect">
-            <a:avLst/>
-          </a:prstGeom>
-          <a:noFill/>
-          <a:ln/>
-        </p:spPr>
-        <p:txBody>
-          <a:bodyPr wrap="square" lIns="0" tIns="0" rIns="0" bIns="0" rtlCol="0" anchor="ctr"/>
-          <a:lstStyle/>
-          <a:p>
-            <a:pPr algn="ctr" indent="0" marL="0">
-              <a:buNone/>
-            </a:pPr>
-            <a:r>
-              <a:rPr lang="en-US" sz="1100" b="1" dirty="0">
-                <a:solidFill>
-                  <a:srgbClr val="475569"/>
+            <a:srgbClr val="FFFFFF"/>
+          </a:solidFill>
+          <a:ln w="12700">
+            <a:solidFill>
+              <a:srgbClr val="DB2777"/>
+            </a:solidFill>
+            <a:prstDash val="solid"/>
+          </a:ln>
+        </p:spPr>
+      </p:sp>
+      <p:sp>
+        <p:nvSpPr>
+          <p:cNvPr id="41" name="Text 39"/>
+          <p:cNvSpPr/>
+          <p:nvPr/>
+        </p:nvSpPr>
+        <p:spPr>
+          <a:xfrm>
+            <a:off x="3293146" y="4169664"/>
+            <a:ext cx="685800" cy="384048"/>
+          </a:xfrm>
+          <a:prstGeom prst="rect">
+            <a:avLst/>
+          </a:prstGeom>
+          <a:noFill/>
+          <a:ln/>
+        </p:spPr>
+        <p:txBody>
+          <a:bodyPr wrap="square" lIns="0" tIns="0" rIns="0" bIns="0" rtlCol="0" anchor="ctr"/>
+          <a:lstStyle/>
+          <a:p>
+            <a:pPr algn="ctr" indent="0" marL="0">
+              <a:buNone/>
+            </a:pPr>
+            <a:r>
+              <a:rPr lang="en-US" sz="900" b="1" dirty="0">
+                <a:solidFill>
+                  <a:srgbClr val="9D174D"/>
                 </a:solidFill>
                 <a:latin typeface="Trebuchet MS" pitchFamily="34" charset="0"/>
                 <a:ea typeface="Trebuchet MS" pitchFamily="34" charset="-122"/>
                 <a:cs typeface="Trebuchet MS" pitchFamily="34" charset="-120"/>
               </a:rPr>
-              <a:t>Syllables</a:t>
-            </a:r>
-            <a:endParaRPr lang="en-US" sz="1100" dirty="0"/>
-          </a:p>
-        </p:txBody>
-      </p:sp>
-      <p:sp>
-        <p:nvSpPr>
-          <p:cNvPr id="27" name="Shape 25"/>
-          <p:cNvSpPr/>
-          <p:nvPr/>
-        </p:nvSpPr>
-        <p:spPr>
-          <a:xfrm>
-            <a:off x="1874520" y="3273552"/>
-            <a:ext cx="6903720" cy="658368"/>
+              <a:t>u</a:t>
+            </a:r>
+            <a:endParaRPr lang="en-US" sz="900" dirty="0"/>
+          </a:p>
+        </p:txBody>
+      </p:sp>
+      <p:sp>
+        <p:nvSpPr>
+          <p:cNvPr id="42" name="Shape 40"/>
+          <p:cNvSpPr/>
+          <p:nvPr/>
+        </p:nvSpPr>
+        <p:spPr>
+          <a:xfrm>
+            <a:off x="4331643" y="4169664"/>
+            <a:ext cx="685800" cy="384048"/>
           </a:xfrm>
           <a:prstGeom prst="rect">
             <a:avLst>
-              <a:gd name="adj" fmla="val 8333"/>
+              <a:gd name="adj" fmla="val 9524"/>
             </a:avLst>
           </a:prstGeom>
           <a:solidFill>
-            <a:srgbClr val="CCFBF1"/>
-          </a:solidFill>
-          <a:ln w="12700">
-            <a:solidFill>
-              <a:srgbClr val="0D9488"/>
-            </a:solidFill>
-            <a:prstDash val="solid"/>
-          </a:ln>
-        </p:spPr>
-      </p:sp>
-      <p:sp>
-        <p:nvSpPr>
-          <p:cNvPr id="28" name="Shape 26"/>
-          <p:cNvSpPr/>
-          <p:nvPr/>
-        </p:nvSpPr>
-        <p:spPr>
-          <a:xfrm>
-            <a:off x="1975104" y="3364992"/>
-            <a:ext cx="1554480" cy="475488"/>
-          </a:xfrm>
-          <a:prstGeom prst="rect">
-            <a:avLst>
-              <a:gd name="adj" fmla="val 9615"/>
-            </a:avLst>
-          </a:prstGeom>
-          <a:solidFill>
             <a:srgbClr val="FFFFFF"/>
           </a:solidFill>
           <a:ln w="12700">
             <a:solidFill>
-              <a:srgbClr val="0D9488"/>
-            </a:solidFill>
-            <a:prstDash val="solid"/>
-          </a:ln>
-        </p:spPr>
-      </p:sp>
-      <p:sp>
-        <p:nvSpPr>
-          <p:cNvPr id="29" name="Text 27"/>
-          <p:cNvSpPr/>
-          <p:nvPr/>
-        </p:nvSpPr>
-        <p:spPr>
-          <a:xfrm>
-            <a:off x="1975104" y="3364992"/>
-            <a:ext cx="1554480" cy="475488"/>
-          </a:xfrm>
-          <a:prstGeom prst="rect">
-            <a:avLst/>
-          </a:prstGeom>
-          <a:noFill/>
-          <a:ln/>
-        </p:spPr>
-        <p:txBody>
-          <a:bodyPr wrap="square" lIns="0" tIns="0" rIns="0" bIns="0" rtlCol="0" anchor="ctr"/>
-          <a:lstStyle/>
-          <a:p>
-            <a:pPr algn="ctr" indent="0" marL="0">
-              <a:buNone/>
-            </a:pPr>
-            <a:r>
-              <a:rPr lang="en-US" sz="1400" b="1" dirty="0">
-                <a:solidFill>
-                  <a:srgbClr val="0D9488"/>
+              <a:srgbClr val="DB2777"/>
+            </a:solidFill>
+            <a:prstDash val="solid"/>
+          </a:ln>
+        </p:spPr>
+      </p:sp>
+      <p:sp>
+        <p:nvSpPr>
+          <p:cNvPr id="43" name="Text 41"/>
+          <p:cNvSpPr/>
+          <p:nvPr/>
+        </p:nvSpPr>
+        <p:spPr>
+          <a:xfrm>
+            <a:off x="4331643" y="4169664"/>
+            <a:ext cx="685800" cy="384048"/>
+          </a:xfrm>
+          <a:prstGeom prst="rect">
+            <a:avLst/>
+          </a:prstGeom>
+          <a:noFill/>
+          <a:ln/>
+        </p:spPr>
+        <p:txBody>
+          <a:bodyPr wrap="square" lIns="0" tIns="0" rIns="0" bIns="0" rtlCol="0" anchor="ctr"/>
+          <a:lstStyle/>
+          <a:p>
+            <a:pPr algn="ctr" indent="0" marL="0">
+              <a:buNone/>
+            </a:pPr>
+            <a:r>
+              <a:rPr lang="en-US" sz="900" b="1" dirty="0">
+                <a:solidFill>
+                  <a:srgbClr val="9D174D"/>
                 </a:solidFill>
                 <a:latin typeface="Trebuchet MS" pitchFamily="34" charset="0"/>
                 <a:ea typeface="Trebuchet MS" pitchFamily="34" charset="-122"/>
                 <a:cs typeface="Trebuchet MS" pitchFamily="34" charset="-120"/>
               </a:rPr>
-              <a:t>vic</a:t>
-            </a:r>
-            <a:endParaRPr lang="en-US" sz="1400" dirty="0"/>
-          </a:p>
-        </p:txBody>
-      </p:sp>
-      <p:sp>
-        <p:nvSpPr>
-          <p:cNvPr id="30" name="Text 28"/>
-          <p:cNvSpPr/>
-          <p:nvPr/>
-        </p:nvSpPr>
-        <p:spPr>
-          <a:xfrm>
-            <a:off x="3529584" y="3364992"/>
-            <a:ext cx="73152" cy="475488"/>
-          </a:xfrm>
-          <a:prstGeom prst="rect">
-            <a:avLst/>
-          </a:prstGeom>
-          <a:noFill/>
-          <a:ln/>
-        </p:spPr>
-        <p:txBody>
-          <a:bodyPr wrap="square" lIns="0" tIns="0" rIns="0" bIns="0" rtlCol="0" anchor="ctr"/>
-          <a:lstStyle/>
-          <a:p>
-            <a:pPr algn="ctr" indent="0" marL="0">
-              <a:buNone/>
-            </a:pPr>
-            <a:r>
-              <a:rPr lang="en-US" sz="1600" b="1" dirty="0">
-                <a:solidFill>
-                  <a:srgbClr val="0D9488"/>
+              <a:t>r</a:t>
+            </a:r>
+            <a:endParaRPr lang="en-US" sz="900" dirty="0"/>
+          </a:p>
+        </p:txBody>
+      </p:sp>
+      <p:sp>
+        <p:nvSpPr>
+          <p:cNvPr id="44" name="Shape 42"/>
+          <p:cNvSpPr/>
+          <p:nvPr/>
+        </p:nvSpPr>
+        <p:spPr>
+          <a:xfrm>
+            <a:off x="5370141" y="4169664"/>
+            <a:ext cx="685800" cy="384048"/>
+          </a:xfrm>
+          <a:prstGeom prst="rect">
+            <a:avLst>
+              <a:gd name="adj" fmla="val 9524"/>
+            </a:avLst>
+          </a:prstGeom>
+          <a:solidFill>
+            <a:srgbClr val="FFFFFF"/>
+          </a:solidFill>
+          <a:ln w="12700">
+            <a:solidFill>
+              <a:srgbClr val="DB2777"/>
+            </a:solidFill>
+            <a:prstDash val="solid"/>
+          </a:ln>
+        </p:spPr>
+      </p:sp>
+      <p:sp>
+        <p:nvSpPr>
+          <p:cNvPr id="45" name="Text 43"/>
+          <p:cNvSpPr/>
+          <p:nvPr/>
+        </p:nvSpPr>
+        <p:spPr>
+          <a:xfrm>
+            <a:off x="5370141" y="4169664"/>
+            <a:ext cx="685800" cy="384048"/>
+          </a:xfrm>
+          <a:prstGeom prst="rect">
+            <a:avLst/>
+          </a:prstGeom>
+          <a:noFill/>
+          <a:ln/>
+        </p:spPr>
+        <p:txBody>
+          <a:bodyPr wrap="square" lIns="0" tIns="0" rIns="0" bIns="0" rtlCol="0" anchor="ctr"/>
+          <a:lstStyle/>
+          <a:p>
+            <a:pPr algn="ctr" indent="0" marL="0">
+              <a:buNone/>
+            </a:pPr>
+            <a:r>
+              <a:rPr lang="en-US" sz="900" b="1" dirty="0">
+                <a:solidFill>
+                  <a:srgbClr val="9D174D"/>
                 </a:solidFill>
                 <a:latin typeface="Trebuchet MS" pitchFamily="34" charset="0"/>
                 <a:ea typeface="Trebuchet MS" pitchFamily="34" charset="-122"/>
                 <a:cs typeface="Trebuchet MS" pitchFamily="34" charset="-120"/>
               </a:rPr>
-              <a:t>·</a:t>
-            </a:r>
-            <a:endParaRPr lang="en-US" sz="1600" dirty="0"/>
-          </a:p>
-        </p:txBody>
-      </p:sp>
-      <p:sp>
-        <p:nvSpPr>
-          <p:cNvPr id="31" name="Shape 29"/>
-          <p:cNvSpPr/>
-          <p:nvPr/>
-        </p:nvSpPr>
-        <p:spPr>
-          <a:xfrm>
-            <a:off x="3602736" y="3364992"/>
-            <a:ext cx="1554480" cy="475488"/>
+              <a:t>i</a:t>
+            </a:r>
+            <a:endParaRPr lang="en-US" sz="900" dirty="0"/>
+          </a:p>
+        </p:txBody>
+      </p:sp>
+      <p:sp>
+        <p:nvSpPr>
+          <p:cNvPr id="46" name="Shape 44"/>
+          <p:cNvSpPr/>
+          <p:nvPr/>
+        </p:nvSpPr>
+        <p:spPr>
+          <a:xfrm>
+            <a:off x="6408638" y="4169664"/>
+            <a:ext cx="685800" cy="384048"/>
           </a:xfrm>
           <a:prstGeom prst="rect">
             <a:avLst>
-              <a:gd name="adj" fmla="val 9615"/>
+              <a:gd name="adj" fmla="val 9524"/>
             </a:avLst>
           </a:prstGeom>
           <a:solidFill>
@@ -22622,363 +22736,60 @@
           </a:solidFill>
           <a:ln w="12700">
             <a:solidFill>
-              <a:srgbClr val="0D9488"/>
-            </a:solidFill>
-            <a:prstDash val="solid"/>
-          </a:ln>
-        </p:spPr>
-      </p:sp>
-      <p:sp>
-        <p:nvSpPr>
-          <p:cNvPr id="32" name="Text 30"/>
-          <p:cNvSpPr/>
-          <p:nvPr/>
-        </p:nvSpPr>
-        <p:spPr>
-          <a:xfrm>
-            <a:off x="3602736" y="3364992"/>
-            <a:ext cx="1554480" cy="475488"/>
-          </a:xfrm>
-          <a:prstGeom prst="rect">
-            <a:avLst/>
-          </a:prstGeom>
-          <a:noFill/>
-          <a:ln/>
-        </p:spPr>
-        <p:txBody>
-          <a:bodyPr wrap="square" lIns="0" tIns="0" rIns="0" bIns="0" rtlCol="0" anchor="ctr"/>
-          <a:lstStyle/>
-          <a:p>
-            <a:pPr algn="ctr" indent="0" marL="0">
-              <a:buNone/>
-            </a:pPr>
-            <a:r>
-              <a:rPr lang="en-US" sz="1400" b="1" dirty="0">
-                <a:solidFill>
-                  <a:srgbClr val="0D9488"/>
+              <a:srgbClr val="DB2777"/>
+            </a:solidFill>
+            <a:prstDash val="solid"/>
+          </a:ln>
+        </p:spPr>
+      </p:sp>
+      <p:sp>
+        <p:nvSpPr>
+          <p:cNvPr id="47" name="Text 45"/>
+          <p:cNvSpPr/>
+          <p:nvPr/>
+        </p:nvSpPr>
+        <p:spPr>
+          <a:xfrm>
+            <a:off x="6408638" y="4169664"/>
+            <a:ext cx="685800" cy="384048"/>
+          </a:xfrm>
+          <a:prstGeom prst="rect">
+            <a:avLst/>
+          </a:prstGeom>
+          <a:noFill/>
+          <a:ln/>
+        </p:spPr>
+        <p:txBody>
+          <a:bodyPr wrap="square" lIns="0" tIns="0" rIns="0" bIns="0" rtlCol="0" anchor="ctr"/>
+          <a:lstStyle/>
+          <a:p>
+            <a:pPr algn="ctr" indent="0" marL="0">
+              <a:buNone/>
+            </a:pPr>
+            <a:r>
+              <a:rPr lang="en-US" sz="900" b="1" dirty="0">
+                <a:solidFill>
+                  <a:srgbClr val="9D174D"/>
                 </a:solidFill>
                 <a:latin typeface="Trebuchet MS" pitchFamily="34" charset="0"/>
                 <a:ea typeface="Trebuchet MS" pitchFamily="34" charset="-122"/>
                 <a:cs typeface="Trebuchet MS" pitchFamily="34" charset="-120"/>
               </a:rPr>
-              <a:t>tor</a:t>
-            </a:r>
-            <a:endParaRPr lang="en-US" sz="1400" dirty="0"/>
-          </a:p>
-        </p:txBody>
-      </p:sp>
-      <p:sp>
-        <p:nvSpPr>
-          <p:cNvPr id="33" name="Text 31"/>
-          <p:cNvSpPr/>
-          <p:nvPr/>
-        </p:nvSpPr>
-        <p:spPr>
-          <a:xfrm>
-            <a:off x="5157216" y="3364992"/>
-            <a:ext cx="73152" cy="475488"/>
-          </a:xfrm>
-          <a:prstGeom prst="rect">
-            <a:avLst/>
-          </a:prstGeom>
-          <a:noFill/>
-          <a:ln/>
-        </p:spPr>
-        <p:txBody>
-          <a:bodyPr wrap="square" lIns="0" tIns="0" rIns="0" bIns="0" rtlCol="0" anchor="ctr"/>
-          <a:lstStyle/>
-          <a:p>
-            <a:pPr algn="ctr" indent="0" marL="0">
-              <a:buNone/>
-            </a:pPr>
-            <a:r>
-              <a:rPr lang="en-US" sz="1600" b="1" dirty="0">
-                <a:solidFill>
-                  <a:srgbClr val="0D9488"/>
-                </a:solidFill>
-                <a:latin typeface="Trebuchet MS" pitchFamily="34" charset="0"/>
-                <a:ea typeface="Trebuchet MS" pitchFamily="34" charset="-122"/>
-                <a:cs typeface="Trebuchet MS" pitchFamily="34" charset="-120"/>
-              </a:rPr>
-              <a:t>·</a:t>
-            </a:r>
-            <a:endParaRPr lang="en-US" sz="1600" dirty="0"/>
-          </a:p>
-        </p:txBody>
-      </p:sp>
-      <p:sp>
-        <p:nvSpPr>
-          <p:cNvPr id="34" name="Shape 32"/>
-          <p:cNvSpPr/>
-          <p:nvPr/>
-        </p:nvSpPr>
-        <p:spPr>
-          <a:xfrm>
-            <a:off x="5230368" y="3364992"/>
-            <a:ext cx="1554480" cy="475488"/>
-          </a:xfrm>
-          <a:prstGeom prst="rect">
-            <a:avLst>
-              <a:gd name="adj" fmla="val 9615"/>
-            </a:avLst>
-          </a:prstGeom>
-          <a:solidFill>
-            <a:srgbClr val="FFFFFF"/>
-          </a:solidFill>
-          <a:ln w="12700">
-            <a:solidFill>
-              <a:srgbClr val="0D9488"/>
-            </a:solidFill>
-            <a:prstDash val="solid"/>
-          </a:ln>
-        </p:spPr>
-      </p:sp>
-      <p:sp>
-        <p:nvSpPr>
-          <p:cNvPr id="35" name="Text 33"/>
-          <p:cNvSpPr/>
-          <p:nvPr/>
-        </p:nvSpPr>
-        <p:spPr>
-          <a:xfrm>
-            <a:off x="5230368" y="3364992"/>
-            <a:ext cx="1554480" cy="475488"/>
-          </a:xfrm>
-          <a:prstGeom prst="rect">
-            <a:avLst/>
-          </a:prstGeom>
-          <a:noFill/>
-          <a:ln/>
-        </p:spPr>
-        <p:txBody>
-          <a:bodyPr wrap="square" lIns="0" tIns="0" rIns="0" bIns="0" rtlCol="0" anchor="ctr"/>
-          <a:lstStyle/>
-          <a:p>
-            <a:pPr algn="ctr" indent="0" marL="0">
-              <a:buNone/>
-            </a:pPr>
-            <a:r>
-              <a:rPr lang="en-US" sz="1400" b="1" dirty="0">
-                <a:solidFill>
-                  <a:srgbClr val="0D9488"/>
-                </a:solidFill>
-                <a:latin typeface="Trebuchet MS" pitchFamily="34" charset="0"/>
-                <a:ea typeface="Trebuchet MS" pitchFamily="34" charset="-122"/>
-                <a:cs typeface="Trebuchet MS" pitchFamily="34" charset="-120"/>
-              </a:rPr>
-              <a:t>i</a:t>
-            </a:r>
-            <a:endParaRPr lang="en-US" sz="1400" dirty="0"/>
-          </a:p>
-        </p:txBody>
-      </p:sp>
-      <p:sp>
-        <p:nvSpPr>
-          <p:cNvPr id="36" name="Text 34"/>
-          <p:cNvSpPr/>
-          <p:nvPr/>
-        </p:nvSpPr>
-        <p:spPr>
-          <a:xfrm>
-            <a:off x="6784848" y="3364992"/>
-            <a:ext cx="73152" cy="475488"/>
-          </a:xfrm>
-          <a:prstGeom prst="rect">
-            <a:avLst/>
-          </a:prstGeom>
-          <a:noFill/>
-          <a:ln/>
-        </p:spPr>
-        <p:txBody>
-          <a:bodyPr wrap="square" lIns="0" tIns="0" rIns="0" bIns="0" rtlCol="0" anchor="ctr"/>
-          <a:lstStyle/>
-          <a:p>
-            <a:pPr algn="ctr" indent="0" marL="0">
-              <a:buNone/>
-            </a:pPr>
-            <a:r>
-              <a:rPr lang="en-US" sz="1600" b="1" dirty="0">
-                <a:solidFill>
-                  <a:srgbClr val="0D9488"/>
-                </a:solidFill>
-                <a:latin typeface="Trebuchet MS" pitchFamily="34" charset="0"/>
-                <a:ea typeface="Trebuchet MS" pitchFamily="34" charset="-122"/>
-                <a:cs typeface="Trebuchet MS" pitchFamily="34" charset="-120"/>
-              </a:rPr>
-              <a:t>·</a:t>
-            </a:r>
-            <a:endParaRPr lang="en-US" sz="1600" dirty="0"/>
-          </a:p>
-        </p:txBody>
-      </p:sp>
-      <p:sp>
-        <p:nvSpPr>
-          <p:cNvPr id="37" name="Shape 35"/>
-          <p:cNvSpPr/>
-          <p:nvPr/>
-        </p:nvSpPr>
-        <p:spPr>
-          <a:xfrm>
-            <a:off x="6858000" y="3364992"/>
-            <a:ext cx="1554480" cy="475488"/>
-          </a:xfrm>
-          <a:prstGeom prst="rect">
-            <a:avLst>
-              <a:gd name="adj" fmla="val 9615"/>
-            </a:avLst>
-          </a:prstGeom>
-          <a:solidFill>
-            <a:srgbClr val="FFFFFF"/>
-          </a:solidFill>
-          <a:ln w="12700">
-            <a:solidFill>
-              <a:srgbClr val="0D9488"/>
-            </a:solidFill>
-            <a:prstDash val="solid"/>
-          </a:ln>
-        </p:spPr>
-      </p:sp>
-      <p:sp>
-        <p:nvSpPr>
-          <p:cNvPr id="38" name="Text 36"/>
-          <p:cNvSpPr/>
-          <p:nvPr/>
-        </p:nvSpPr>
-        <p:spPr>
-          <a:xfrm>
-            <a:off x="6858000" y="3364992"/>
-            <a:ext cx="1554480" cy="475488"/>
-          </a:xfrm>
-          <a:prstGeom prst="rect">
-            <a:avLst/>
-          </a:prstGeom>
-          <a:noFill/>
-          <a:ln/>
-        </p:spPr>
-        <p:txBody>
-          <a:bodyPr wrap="square" lIns="0" tIns="0" rIns="0" bIns="0" rtlCol="0" anchor="ctr"/>
-          <a:lstStyle/>
-          <a:p>
-            <a:pPr algn="ctr" indent="0" marL="0">
-              <a:buNone/>
-            </a:pPr>
-            <a:r>
-              <a:rPr lang="en-US" sz="1400" b="1" dirty="0">
-                <a:solidFill>
-                  <a:srgbClr val="0D9488"/>
-                </a:solidFill>
-                <a:latin typeface="Trebuchet MS" pitchFamily="34" charset="0"/>
-                <a:ea typeface="Trebuchet MS" pitchFamily="34" charset="-122"/>
-                <a:cs typeface="Trebuchet MS" pitchFamily="34" charset="-120"/>
-              </a:rPr>
-              <a:t>ous</a:t>
-            </a:r>
-            <a:endParaRPr lang="en-US" sz="1400" dirty="0"/>
-          </a:p>
-        </p:txBody>
-      </p:sp>
-      <p:sp>
-        <p:nvSpPr>
-          <p:cNvPr id="39" name="Shape 37"/>
-          <p:cNvSpPr/>
-          <p:nvPr/>
-        </p:nvSpPr>
-        <p:spPr>
-          <a:xfrm>
-            <a:off x="365760" y="4096512"/>
-            <a:ext cx="1371600" cy="804672"/>
-          </a:xfrm>
-          <a:prstGeom prst="rect">
-            <a:avLst>
-              <a:gd name="adj" fmla="val 6818"/>
-            </a:avLst>
-          </a:prstGeom>
-          <a:solidFill>
-            <a:srgbClr val="E2E8F0"/>
-          </a:solidFill>
-          <a:ln w="12700">
-            <a:solidFill>
-              <a:srgbClr val="E2E8F0"/>
-            </a:solidFill>
-            <a:prstDash val="solid"/>
-          </a:ln>
-        </p:spPr>
-      </p:sp>
-      <p:sp>
-        <p:nvSpPr>
-          <p:cNvPr id="40" name="Text 38"/>
-          <p:cNvSpPr/>
-          <p:nvPr/>
-        </p:nvSpPr>
-        <p:spPr>
-          <a:xfrm>
-            <a:off x="365760" y="4096512"/>
-            <a:ext cx="1371600" cy="804672"/>
-          </a:xfrm>
-          <a:prstGeom prst="rect">
-            <a:avLst/>
-          </a:prstGeom>
-          <a:noFill/>
-          <a:ln/>
-        </p:spPr>
-        <p:txBody>
-          <a:bodyPr wrap="square" lIns="0" tIns="0" rIns="0" bIns="0" rtlCol="0" anchor="ctr"/>
-          <a:lstStyle/>
-          <a:p>
-            <a:pPr algn="ctr" indent="0" marL="0">
-              <a:buNone/>
-            </a:pPr>
-            <a:r>
-              <a:rPr lang="en-US" sz="1100" b="1" dirty="0">
-                <a:solidFill>
-                  <a:srgbClr val="475569"/>
-                </a:solidFill>
-                <a:latin typeface="Trebuchet MS" pitchFamily="34" charset="0"/>
-                <a:ea typeface="Trebuchet MS" pitchFamily="34" charset="-122"/>
-                <a:cs typeface="Trebuchet MS" pitchFamily="34" charset="-120"/>
-              </a:rPr>
-              <a:t>Phonemes</a:t>
-            </a:r>
-            <a:endParaRPr lang="en-US" sz="1100" dirty="0"/>
-          </a:p>
-        </p:txBody>
-      </p:sp>
-      <p:sp>
-        <p:nvSpPr>
-          <p:cNvPr id="41" name="Shape 39"/>
-          <p:cNvSpPr/>
-          <p:nvPr/>
-        </p:nvSpPr>
-        <p:spPr>
-          <a:xfrm>
-            <a:off x="1874520" y="4096512"/>
-            <a:ext cx="6903720" cy="804672"/>
-          </a:xfrm>
-          <a:prstGeom prst="rect">
-            <a:avLst>
-              <a:gd name="adj" fmla="val 6818"/>
-            </a:avLst>
-          </a:prstGeom>
-          <a:solidFill>
-            <a:srgbClr val="FCE7F3"/>
-          </a:solidFill>
-          <a:ln w="12700">
-            <a:solidFill>
-              <a:srgbClr val="DB2777"/>
-            </a:solidFill>
-            <a:prstDash val="solid"/>
-          </a:ln>
-        </p:spPr>
-      </p:sp>
-      <p:sp>
-        <p:nvSpPr>
-          <p:cNvPr id="42" name="Shape 40"/>
-          <p:cNvSpPr/>
-          <p:nvPr/>
-        </p:nvSpPr>
-        <p:spPr>
-          <a:xfrm>
-            <a:off x="2023872" y="4169664"/>
+              <a:t>ou</a:t>
+            </a:r>
+            <a:endParaRPr lang="en-US" sz="900" dirty="0"/>
+          </a:p>
+        </p:txBody>
+      </p:sp>
+      <p:sp>
+        <p:nvSpPr>
+          <p:cNvPr id="48" name="Shape 46"/>
+          <p:cNvSpPr/>
+          <p:nvPr/>
+        </p:nvSpPr>
+        <p:spPr>
+          <a:xfrm>
+            <a:off x="7447135" y="4169664"/>
             <a:ext cx="685800" cy="384048"/>
           </a:xfrm>
           <a:prstGeom prst="rect">
@@ -22999,553 +22810,13 @@
       </p:sp>
       <p:sp>
         <p:nvSpPr>
-          <p:cNvPr id="43" name="Text 41"/>
-          <p:cNvSpPr/>
-          <p:nvPr/>
-        </p:nvSpPr>
-        <p:spPr>
-          <a:xfrm>
-            <a:off x="2023872" y="4169664"/>
-            <a:ext cx="685800" cy="384048"/>
-          </a:xfrm>
-          <a:prstGeom prst="rect">
-            <a:avLst/>
-          </a:prstGeom>
-          <a:noFill/>
-          <a:ln/>
-        </p:spPr>
-        <p:txBody>
-          <a:bodyPr wrap="square" lIns="0" tIns="0" rIns="0" bIns="0" rtlCol="0" anchor="ctr"/>
-          <a:lstStyle/>
-          <a:p>
-            <a:pPr algn="ctr" indent="0" marL="0">
-              <a:buNone/>
-            </a:pPr>
-            <a:r>
-              <a:rPr lang="en-US" sz="900" b="1" dirty="0">
-                <a:solidFill>
-                  <a:srgbClr val="9D174D"/>
-                </a:solidFill>
-                <a:latin typeface="Trebuchet MS" pitchFamily="34" charset="0"/>
-                <a:ea typeface="Trebuchet MS" pitchFamily="34" charset="-122"/>
-                <a:cs typeface="Trebuchet MS" pitchFamily="34" charset="-120"/>
-              </a:rPr>
-              <a:t>v</a:t>
-            </a:r>
-            <a:endParaRPr lang="en-US" sz="900" dirty="0"/>
-          </a:p>
-        </p:txBody>
-      </p:sp>
-      <p:sp>
-        <p:nvSpPr>
-          <p:cNvPr id="44" name="Shape 42"/>
-          <p:cNvSpPr/>
-          <p:nvPr/>
-        </p:nvSpPr>
-        <p:spPr>
-          <a:xfrm>
-            <a:off x="2831592" y="4169664"/>
-            <a:ext cx="685800" cy="384048"/>
-          </a:xfrm>
-          <a:prstGeom prst="rect">
-            <a:avLst>
-              <a:gd name="adj" fmla="val 9524"/>
-            </a:avLst>
-          </a:prstGeom>
-          <a:solidFill>
-            <a:srgbClr val="FFFFFF"/>
-          </a:solidFill>
-          <a:ln w="12700">
-            <a:solidFill>
-              <a:srgbClr val="DB2777"/>
-            </a:solidFill>
-            <a:prstDash val="solid"/>
-          </a:ln>
-        </p:spPr>
-      </p:sp>
-      <p:sp>
-        <p:nvSpPr>
-          <p:cNvPr id="45" name="Text 43"/>
-          <p:cNvSpPr/>
-          <p:nvPr/>
-        </p:nvSpPr>
-        <p:spPr>
-          <a:xfrm>
-            <a:off x="2831592" y="4169664"/>
-            <a:ext cx="685800" cy="384048"/>
-          </a:xfrm>
-          <a:prstGeom prst="rect">
-            <a:avLst/>
-          </a:prstGeom>
-          <a:noFill/>
-          <a:ln/>
-        </p:spPr>
-        <p:txBody>
-          <a:bodyPr wrap="square" lIns="0" tIns="0" rIns="0" bIns="0" rtlCol="0" anchor="ctr"/>
-          <a:lstStyle/>
-          <a:p>
-            <a:pPr algn="ctr" indent="0" marL="0">
-              <a:buNone/>
-            </a:pPr>
-            <a:r>
-              <a:rPr lang="en-US" sz="900" b="1" dirty="0">
-                <a:solidFill>
-                  <a:srgbClr val="9D174D"/>
-                </a:solidFill>
-                <a:latin typeface="Trebuchet MS" pitchFamily="34" charset="0"/>
-                <a:ea typeface="Trebuchet MS" pitchFamily="34" charset="-122"/>
-                <a:cs typeface="Trebuchet MS" pitchFamily="34" charset="-120"/>
-              </a:rPr>
-              <a:t>i</a:t>
-            </a:r>
-            <a:endParaRPr lang="en-US" sz="900" dirty="0"/>
-          </a:p>
-        </p:txBody>
-      </p:sp>
-      <p:sp>
-        <p:nvSpPr>
-          <p:cNvPr id="46" name="Shape 44"/>
-          <p:cNvSpPr/>
-          <p:nvPr/>
-        </p:nvSpPr>
-        <p:spPr>
-          <a:xfrm>
-            <a:off x="3639312" y="4169664"/>
-            <a:ext cx="685800" cy="384048"/>
-          </a:xfrm>
-          <a:prstGeom prst="rect">
-            <a:avLst>
-              <a:gd name="adj" fmla="val 9524"/>
-            </a:avLst>
-          </a:prstGeom>
-          <a:solidFill>
-            <a:srgbClr val="FFFFFF"/>
-          </a:solidFill>
-          <a:ln w="12700">
-            <a:solidFill>
-              <a:srgbClr val="DB2777"/>
-            </a:solidFill>
-            <a:prstDash val="solid"/>
-          </a:ln>
-        </p:spPr>
-      </p:sp>
-      <p:sp>
-        <p:nvSpPr>
-          <p:cNvPr id="47" name="Text 45"/>
-          <p:cNvSpPr/>
-          <p:nvPr/>
-        </p:nvSpPr>
-        <p:spPr>
-          <a:xfrm>
-            <a:off x="3639312" y="4169664"/>
-            <a:ext cx="685800" cy="384048"/>
-          </a:xfrm>
-          <a:prstGeom prst="rect">
-            <a:avLst/>
-          </a:prstGeom>
-          <a:noFill/>
-          <a:ln/>
-        </p:spPr>
-        <p:txBody>
-          <a:bodyPr wrap="square" lIns="0" tIns="0" rIns="0" bIns="0" rtlCol="0" anchor="ctr"/>
-          <a:lstStyle/>
-          <a:p>
-            <a:pPr algn="ctr" indent="0" marL="0">
-              <a:buNone/>
-            </a:pPr>
-            <a:r>
-              <a:rPr lang="en-US" sz="900" b="1" dirty="0">
-                <a:solidFill>
-                  <a:srgbClr val="9D174D"/>
-                </a:solidFill>
-                <a:latin typeface="Trebuchet MS" pitchFamily="34" charset="0"/>
-                <a:ea typeface="Trebuchet MS" pitchFamily="34" charset="-122"/>
-                <a:cs typeface="Trebuchet MS" pitchFamily="34" charset="-120"/>
-              </a:rPr>
-              <a:t>c</a:t>
-            </a:r>
-            <a:endParaRPr lang="en-US" sz="900" dirty="0"/>
-          </a:p>
-        </p:txBody>
-      </p:sp>
-      <p:sp>
-        <p:nvSpPr>
-          <p:cNvPr id="48" name="Text 46"/>
-          <p:cNvSpPr/>
-          <p:nvPr/>
-        </p:nvSpPr>
-        <p:spPr>
-          <a:xfrm>
-            <a:off x="3639312" y="4572000"/>
-            <a:ext cx="685800" cy="219456"/>
-          </a:xfrm>
-          <a:prstGeom prst="rect">
-            <a:avLst/>
-          </a:prstGeom>
-          <a:noFill/>
-          <a:ln/>
-        </p:spPr>
-        <p:txBody>
-          <a:bodyPr wrap="square" lIns="0" tIns="0" rIns="0" bIns="0" rtlCol="0" anchor="t"/>
-          <a:lstStyle/>
-          <a:p>
-            <a:pPr algn="ctr" indent="0" marL="0">
-              <a:buNone/>
-            </a:pPr>
-            <a:r>
-              <a:rPr lang="en-US" sz="750" i="1" dirty="0">
-                <a:solidFill>
-                  <a:srgbClr val="94A3B8"/>
-                </a:solidFill>
-                <a:latin typeface="Calibri" pitchFamily="34" charset="0"/>
-                <a:ea typeface="Calibri" pitchFamily="34" charset="-122"/>
-                <a:cs typeface="Calibri" pitchFamily="34" charset="-120"/>
-              </a:rPr>
-              <a:t>/k/</a:t>
-            </a:r>
-            <a:endParaRPr lang="en-US" sz="750" dirty="0"/>
-          </a:p>
-        </p:txBody>
-      </p:sp>
-      <p:sp>
-        <p:nvSpPr>
-          <p:cNvPr id="49" name="Shape 47"/>
-          <p:cNvSpPr/>
-          <p:nvPr/>
-        </p:nvSpPr>
-        <p:spPr>
-          <a:xfrm>
-            <a:off x="4447032" y="4169664"/>
-            <a:ext cx="685800" cy="384048"/>
-          </a:xfrm>
-          <a:prstGeom prst="rect">
-            <a:avLst>
-              <a:gd name="adj" fmla="val 9524"/>
-            </a:avLst>
-          </a:prstGeom>
-          <a:solidFill>
-            <a:srgbClr val="FFFFFF"/>
-          </a:solidFill>
-          <a:ln w="12700">
-            <a:solidFill>
-              <a:srgbClr val="DB2777"/>
-            </a:solidFill>
-            <a:prstDash val="solid"/>
-          </a:ln>
-        </p:spPr>
-      </p:sp>
-      <p:sp>
-        <p:nvSpPr>
-          <p:cNvPr id="50" name="Text 48"/>
-          <p:cNvSpPr/>
-          <p:nvPr/>
-        </p:nvSpPr>
-        <p:spPr>
-          <a:xfrm>
-            <a:off x="4447032" y="4169664"/>
-            <a:ext cx="685800" cy="384048"/>
-          </a:xfrm>
-          <a:prstGeom prst="rect">
-            <a:avLst/>
-          </a:prstGeom>
-          <a:noFill/>
-          <a:ln/>
-        </p:spPr>
-        <p:txBody>
-          <a:bodyPr wrap="square" lIns="0" tIns="0" rIns="0" bIns="0" rtlCol="0" anchor="ctr"/>
-          <a:lstStyle/>
-          <a:p>
-            <a:pPr algn="ctr" indent="0" marL="0">
-              <a:buNone/>
-            </a:pPr>
-            <a:r>
-              <a:rPr lang="en-US" sz="900" b="1" dirty="0">
-                <a:solidFill>
-                  <a:srgbClr val="9D174D"/>
-                </a:solidFill>
-                <a:latin typeface="Trebuchet MS" pitchFamily="34" charset="0"/>
-                <a:ea typeface="Trebuchet MS" pitchFamily="34" charset="-122"/>
-                <a:cs typeface="Trebuchet MS" pitchFamily="34" charset="-120"/>
-              </a:rPr>
-              <a:t>t</a:t>
-            </a:r>
-            <a:endParaRPr lang="en-US" sz="900" dirty="0"/>
-          </a:p>
-        </p:txBody>
-      </p:sp>
-      <p:sp>
-        <p:nvSpPr>
-          <p:cNvPr id="51" name="Shape 49"/>
-          <p:cNvSpPr/>
-          <p:nvPr/>
-        </p:nvSpPr>
-        <p:spPr>
-          <a:xfrm>
-            <a:off x="5254752" y="4169664"/>
-            <a:ext cx="685800" cy="384048"/>
-          </a:xfrm>
-          <a:prstGeom prst="rect">
-            <a:avLst>
-              <a:gd name="adj" fmla="val 9524"/>
-            </a:avLst>
-          </a:prstGeom>
-          <a:solidFill>
-            <a:srgbClr val="FFFFFF"/>
-          </a:solidFill>
-          <a:ln w="12700">
-            <a:solidFill>
-              <a:srgbClr val="DB2777"/>
-            </a:solidFill>
-            <a:prstDash val="solid"/>
-          </a:ln>
-        </p:spPr>
-      </p:sp>
-      <p:sp>
-        <p:nvSpPr>
-          <p:cNvPr id="52" name="Text 50"/>
-          <p:cNvSpPr/>
-          <p:nvPr/>
-        </p:nvSpPr>
-        <p:spPr>
-          <a:xfrm>
-            <a:off x="5254752" y="4169664"/>
-            <a:ext cx="685800" cy="384048"/>
-          </a:xfrm>
-          <a:prstGeom prst="rect">
-            <a:avLst/>
-          </a:prstGeom>
-          <a:noFill/>
-          <a:ln/>
-        </p:spPr>
-        <p:txBody>
-          <a:bodyPr wrap="square" lIns="0" tIns="0" rIns="0" bIns="0" rtlCol="0" anchor="ctr"/>
-          <a:lstStyle/>
-          <a:p>
-            <a:pPr algn="ctr" indent="0" marL="0">
-              <a:buNone/>
-            </a:pPr>
-            <a:r>
-              <a:rPr lang="en-US" sz="900" b="1" dirty="0">
-                <a:solidFill>
-                  <a:srgbClr val="9D174D"/>
-                </a:solidFill>
-                <a:latin typeface="Trebuchet MS" pitchFamily="34" charset="0"/>
-                <a:ea typeface="Trebuchet MS" pitchFamily="34" charset="-122"/>
-                <a:cs typeface="Trebuchet MS" pitchFamily="34" charset="-120"/>
-              </a:rPr>
-              <a:t>or</a:t>
-            </a:r>
-            <a:endParaRPr lang="en-US" sz="900" dirty="0"/>
-          </a:p>
-        </p:txBody>
-      </p:sp>
-      <p:sp>
-        <p:nvSpPr>
-          <p:cNvPr id="53" name="Shape 51"/>
-          <p:cNvSpPr/>
-          <p:nvPr/>
-        </p:nvSpPr>
-        <p:spPr>
-          <a:xfrm>
-            <a:off x="6062472" y="4169664"/>
-            <a:ext cx="685800" cy="384048"/>
-          </a:xfrm>
-          <a:prstGeom prst="rect">
-            <a:avLst>
-              <a:gd name="adj" fmla="val 9524"/>
-            </a:avLst>
-          </a:prstGeom>
-          <a:solidFill>
-            <a:srgbClr val="FFFFFF"/>
-          </a:solidFill>
-          <a:ln w="12700">
-            <a:solidFill>
-              <a:srgbClr val="DB2777"/>
-            </a:solidFill>
-            <a:prstDash val="solid"/>
-          </a:ln>
-        </p:spPr>
-      </p:sp>
-      <p:sp>
-        <p:nvSpPr>
-          <p:cNvPr id="54" name="Text 52"/>
-          <p:cNvSpPr/>
-          <p:nvPr/>
-        </p:nvSpPr>
-        <p:spPr>
-          <a:xfrm>
-            <a:off x="6062472" y="4169664"/>
-            <a:ext cx="685800" cy="384048"/>
-          </a:xfrm>
-          <a:prstGeom prst="rect">
-            <a:avLst/>
-          </a:prstGeom>
-          <a:noFill/>
-          <a:ln/>
-        </p:spPr>
-        <p:txBody>
-          <a:bodyPr wrap="square" lIns="0" tIns="0" rIns="0" bIns="0" rtlCol="0" anchor="ctr"/>
-          <a:lstStyle/>
-          <a:p>
-            <a:pPr algn="ctr" indent="0" marL="0">
-              <a:buNone/>
-            </a:pPr>
-            <a:r>
-              <a:rPr lang="en-US" sz="900" b="1" dirty="0">
-                <a:solidFill>
-                  <a:srgbClr val="9D174D"/>
-                </a:solidFill>
-                <a:latin typeface="Trebuchet MS" pitchFamily="34" charset="0"/>
-                <a:ea typeface="Trebuchet MS" pitchFamily="34" charset="-122"/>
-                <a:cs typeface="Trebuchet MS" pitchFamily="34" charset="-120"/>
-              </a:rPr>
-              <a:t>i</a:t>
-            </a:r>
-            <a:endParaRPr lang="en-US" sz="900" dirty="0"/>
-          </a:p>
-        </p:txBody>
-      </p:sp>
-      <p:sp>
-        <p:nvSpPr>
-          <p:cNvPr id="55" name="Shape 53"/>
-          <p:cNvSpPr/>
-          <p:nvPr/>
-        </p:nvSpPr>
-        <p:spPr>
-          <a:xfrm>
-            <a:off x="6870192" y="4169664"/>
-            <a:ext cx="685800" cy="384048"/>
-          </a:xfrm>
-          <a:prstGeom prst="rect">
-            <a:avLst>
-              <a:gd name="adj" fmla="val 9524"/>
-            </a:avLst>
-          </a:prstGeom>
-          <a:solidFill>
-            <a:srgbClr val="FFFFFF"/>
-          </a:solidFill>
-          <a:ln w="12700">
-            <a:solidFill>
-              <a:srgbClr val="DB2777"/>
-            </a:solidFill>
-            <a:prstDash val="solid"/>
-          </a:ln>
-        </p:spPr>
-      </p:sp>
-      <p:sp>
-        <p:nvSpPr>
-          <p:cNvPr id="56" name="Text 54"/>
-          <p:cNvSpPr/>
-          <p:nvPr/>
-        </p:nvSpPr>
-        <p:spPr>
-          <a:xfrm>
-            <a:off x="6870192" y="4169664"/>
-            <a:ext cx="685800" cy="384048"/>
-          </a:xfrm>
-          <a:prstGeom prst="rect">
-            <a:avLst/>
-          </a:prstGeom>
-          <a:noFill/>
-          <a:ln/>
-        </p:spPr>
-        <p:txBody>
-          <a:bodyPr wrap="square" lIns="0" tIns="0" rIns="0" bIns="0" rtlCol="0" anchor="ctr"/>
-          <a:lstStyle/>
-          <a:p>
-            <a:pPr algn="ctr" indent="0" marL="0">
-              <a:buNone/>
-            </a:pPr>
-            <a:r>
-              <a:rPr lang="en-US" sz="900" b="1" dirty="0">
-                <a:solidFill>
-                  <a:srgbClr val="9D174D"/>
-                </a:solidFill>
-                <a:latin typeface="Trebuchet MS" pitchFamily="34" charset="0"/>
-                <a:ea typeface="Trebuchet MS" pitchFamily="34" charset="-122"/>
-                <a:cs typeface="Trebuchet MS" pitchFamily="34" charset="-120"/>
-              </a:rPr>
-              <a:t>ou</a:t>
-            </a:r>
-            <a:endParaRPr lang="en-US" sz="900" dirty="0"/>
-          </a:p>
-        </p:txBody>
-      </p:sp>
-      <p:sp>
-        <p:nvSpPr>
-          <p:cNvPr id="57" name="Text 55"/>
-          <p:cNvSpPr/>
-          <p:nvPr/>
-        </p:nvSpPr>
-        <p:spPr>
-          <a:xfrm>
-            <a:off x="6870192" y="4572000"/>
-            <a:ext cx="685800" cy="219456"/>
-          </a:xfrm>
-          <a:prstGeom prst="rect">
-            <a:avLst/>
-          </a:prstGeom>
-          <a:noFill/>
-          <a:ln/>
-        </p:spPr>
-        <p:txBody>
-          <a:bodyPr wrap="square" lIns="0" tIns="0" rIns="0" bIns="0" rtlCol="0" anchor="t"/>
-          <a:lstStyle/>
-          <a:p>
-            <a:pPr algn="ctr" indent="0" marL="0">
-              <a:buNone/>
-            </a:pPr>
-            <a:r>
-              <a:rPr lang="en-US" sz="750" i="1" dirty="0">
-                <a:solidFill>
-                  <a:srgbClr val="94A3B8"/>
-                </a:solidFill>
-                <a:latin typeface="Calibri" pitchFamily="34" charset="0"/>
-                <a:ea typeface="Calibri" pitchFamily="34" charset="-122"/>
-                <a:cs typeface="Calibri" pitchFamily="34" charset="-120"/>
-              </a:rPr>
-              <a:t>/u/</a:t>
-            </a:r>
-            <a:endParaRPr lang="en-US" sz="750" dirty="0"/>
-          </a:p>
-        </p:txBody>
-      </p:sp>
-      <p:sp>
-        <p:nvSpPr>
-          <p:cNvPr id="58" name="Shape 56"/>
-          <p:cNvSpPr/>
-          <p:nvPr/>
-        </p:nvSpPr>
-        <p:spPr>
-          <a:xfrm>
-            <a:off x="7677912" y="4169664"/>
-            <a:ext cx="685800" cy="384048"/>
-          </a:xfrm>
-          <a:prstGeom prst="rect">
-            <a:avLst>
-              <a:gd name="adj" fmla="val 9524"/>
-            </a:avLst>
-          </a:prstGeom>
-          <a:solidFill>
-            <a:srgbClr val="FFFFFF"/>
-          </a:solidFill>
-          <a:ln w="12700">
-            <a:solidFill>
-              <a:srgbClr val="DB2777"/>
-            </a:solidFill>
-            <a:prstDash val="solid"/>
-          </a:ln>
-        </p:spPr>
-      </p:sp>
-      <p:sp>
-        <p:nvSpPr>
-          <p:cNvPr id="59" name="Text 57"/>
-          <p:cNvSpPr/>
-          <p:nvPr/>
-        </p:nvSpPr>
-        <p:spPr>
-          <a:xfrm>
-            <a:off x="7677912" y="4169664"/>
+          <p:cNvPr id="49" name="Text 47"/>
+          <p:cNvSpPr/>
+          <p:nvPr/>
+        </p:nvSpPr>
+        <p:spPr>
+          <a:xfrm>
+            <a:off x="7447135" y="4169664"/>
             <a:ext cx="685800" cy="384048"/>
           </a:xfrm>
           <a:prstGeom prst="rect">
@@ -24001,7 +23272,7 @@
                 <a:ea typeface="Trebuchet MS" pitchFamily="34" charset="-122"/>
                 <a:cs typeface="Trebuchet MS" pitchFamily="34" charset="-120"/>
               </a:rPr>
-              <a:t>ambitious</a:t>
+              <a:t>glorious</a:t>
             </a:r>
             <a:endParaRPr lang="en-US" sz="2800" dirty="0"/>
           </a:p>
@@ -24828,7 +24099,7 @@
                 <a:ea typeface="Trebuchet MS" pitchFamily="34" charset="-122"/>
                 <a:cs typeface="Trebuchet MS" pitchFamily="34" charset="-120"/>
               </a:rPr>
-              <a:t>ambitious</a:t>
+              <a:t>glorious</a:t>
             </a:r>
             <a:endParaRPr lang="en-US" sz="2800" dirty="0"/>
           </a:p>
@@ -24967,7 +24238,7 @@
                 <a:ea typeface="Trebuchet MS" pitchFamily="34" charset="-122"/>
                 <a:cs typeface="Trebuchet MS" pitchFamily="34" charset="-120"/>
               </a:rPr>
-              <a:t>ambit</a:t>
+              <a:t>glori</a:t>
             </a:r>
             <a:endParaRPr lang="en-US" sz="1300" dirty="0"/>
           </a:p>
@@ -25006,7 +24277,7 @@
                 <a:ea typeface="Calibri" pitchFamily="34" charset="-122"/>
                 <a:cs typeface="Calibri" pitchFamily="34" charset="-120"/>
               </a:rPr>
-              <a:t>going around, a strong desire or goal</a:t>
+              <a:t>glory, great fame</a:t>
             </a:r>
             <a:endParaRPr lang="en-US" sz="850" dirty="0"/>
           </a:p>
@@ -25029,11 +24300,11 @@
             </a:avLst>
           </a:prstGeom>
           <a:solidFill>
-            <a:srgbClr val="CCFBF1"/>
+            <a:srgbClr val="FCE7F3"/>
           </a:solidFill>
           <a:ln w="19050">
             <a:solidFill>
-              <a:srgbClr val="0D9488"/>
+              <a:srgbClr val="DB2777"/>
             </a:solidFill>
             <a:prstDash val="solid"/>
           </a:ln>
@@ -25073,13 +24344,13 @@
             <a:r>
               <a:rPr lang="en-US" sz="1300" b="1" dirty="0">
                 <a:solidFill>
-                  <a:srgbClr val="0F766E"/>
+                  <a:srgbClr val="9D174D"/>
                 </a:solidFill>
                 <a:latin typeface="Trebuchet MS" pitchFamily="34" charset="0"/>
                 <a:ea typeface="Trebuchet MS" pitchFamily="34" charset="-122"/>
                 <a:cs typeface="Trebuchet MS" pitchFamily="34" charset="-120"/>
               </a:rPr>
-              <a:t>ious</a:t>
+              <a:t>ous</a:t>
             </a:r>
             <a:endParaRPr lang="en-US" sz="1300" dirty="0"/>
           </a:p>
@@ -25118,7 +24389,7 @@
                 <a:ea typeface="Calibri" pitchFamily="34" charset="-122"/>
                 <a:cs typeface="Calibri" pitchFamily="34" charset="-120"/>
               </a:rPr>
-              <a:t>full of, having the quality of</a:t>
+              <a:t>full of, having quality</a:t>
             </a:r>
             <a:endParaRPr lang="en-US" sz="850" dirty="0"/>
           </a:p>
@@ -25157,7 +24428,7 @@
                 <a:ea typeface="Calibri" pitchFamily="34" charset="-122"/>
                 <a:cs typeface="Calibri" pitchFamily="34" charset="-120"/>
               </a:rPr>
-              <a:t>'t' + 'ious' = /sh/ sound</a:t>
+              <a:t>variant of -ious after vowel</a:t>
             </a:r>
             <a:endParaRPr lang="en-US" sz="700" dirty="0"/>
           </a:p>
@@ -26571,7 +25842,7 @@
                 <a:ea typeface="Trebuchet MS" pitchFamily="34" charset="-122"/>
                 <a:cs typeface="Trebuchet MS" pitchFamily="34" charset="-120"/>
               </a:rPr>
-              <a:t>ambitious</a:t>
+              <a:t>glorious</a:t>
             </a:r>
             <a:endParaRPr lang="en-US" sz="2800" dirty="0"/>
           </a:p>
@@ -26710,7 +25981,7 @@
                 <a:ea typeface="Trebuchet MS" pitchFamily="34" charset="-122"/>
                 <a:cs typeface="Trebuchet MS" pitchFamily="34" charset="-120"/>
               </a:rPr>
-              <a:t>ambit</a:t>
+              <a:t>glori</a:t>
             </a:r>
             <a:endParaRPr lang="en-US" sz="1300" dirty="0"/>
           </a:p>
@@ -26749,7 +26020,7 @@
                 <a:ea typeface="Calibri" pitchFamily="34" charset="-122"/>
                 <a:cs typeface="Calibri" pitchFamily="34" charset="-120"/>
               </a:rPr>
-              <a:t>going around, a strong desire or goal</a:t>
+              <a:t>glory, great fame</a:t>
             </a:r>
             <a:endParaRPr lang="en-US" sz="850" dirty="0"/>
           </a:p>
@@ -26772,11 +26043,11 @@
             </a:avLst>
           </a:prstGeom>
           <a:solidFill>
-            <a:srgbClr val="CCFBF1"/>
+            <a:srgbClr val="FCE7F3"/>
           </a:solidFill>
           <a:ln w="19050">
             <a:solidFill>
-              <a:srgbClr val="0D9488"/>
+              <a:srgbClr val="DB2777"/>
             </a:solidFill>
             <a:prstDash val="solid"/>
           </a:ln>
@@ -26816,13 +26087,13 @@
             <a:r>
               <a:rPr lang="en-US" sz="1300" b="1" dirty="0">
                 <a:solidFill>
-                  <a:srgbClr val="0F766E"/>
+                  <a:srgbClr val="9D174D"/>
                 </a:solidFill>
                 <a:latin typeface="Trebuchet MS" pitchFamily="34" charset="0"/>
                 <a:ea typeface="Trebuchet MS" pitchFamily="34" charset="-122"/>
                 <a:cs typeface="Trebuchet MS" pitchFamily="34" charset="-120"/>
               </a:rPr>
-              <a:t>ious</a:t>
+              <a:t>ous</a:t>
             </a:r>
             <a:endParaRPr lang="en-US" sz="1300" dirty="0"/>
           </a:p>
@@ -26861,7 +26132,7 @@
                 <a:ea typeface="Calibri" pitchFamily="34" charset="-122"/>
                 <a:cs typeface="Calibri" pitchFamily="34" charset="-120"/>
               </a:rPr>
-              <a:t>full of, having the quality of</a:t>
+              <a:t>full of, having quality</a:t>
             </a:r>
             <a:endParaRPr lang="en-US" sz="850" dirty="0"/>
           </a:p>
@@ -26900,7 +26171,7 @@
                 <a:ea typeface="Calibri" pitchFamily="34" charset="-122"/>
                 <a:cs typeface="Calibri" pitchFamily="34" charset="-120"/>
               </a:rPr>
-              <a:t>'t' + 'ious' = /sh/ sound</a:t>
+              <a:t>variant of -ious after vowel</a:t>
             </a:r>
             <a:endParaRPr lang="en-US" sz="700" dirty="0"/>
           </a:p>
@@ -27059,7 +26330,7 @@
                 <a:ea typeface="Trebuchet MS" pitchFamily="34" charset="-122"/>
                 <a:cs typeface="Trebuchet MS" pitchFamily="34" charset="-120"/>
               </a:rPr>
-              <a:t>am</a:t>
+              <a:t>glo</a:t>
             </a:r>
             <a:endParaRPr lang="en-US" sz="1400" dirty="0"/>
           </a:p>
@@ -27164,7 +26435,7 @@
                 <a:ea typeface="Trebuchet MS" pitchFamily="34" charset="-122"/>
                 <a:cs typeface="Trebuchet MS" pitchFamily="34" charset="-120"/>
               </a:rPr>
-              <a:t>bi</a:t>
+              <a:t>ri</a:t>
             </a:r>
             <a:endParaRPr lang="en-US" sz="1400" dirty="0"/>
           </a:p>
@@ -27269,7 +26540,7 @@
                 <a:ea typeface="Trebuchet MS" pitchFamily="34" charset="-122"/>
                 <a:cs typeface="Trebuchet MS" pitchFamily="34" charset="-120"/>
               </a:rPr>
-              <a:t>tious</a:t>
+              <a:t>ous</a:t>
             </a:r>
             <a:endParaRPr lang="en-US" sz="1400" dirty="0"/>
           </a:p>
@@ -27832,7 +27103,7 @@
                 <a:ea typeface="Trebuchet MS" pitchFamily="34" charset="-122"/>
                 <a:cs typeface="Trebuchet MS" pitchFamily="34" charset="-120"/>
               </a:rPr>
-              <a:t>ambitious</a:t>
+              <a:t>glorious</a:t>
             </a:r>
             <a:endParaRPr lang="en-US" sz="2800" dirty="0"/>
           </a:p>
@@ -27971,7 +27242,7 @@
                 <a:ea typeface="Trebuchet MS" pitchFamily="34" charset="-122"/>
                 <a:cs typeface="Trebuchet MS" pitchFamily="34" charset="-120"/>
               </a:rPr>
-              <a:t>ambit</a:t>
+              <a:t>glori</a:t>
             </a:r>
             <a:endParaRPr lang="en-US" sz="1300" dirty="0"/>
           </a:p>
@@ -28010,7 +27281,7 @@
                 <a:ea typeface="Calibri" pitchFamily="34" charset="-122"/>
                 <a:cs typeface="Calibri" pitchFamily="34" charset="-120"/>
               </a:rPr>
-              <a:t>going around, a strong desire or goal</a:t>
+              <a:t>glory, great fame</a:t>
             </a:r>
             <a:endParaRPr lang="en-US" sz="850" dirty="0"/>
           </a:p>
@@ -28033,11 +27304,11 @@
             </a:avLst>
           </a:prstGeom>
           <a:solidFill>
-            <a:srgbClr val="CCFBF1"/>
+            <a:srgbClr val="FCE7F3"/>
           </a:solidFill>
           <a:ln w="19050">
             <a:solidFill>
-              <a:srgbClr val="0D9488"/>
+              <a:srgbClr val="DB2777"/>
             </a:solidFill>
             <a:prstDash val="solid"/>
           </a:ln>
@@ -28077,13 +27348,13 @@
             <a:r>
               <a:rPr lang="en-US" sz="1300" b="1" dirty="0">
                 <a:solidFill>
-                  <a:srgbClr val="0F766E"/>
+                  <a:srgbClr val="9D174D"/>
                 </a:solidFill>
                 <a:latin typeface="Trebuchet MS" pitchFamily="34" charset="0"/>
                 <a:ea typeface="Trebuchet MS" pitchFamily="34" charset="-122"/>
                 <a:cs typeface="Trebuchet MS" pitchFamily="34" charset="-120"/>
               </a:rPr>
-              <a:t>ious</a:t>
+              <a:t>ous</a:t>
             </a:r>
             <a:endParaRPr lang="en-US" sz="1300" dirty="0"/>
           </a:p>
@@ -28122,7 +27393,7 @@
                 <a:ea typeface="Calibri" pitchFamily="34" charset="-122"/>
                 <a:cs typeface="Calibri" pitchFamily="34" charset="-120"/>
               </a:rPr>
-              <a:t>full of, having the quality of</a:t>
+              <a:t>full of, having quality</a:t>
             </a:r>
             <a:endParaRPr lang="en-US" sz="850" dirty="0"/>
           </a:p>
@@ -28161,7 +27432,7 @@
                 <a:ea typeface="Calibri" pitchFamily="34" charset="-122"/>
                 <a:cs typeface="Calibri" pitchFamily="34" charset="-120"/>
               </a:rPr>
-              <a:t>'t' + 'ious' = /sh/ sound</a:t>
+              <a:t>variant of -ious after vowel</a:t>
             </a:r>
             <a:endParaRPr lang="en-US" sz="700" dirty="0"/>
           </a:p>
@@ -28320,7 +27591,7 @@
                 <a:ea typeface="Trebuchet MS" pitchFamily="34" charset="-122"/>
                 <a:cs typeface="Trebuchet MS" pitchFamily="34" charset="-120"/>
               </a:rPr>
-              <a:t>am</a:t>
+              <a:t>glo</a:t>
             </a:r>
             <a:endParaRPr lang="en-US" sz="1400" dirty="0"/>
           </a:p>
@@ -28425,7 +27696,7 @@
                 <a:ea typeface="Trebuchet MS" pitchFamily="34" charset="-122"/>
                 <a:cs typeface="Trebuchet MS" pitchFamily="34" charset="-120"/>
               </a:rPr>
-              <a:t>bi</a:t>
+              <a:t>ri</a:t>
             </a:r>
             <a:endParaRPr lang="en-US" sz="1400" dirty="0"/>
           </a:p>
@@ -28530,7 +27801,7 @@
                 <a:ea typeface="Trebuchet MS" pitchFamily="34" charset="-122"/>
                 <a:cs typeface="Trebuchet MS" pitchFamily="34" charset="-120"/>
               </a:rPr>
-              <a:t>tious</a:t>
+              <a:t>ous</a:t>
             </a:r>
             <a:endParaRPr lang="en-US" sz="1400" dirty="0"/>
           </a:p>
@@ -28611,11 +27882,11 @@
         <p:spPr>
           <a:xfrm>
             <a:off x="1874520" y="4096512"/>
-            <a:ext cx="6903720" cy="804672"/>
+            <a:ext cx="6903720" cy="658368"/>
           </a:xfrm>
           <a:prstGeom prst="rect">
             <a:avLst>
-              <a:gd name="adj" fmla="val 6818"/>
+              <a:gd name="adj" fmla="val 8333"/>
             </a:avLst>
           </a:prstGeom>
           <a:solidFill>
@@ -28638,11 +27909,11 @@
         <p:spPr>
           <a:xfrm>
             <a:off x="2124837" y="4169664"/>
-            <a:ext cx="685800" cy="384048"/>
+            <a:ext cx="685800" cy="475488"/>
           </a:xfrm>
           <a:prstGeom prst="rect">
             <a:avLst>
-              <a:gd name="adj" fmla="val 9524"/>
+              <a:gd name="adj" fmla="val 7692"/>
             </a:avLst>
           </a:prstGeom>
           <a:solidFill>
@@ -28665,7 +27936,7 @@
         <p:spPr>
           <a:xfrm>
             <a:off x="2124837" y="4169664"/>
-            <a:ext cx="685800" cy="384048"/>
+            <a:ext cx="685800" cy="475488"/>
           </a:xfrm>
           <a:prstGeom prst="rect">
             <a:avLst/>
@@ -28689,7 +27960,7 @@
                 <a:ea typeface="Trebuchet MS" pitchFamily="34" charset="-122"/>
                 <a:cs typeface="Trebuchet MS" pitchFamily="34" charset="-120"/>
               </a:rPr>
-              <a:t>a</a:t>
+              <a:t>g</a:t>
             </a:r>
             <a:endParaRPr lang="en-US" sz="900" dirty="0"/>
           </a:p>
@@ -28704,11 +27975,11 @@
         <p:spPr>
           <a:xfrm>
             <a:off x="3033522" y="4169664"/>
-            <a:ext cx="685800" cy="384048"/>
+            <a:ext cx="685800" cy="475488"/>
           </a:xfrm>
           <a:prstGeom prst="rect">
             <a:avLst>
-              <a:gd name="adj" fmla="val 9524"/>
+              <a:gd name="adj" fmla="val 7692"/>
             </a:avLst>
           </a:prstGeom>
           <a:solidFill>
@@ -28731,7 +28002,7 @@
         <p:spPr>
           <a:xfrm>
             <a:off x="3033522" y="4169664"/>
-            <a:ext cx="685800" cy="384048"/>
+            <a:ext cx="685800" cy="475488"/>
           </a:xfrm>
           <a:prstGeom prst="rect">
             <a:avLst/>
@@ -28755,7 +28026,7 @@
                 <a:ea typeface="Trebuchet MS" pitchFamily="34" charset="-122"/>
                 <a:cs typeface="Trebuchet MS" pitchFamily="34" charset="-120"/>
               </a:rPr>
-              <a:t>m</a:t>
+              <a:t>l</a:t>
             </a:r>
             <a:endParaRPr lang="en-US" sz="900" dirty="0"/>
           </a:p>
@@ -28770,11 +28041,11 @@
         <p:spPr>
           <a:xfrm>
             <a:off x="3942207" y="4169664"/>
-            <a:ext cx="685800" cy="384048"/>
+            <a:ext cx="685800" cy="475488"/>
           </a:xfrm>
           <a:prstGeom prst="rect">
             <a:avLst>
-              <a:gd name="adj" fmla="val 9524"/>
+              <a:gd name="adj" fmla="val 7692"/>
             </a:avLst>
           </a:prstGeom>
           <a:solidFill>
@@ -28797,7 +28068,7 @@
         <p:spPr>
           <a:xfrm>
             <a:off x="3942207" y="4169664"/>
-            <a:ext cx="685800" cy="384048"/>
+            <a:ext cx="685800" cy="475488"/>
           </a:xfrm>
           <a:prstGeom prst="rect">
             <a:avLst/>
@@ -28821,7 +28092,7 @@
                 <a:ea typeface="Trebuchet MS" pitchFamily="34" charset="-122"/>
                 <a:cs typeface="Trebuchet MS" pitchFamily="34" charset="-120"/>
               </a:rPr>
-              <a:t>b</a:t>
+              <a:t>o</a:t>
             </a:r>
             <a:endParaRPr lang="en-US" sz="900" dirty="0"/>
           </a:p>
@@ -28836,11 +28107,11 @@
         <p:spPr>
           <a:xfrm>
             <a:off x="4850892" y="4169664"/>
-            <a:ext cx="685800" cy="384048"/>
+            <a:ext cx="685800" cy="475488"/>
           </a:xfrm>
           <a:prstGeom prst="rect">
             <a:avLst>
-              <a:gd name="adj" fmla="val 9524"/>
+              <a:gd name="adj" fmla="val 7692"/>
             </a:avLst>
           </a:prstGeom>
           <a:solidFill>
@@ -28863,7 +28134,7 @@
         <p:spPr>
           <a:xfrm>
             <a:off x="4850892" y="4169664"/>
-            <a:ext cx="685800" cy="384048"/>
+            <a:ext cx="685800" cy="475488"/>
           </a:xfrm>
           <a:prstGeom prst="rect">
             <a:avLst/>
@@ -28887,7 +28158,7 @@
                 <a:ea typeface="Trebuchet MS" pitchFamily="34" charset="-122"/>
                 <a:cs typeface="Trebuchet MS" pitchFamily="34" charset="-120"/>
               </a:rPr>
-              <a:t>i</a:t>
+              <a:t>r</a:t>
             </a:r>
             <a:endParaRPr lang="en-US" sz="900" dirty="0"/>
           </a:p>
@@ -28902,11 +28173,11 @@
         <p:spPr>
           <a:xfrm>
             <a:off x="5759577" y="4169664"/>
-            <a:ext cx="685800" cy="384048"/>
+            <a:ext cx="685800" cy="475488"/>
           </a:xfrm>
           <a:prstGeom prst="rect">
             <a:avLst>
-              <a:gd name="adj" fmla="val 9524"/>
+              <a:gd name="adj" fmla="val 7692"/>
             </a:avLst>
           </a:prstGeom>
           <a:solidFill>
@@ -28929,7 +28200,7 @@
         <p:spPr>
           <a:xfrm>
             <a:off x="5759577" y="4169664"/>
-            <a:ext cx="685800" cy="384048"/>
+            <a:ext cx="685800" cy="475488"/>
           </a:xfrm>
           <a:prstGeom prst="rect">
             <a:avLst/>
@@ -28953,7 +28224,7 @@
                 <a:ea typeface="Trebuchet MS" pitchFamily="34" charset="-122"/>
                 <a:cs typeface="Trebuchet MS" pitchFamily="34" charset="-120"/>
               </a:rPr>
-              <a:t>ti</a:t>
+              <a:t>i</a:t>
             </a:r>
             <a:endParaRPr lang="en-US" sz="900" dirty="0"/>
           </a:p>
@@ -28961,57 +28232,18 @@
       </p:sp>
       <p:sp>
         <p:nvSpPr>
-          <p:cNvPr id="47" name="Text 45"/>
-          <p:cNvSpPr/>
-          <p:nvPr/>
-        </p:nvSpPr>
-        <p:spPr>
-          <a:xfrm>
-            <a:off x="5759577" y="4572000"/>
-            <a:ext cx="685800" cy="219456"/>
-          </a:xfrm>
-          <a:prstGeom prst="rect">
-            <a:avLst/>
-          </a:prstGeom>
-          <a:noFill/>
-          <a:ln/>
-        </p:spPr>
-        <p:txBody>
-          <a:bodyPr wrap="square" lIns="0" tIns="0" rIns="0" bIns="0" rtlCol="0" anchor="t"/>
-          <a:lstStyle/>
-          <a:p>
-            <a:pPr algn="ctr" indent="0" marL="0">
-              <a:buNone/>
-            </a:pPr>
-            <a:r>
-              <a:rPr lang="en-US" sz="750" i="1" dirty="0">
-                <a:solidFill>
-                  <a:srgbClr val="94A3B8"/>
-                </a:solidFill>
-                <a:latin typeface="Calibri" pitchFamily="34" charset="0"/>
-                <a:ea typeface="Calibri" pitchFamily="34" charset="-122"/>
-                <a:cs typeface="Calibri" pitchFamily="34" charset="-120"/>
-              </a:rPr>
-              <a:t>/sh/</a:t>
-            </a:r>
-            <a:endParaRPr lang="en-US" sz="750" dirty="0"/>
-          </a:p>
-        </p:txBody>
-      </p:sp>
-      <p:sp>
-        <p:nvSpPr>
-          <p:cNvPr id="48" name="Shape 46"/>
+          <p:cNvPr id="47" name="Shape 45"/>
           <p:cNvSpPr/>
           <p:nvPr/>
         </p:nvSpPr>
         <p:spPr>
           <a:xfrm>
             <a:off x="6668262" y="4169664"/>
-            <a:ext cx="685800" cy="384048"/>
+            <a:ext cx="685800" cy="475488"/>
           </a:xfrm>
           <a:prstGeom prst="rect">
             <a:avLst>
-              <a:gd name="adj" fmla="val 9524"/>
+              <a:gd name="adj" fmla="val 7692"/>
             </a:avLst>
           </a:prstGeom>
           <a:solidFill>
@@ -29027,14 +28259,14 @@
       </p:sp>
       <p:sp>
         <p:nvSpPr>
-          <p:cNvPr id="49" name="Text 47"/>
+          <p:cNvPr id="48" name="Text 46"/>
           <p:cNvSpPr/>
           <p:nvPr/>
         </p:nvSpPr>
         <p:spPr>
           <a:xfrm>
             <a:off x="6668262" y="4169664"/>
-            <a:ext cx="685800" cy="384048"/>
+            <a:ext cx="685800" cy="475488"/>
           </a:xfrm>
           <a:prstGeom prst="rect">
             <a:avLst/>
@@ -29066,80 +28298,41 @@
       </p:sp>
       <p:sp>
         <p:nvSpPr>
+          <p:cNvPr id="49" name="Shape 47"/>
+          <p:cNvSpPr/>
+          <p:nvPr/>
+        </p:nvSpPr>
+        <p:spPr>
+          <a:xfrm>
+            <a:off x="7576947" y="4169664"/>
+            <a:ext cx="685800" cy="475488"/>
+          </a:xfrm>
+          <a:prstGeom prst="rect">
+            <a:avLst>
+              <a:gd name="adj" fmla="val 7692"/>
+            </a:avLst>
+          </a:prstGeom>
+          <a:solidFill>
+            <a:srgbClr val="FFFFFF"/>
+          </a:solidFill>
+          <a:ln w="12700">
+            <a:solidFill>
+              <a:srgbClr val="DB2777"/>
+            </a:solidFill>
+            <a:prstDash val="solid"/>
+          </a:ln>
+        </p:spPr>
+      </p:sp>
+      <p:sp>
+        <p:nvSpPr>
           <p:cNvPr id="50" name="Text 48"/>
           <p:cNvSpPr/>
           <p:nvPr/>
         </p:nvSpPr>
         <p:spPr>
           <a:xfrm>
-            <a:off x="6668262" y="4572000"/>
-            <a:ext cx="685800" cy="219456"/>
-          </a:xfrm>
-          <a:prstGeom prst="rect">
-            <a:avLst/>
-          </a:prstGeom>
-          <a:noFill/>
-          <a:ln/>
-        </p:spPr>
-        <p:txBody>
-          <a:bodyPr wrap="square" lIns="0" tIns="0" rIns="0" bIns="0" rtlCol="0" anchor="t"/>
-          <a:lstStyle/>
-          <a:p>
-            <a:pPr algn="ctr" indent="0" marL="0">
-              <a:buNone/>
-            </a:pPr>
-            <a:r>
-              <a:rPr lang="en-US" sz="750" i="1" dirty="0">
-                <a:solidFill>
-                  <a:srgbClr val="94A3B8"/>
-                </a:solidFill>
-                <a:latin typeface="Calibri" pitchFamily="34" charset="0"/>
-                <a:ea typeface="Calibri" pitchFamily="34" charset="-122"/>
-                <a:cs typeface="Calibri" pitchFamily="34" charset="-120"/>
-              </a:rPr>
-              <a:t>/u/</a:t>
-            </a:r>
-            <a:endParaRPr lang="en-US" sz="750" dirty="0"/>
-          </a:p>
-        </p:txBody>
-      </p:sp>
-      <p:sp>
-        <p:nvSpPr>
-          <p:cNvPr id="51" name="Shape 49"/>
-          <p:cNvSpPr/>
-          <p:nvPr/>
-        </p:nvSpPr>
-        <p:spPr>
-          <a:xfrm>
             <a:off x="7576947" y="4169664"/>
-            <a:ext cx="685800" cy="384048"/>
-          </a:xfrm>
-          <a:prstGeom prst="rect">
-            <a:avLst>
-              <a:gd name="adj" fmla="val 9524"/>
-            </a:avLst>
-          </a:prstGeom>
-          <a:solidFill>
-            <a:srgbClr val="FFFFFF"/>
-          </a:solidFill>
-          <a:ln w="12700">
-            <a:solidFill>
-              <a:srgbClr val="DB2777"/>
-            </a:solidFill>
-            <a:prstDash val="solid"/>
-          </a:ln>
-        </p:spPr>
-      </p:sp>
-      <p:sp>
-        <p:nvSpPr>
-          <p:cNvPr id="52" name="Text 50"/>
-          <p:cNvSpPr/>
-          <p:nvPr/>
-        </p:nvSpPr>
-        <p:spPr>
-          <a:xfrm>
-            <a:off x="7576947" y="4169664"/>
-            <a:ext cx="685800" cy="384048"/>
+            <a:ext cx="685800" cy="475488"/>
           </a:xfrm>
           <a:prstGeom prst="rect">
             <a:avLst/>
@@ -29594,7 +28787,7 @@
                 <a:ea typeface="Trebuchet MS" pitchFamily="34" charset="-122"/>
                 <a:cs typeface="Trebuchet MS" pitchFamily="34" charset="-120"/>
               </a:rPr>
-              <a:t>furious</a:t>
+              <a:t>mysterious</a:t>
             </a:r>
             <a:endParaRPr lang="en-US" sz="2800" dirty="0"/>
           </a:p>
@@ -30421,7 +29614,7 @@
                 <a:ea typeface="Trebuchet MS" pitchFamily="34" charset="-122"/>
                 <a:cs typeface="Trebuchet MS" pitchFamily="34" charset="-120"/>
               </a:rPr>
-              <a:t>furious</a:t>
+              <a:t>mysterious</a:t>
             </a:r>
             <a:endParaRPr lang="en-US" sz="2800" dirty="0"/>
           </a:p>
@@ -30560,7 +29753,7 @@
                 <a:ea typeface="Trebuchet MS" pitchFamily="34" charset="-122"/>
                 <a:cs typeface="Trebuchet MS" pitchFamily="34" charset="-120"/>
               </a:rPr>
-              <a:t>furi</a:t>
+              <a:t>mysteri</a:t>
             </a:r>
             <a:endParaRPr lang="en-US" sz="1300" dirty="0"/>
           </a:p>
@@ -30599,7 +29792,7 @@
                 <a:ea typeface="Calibri" pitchFamily="34" charset="-122"/>
                 <a:cs typeface="Calibri" pitchFamily="34" charset="-120"/>
               </a:rPr>
-              <a:t>rage, fierce anger</a:t>
+              <a:t>mystery, secret</a:t>
             </a:r>
             <a:endParaRPr lang="en-US" sz="850" dirty="0"/>
           </a:p>
@@ -30711,7 +29904,7 @@
                 <a:ea typeface="Calibri" pitchFamily="34" charset="-122"/>
                 <a:cs typeface="Calibri" pitchFamily="34" charset="-120"/>
               </a:rPr>
-              <a:t>full of, having the quality of</a:t>
+              <a:t>full of, having quality</a:t>
             </a:r>
             <a:endParaRPr lang="en-US" sz="850" dirty="0"/>
           </a:p>
@@ -30750,7 +29943,7 @@
                 <a:ea typeface="Calibri" pitchFamily="34" charset="-122"/>
                 <a:cs typeface="Calibri" pitchFamily="34" charset="-120"/>
               </a:rPr>
-              <a:t>'-ious' simplified to '-ous' after 'i' in base</a:t>
+              <a:t>variant of -ious after vowel</a:t>
             </a:r>
             <a:endParaRPr lang="en-US" sz="700" dirty="0"/>
           </a:p>
@@ -31445,7 +30638,7 @@
                 <a:ea typeface="Trebuchet MS" pitchFamily="34" charset="-122"/>
                 <a:cs typeface="Trebuchet MS" pitchFamily="34" charset="-120"/>
               </a:rPr>
-              <a:t>furious</a:t>
+              <a:t>mysterious</a:t>
             </a:r>
             <a:endParaRPr lang="en-US" sz="2800" dirty="0"/>
           </a:p>
@@ -31584,7 +30777,7 @@
                 <a:ea typeface="Trebuchet MS" pitchFamily="34" charset="-122"/>
                 <a:cs typeface="Trebuchet MS" pitchFamily="34" charset="-120"/>
               </a:rPr>
-              <a:t>furi</a:t>
+              <a:t>mysteri</a:t>
             </a:r>
             <a:endParaRPr lang="en-US" sz="1300" dirty="0"/>
           </a:p>
@@ -31623,7 +30816,7 @@
                 <a:ea typeface="Calibri" pitchFamily="34" charset="-122"/>
                 <a:cs typeface="Calibri" pitchFamily="34" charset="-120"/>
               </a:rPr>
-              <a:t>rage, fierce anger</a:t>
+              <a:t>mystery, secret</a:t>
             </a:r>
             <a:endParaRPr lang="en-US" sz="850" dirty="0"/>
           </a:p>
@@ -31735,7 +30928,7 @@
                 <a:ea typeface="Calibri" pitchFamily="34" charset="-122"/>
                 <a:cs typeface="Calibri" pitchFamily="34" charset="-120"/>
               </a:rPr>
-              <a:t>full of, having the quality of</a:t>
+              <a:t>full of, having quality</a:t>
             </a:r>
             <a:endParaRPr lang="en-US" sz="850" dirty="0"/>
           </a:p>
@@ -31774,7 +30967,7 @@
                 <a:ea typeface="Calibri" pitchFamily="34" charset="-122"/>
                 <a:cs typeface="Calibri" pitchFamily="34" charset="-120"/>
               </a:rPr>
-              <a:t>'-ious' simplified to '-ous' after 'i' in base</a:t>
+              <a:t>variant of -ious after vowel</a:t>
             </a:r>
             <a:endParaRPr lang="en-US" sz="700" dirty="0"/>
           </a:p>
@@ -31881,8 +31074,8 @@
         </p:nvSpPr>
         <p:spPr>
           <a:xfrm>
-            <a:off x="2313432" y="3364992"/>
-            <a:ext cx="1645920" cy="475488"/>
+            <a:off x="1975104" y="3364992"/>
+            <a:ext cx="1554480" cy="475488"/>
           </a:xfrm>
           <a:prstGeom prst="rect">
             <a:avLst>
@@ -31908,8 +31101,8 @@
         </p:nvSpPr>
         <p:spPr>
           <a:xfrm>
-            <a:off x="2313432" y="3364992"/>
-            <a:ext cx="1645920" cy="475488"/>
+            <a:off x="1975104" y="3364992"/>
+            <a:ext cx="1554480" cy="475488"/>
           </a:xfrm>
           <a:prstGeom prst="rect">
             <a:avLst/>
@@ -31933,7 +31126,7 @@
                 <a:ea typeface="Trebuchet MS" pitchFamily="34" charset="-122"/>
                 <a:cs typeface="Trebuchet MS" pitchFamily="34" charset="-120"/>
               </a:rPr>
-              <a:t>fu</a:t>
+              <a:t>mys</a:t>
             </a:r>
             <a:endParaRPr lang="en-US" sz="1400" dirty="0"/>
           </a:p>
@@ -31947,8 +31140,8 @@
         </p:nvSpPr>
         <p:spPr>
           <a:xfrm>
-            <a:off x="3959352" y="3364992"/>
-            <a:ext cx="411480" cy="475488"/>
+            <a:off x="3529584" y="3364992"/>
+            <a:ext cx="73152" cy="475488"/>
           </a:xfrm>
           <a:prstGeom prst="rect">
             <a:avLst/>
@@ -31986,8 +31179,8 @@
         </p:nvSpPr>
         <p:spPr>
           <a:xfrm>
-            <a:off x="4370832" y="3364992"/>
-            <a:ext cx="1645920" cy="475488"/>
+            <a:off x="3602736" y="3364992"/>
+            <a:ext cx="1554480" cy="475488"/>
           </a:xfrm>
           <a:prstGeom prst="rect">
             <a:avLst>
@@ -32013,8 +31206,8 @@
         </p:nvSpPr>
         <p:spPr>
           <a:xfrm>
-            <a:off x="4370832" y="3364992"/>
-            <a:ext cx="1645920" cy="475488"/>
+            <a:off x="3602736" y="3364992"/>
+            <a:ext cx="1554480" cy="475488"/>
           </a:xfrm>
           <a:prstGeom prst="rect">
             <a:avLst/>
@@ -32038,7 +31231,7 @@
                 <a:ea typeface="Trebuchet MS" pitchFamily="34" charset="-122"/>
                 <a:cs typeface="Trebuchet MS" pitchFamily="34" charset="-120"/>
               </a:rPr>
-              <a:t>ri</a:t>
+              <a:t>te</a:t>
             </a:r>
             <a:endParaRPr lang="en-US" sz="1400" dirty="0"/>
           </a:p>
@@ -32052,8 +31245,8 @@
         </p:nvSpPr>
         <p:spPr>
           <a:xfrm>
-            <a:off x="6016752" y="3364992"/>
-            <a:ext cx="411480" cy="475488"/>
+            <a:off x="5157216" y="3364992"/>
+            <a:ext cx="73152" cy="475488"/>
           </a:xfrm>
           <a:prstGeom prst="rect">
             <a:avLst/>
@@ -32091,8 +31284,8 @@
         </p:nvSpPr>
         <p:spPr>
           <a:xfrm>
-            <a:off x="6428232" y="3364992"/>
-            <a:ext cx="1645920" cy="475488"/>
+            <a:off x="5230368" y="3364992"/>
+            <a:ext cx="1554480" cy="475488"/>
           </a:xfrm>
           <a:prstGeom prst="rect">
             <a:avLst>
@@ -32118,8 +31311,8 @@
         </p:nvSpPr>
         <p:spPr>
           <a:xfrm>
-            <a:off x="6428232" y="3364992"/>
-            <a:ext cx="1645920" cy="475488"/>
+            <a:off x="5230368" y="3364992"/>
+            <a:ext cx="1554480" cy="475488"/>
           </a:xfrm>
           <a:prstGeom prst="rect">
             <a:avLst/>
@@ -32143,6 +31336,111 @@
                 <a:ea typeface="Trebuchet MS" pitchFamily="34" charset="-122"/>
                 <a:cs typeface="Trebuchet MS" pitchFamily="34" charset="-120"/>
               </a:rPr>
+              <a:t>ri</a:t>
+            </a:r>
+            <a:endParaRPr lang="en-US" sz="1400" dirty="0"/>
+          </a:p>
+        </p:txBody>
+      </p:sp>
+      <p:sp>
+        <p:nvSpPr>
+          <p:cNvPr id="34" name="Text 32"/>
+          <p:cNvSpPr/>
+          <p:nvPr/>
+        </p:nvSpPr>
+        <p:spPr>
+          <a:xfrm>
+            <a:off x="6784848" y="3364992"/>
+            <a:ext cx="73152" cy="475488"/>
+          </a:xfrm>
+          <a:prstGeom prst="rect">
+            <a:avLst/>
+          </a:prstGeom>
+          <a:noFill/>
+          <a:ln/>
+        </p:spPr>
+        <p:txBody>
+          <a:bodyPr wrap="square" lIns="0" tIns="0" rIns="0" bIns="0" rtlCol="0" anchor="ctr"/>
+          <a:lstStyle/>
+          <a:p>
+            <a:pPr algn="ctr" indent="0" marL="0">
+              <a:buNone/>
+            </a:pPr>
+            <a:r>
+              <a:rPr lang="en-US" sz="1600" b="1" dirty="0">
+                <a:solidFill>
+                  <a:srgbClr val="0D9488"/>
+                </a:solidFill>
+                <a:latin typeface="Trebuchet MS" pitchFamily="34" charset="0"/>
+                <a:ea typeface="Trebuchet MS" pitchFamily="34" charset="-122"/>
+                <a:cs typeface="Trebuchet MS" pitchFamily="34" charset="-120"/>
+              </a:rPr>
+              <a:t>·</a:t>
+            </a:r>
+            <a:endParaRPr lang="en-US" sz="1600" dirty="0"/>
+          </a:p>
+        </p:txBody>
+      </p:sp>
+      <p:sp>
+        <p:nvSpPr>
+          <p:cNvPr id="35" name="Shape 33"/>
+          <p:cNvSpPr/>
+          <p:nvPr/>
+        </p:nvSpPr>
+        <p:spPr>
+          <a:xfrm>
+            <a:off x="6858000" y="3364992"/>
+            <a:ext cx="1554480" cy="475488"/>
+          </a:xfrm>
+          <a:prstGeom prst="rect">
+            <a:avLst>
+              <a:gd name="adj" fmla="val 9615"/>
+            </a:avLst>
+          </a:prstGeom>
+          <a:solidFill>
+            <a:srgbClr val="FFFFFF"/>
+          </a:solidFill>
+          <a:ln w="12700">
+            <a:solidFill>
+              <a:srgbClr val="0D9488"/>
+            </a:solidFill>
+            <a:prstDash val="solid"/>
+          </a:ln>
+        </p:spPr>
+      </p:sp>
+      <p:sp>
+        <p:nvSpPr>
+          <p:cNvPr id="36" name="Text 34"/>
+          <p:cNvSpPr/>
+          <p:nvPr/>
+        </p:nvSpPr>
+        <p:spPr>
+          <a:xfrm>
+            <a:off x="6858000" y="3364992"/>
+            <a:ext cx="1554480" cy="475488"/>
+          </a:xfrm>
+          <a:prstGeom prst="rect">
+            <a:avLst/>
+          </a:prstGeom>
+          <a:noFill/>
+          <a:ln/>
+        </p:spPr>
+        <p:txBody>
+          <a:bodyPr wrap="square" lIns="0" tIns="0" rIns="0" bIns="0" rtlCol="0" anchor="ctr"/>
+          <a:lstStyle/>
+          <a:p>
+            <a:pPr algn="ctr" indent="0" marL="0">
+              <a:buNone/>
+            </a:pPr>
+            <a:r>
+              <a:rPr lang="en-US" sz="1400" b="1" dirty="0">
+                <a:solidFill>
+                  <a:srgbClr val="0D9488"/>
+                </a:solidFill>
+                <a:latin typeface="Trebuchet MS" pitchFamily="34" charset="0"/>
+                <a:ea typeface="Trebuchet MS" pitchFamily="34" charset="-122"/>
+                <a:cs typeface="Trebuchet MS" pitchFamily="34" charset="-120"/>
+              </a:rPr>
               <a:t>ous</a:t>
             </a:r>
             <a:endParaRPr lang="en-US" sz="1400" dirty="0"/>
@@ -32151,7 +31449,7 @@
       </p:sp>
       <p:sp>
         <p:nvSpPr>
-          <p:cNvPr id="34" name="Shape 32"/>
+          <p:cNvPr id="37" name="Shape 35"/>
           <p:cNvSpPr/>
           <p:nvPr/>
         </p:nvSpPr>
@@ -32178,7 +31476,7 @@
       </p:sp>
       <p:sp>
         <p:nvSpPr>
-          <p:cNvPr id="35" name="Text 33"/>
+          <p:cNvPr id="38" name="Text 36"/>
           <p:cNvSpPr/>
           <p:nvPr/>
         </p:nvSpPr>
@@ -32217,7 +31515,7 @@
       </p:sp>
       <p:sp>
         <p:nvSpPr>
-          <p:cNvPr id="36" name="Shape 34"/>
+          <p:cNvPr id="39" name="Shape 37"/>
           <p:cNvSpPr/>
           <p:nvPr/>
         </p:nvSpPr>
@@ -32244,7 +31542,7 @@
       </p:sp>
       <p:sp>
         <p:nvSpPr>
-          <p:cNvPr id="37" name="Text 35"/>
+          <p:cNvPr id="40" name="Text 38"/>
           <p:cNvSpPr/>
           <p:nvPr/>
         </p:nvSpPr>
@@ -32706,7 +32004,7 @@
                 <a:ea typeface="Trebuchet MS" pitchFamily="34" charset="-122"/>
                 <a:cs typeface="Trebuchet MS" pitchFamily="34" charset="-120"/>
               </a:rPr>
-              <a:t>furious</a:t>
+              <a:t>mysterious</a:t>
             </a:r>
             <a:endParaRPr lang="en-US" sz="2800" dirty="0"/>
           </a:p>
@@ -32845,7 +32143,7 @@
                 <a:ea typeface="Trebuchet MS" pitchFamily="34" charset="-122"/>
                 <a:cs typeface="Trebuchet MS" pitchFamily="34" charset="-120"/>
               </a:rPr>
-              <a:t>furi</a:t>
+              <a:t>mysteri</a:t>
             </a:r>
             <a:endParaRPr lang="en-US" sz="1300" dirty="0"/>
           </a:p>
@@ -32884,7 +32182,7 @@
                 <a:ea typeface="Calibri" pitchFamily="34" charset="-122"/>
                 <a:cs typeface="Calibri" pitchFamily="34" charset="-120"/>
               </a:rPr>
-              <a:t>rage, fierce anger</a:t>
+              <a:t>mystery, secret</a:t>
             </a:r>
             <a:endParaRPr lang="en-US" sz="850" dirty="0"/>
           </a:p>
@@ -32996,7 +32294,7 @@
                 <a:ea typeface="Calibri" pitchFamily="34" charset="-122"/>
                 <a:cs typeface="Calibri" pitchFamily="34" charset="-120"/>
               </a:rPr>
-              <a:t>full of, having the quality of</a:t>
+              <a:t>full of, having quality</a:t>
             </a:r>
             <a:endParaRPr lang="en-US" sz="850" dirty="0"/>
           </a:p>
@@ -33035,7 +32333,7 @@
                 <a:ea typeface="Calibri" pitchFamily="34" charset="-122"/>
                 <a:cs typeface="Calibri" pitchFamily="34" charset="-120"/>
               </a:rPr>
-              <a:t>'-ious' simplified to '-ous' after 'i' in base</a:t>
+              <a:t>variant of -ious after vowel</a:t>
             </a:r>
             <a:endParaRPr lang="en-US" sz="700" dirty="0"/>
           </a:p>
@@ -33142,8 +32440,8 @@
         </p:nvSpPr>
         <p:spPr>
           <a:xfrm>
-            <a:off x="2313432" y="3364992"/>
-            <a:ext cx="1645920" cy="475488"/>
+            <a:off x="1975104" y="3364992"/>
+            <a:ext cx="1554480" cy="475488"/>
           </a:xfrm>
           <a:prstGeom prst="rect">
             <a:avLst>
@@ -33169,8 +32467,8 @@
         </p:nvSpPr>
         <p:spPr>
           <a:xfrm>
-            <a:off x="2313432" y="3364992"/>
-            <a:ext cx="1645920" cy="475488"/>
+            <a:off x="1975104" y="3364992"/>
+            <a:ext cx="1554480" cy="475488"/>
           </a:xfrm>
           <a:prstGeom prst="rect">
             <a:avLst/>
@@ -33194,7 +32492,7 @@
                 <a:ea typeface="Trebuchet MS" pitchFamily="34" charset="-122"/>
                 <a:cs typeface="Trebuchet MS" pitchFamily="34" charset="-120"/>
               </a:rPr>
-              <a:t>fu</a:t>
+              <a:t>mys</a:t>
             </a:r>
             <a:endParaRPr lang="en-US" sz="1400" dirty="0"/>
           </a:p>
@@ -33208,8 +32506,8 @@
         </p:nvSpPr>
         <p:spPr>
           <a:xfrm>
-            <a:off x="3959352" y="3364992"/>
-            <a:ext cx="411480" cy="475488"/>
+            <a:off x="3529584" y="3364992"/>
+            <a:ext cx="73152" cy="475488"/>
           </a:xfrm>
           <a:prstGeom prst="rect">
             <a:avLst/>
@@ -33247,8 +32545,8 @@
         </p:nvSpPr>
         <p:spPr>
           <a:xfrm>
-            <a:off x="4370832" y="3364992"/>
-            <a:ext cx="1645920" cy="475488"/>
+            <a:off x="3602736" y="3364992"/>
+            <a:ext cx="1554480" cy="475488"/>
           </a:xfrm>
           <a:prstGeom prst="rect">
             <a:avLst>
@@ -33274,8 +32572,8 @@
         </p:nvSpPr>
         <p:spPr>
           <a:xfrm>
-            <a:off x="4370832" y="3364992"/>
-            <a:ext cx="1645920" cy="475488"/>
+            <a:off x="3602736" y="3364992"/>
+            <a:ext cx="1554480" cy="475488"/>
           </a:xfrm>
           <a:prstGeom prst="rect">
             <a:avLst/>
@@ -33299,7 +32597,7 @@
                 <a:ea typeface="Trebuchet MS" pitchFamily="34" charset="-122"/>
                 <a:cs typeface="Trebuchet MS" pitchFamily="34" charset="-120"/>
               </a:rPr>
-              <a:t>ri</a:t>
+              <a:t>te</a:t>
             </a:r>
             <a:endParaRPr lang="en-US" sz="1400" dirty="0"/>
           </a:p>
@@ -33313,8 +32611,8 @@
         </p:nvSpPr>
         <p:spPr>
           <a:xfrm>
-            <a:off x="6016752" y="3364992"/>
-            <a:ext cx="411480" cy="475488"/>
+            <a:off x="5157216" y="3364992"/>
+            <a:ext cx="73152" cy="475488"/>
           </a:xfrm>
           <a:prstGeom prst="rect">
             <a:avLst/>
@@ -33352,8 +32650,8 @@
         </p:nvSpPr>
         <p:spPr>
           <a:xfrm>
-            <a:off x="6428232" y="3364992"/>
-            <a:ext cx="1645920" cy="475488"/>
+            <a:off x="5230368" y="3364992"/>
+            <a:ext cx="1554480" cy="475488"/>
           </a:xfrm>
           <a:prstGeom prst="rect">
             <a:avLst>
@@ -33379,8 +32677,8 @@
         </p:nvSpPr>
         <p:spPr>
           <a:xfrm>
-            <a:off x="6428232" y="3364992"/>
-            <a:ext cx="1645920" cy="475488"/>
+            <a:off x="5230368" y="3364992"/>
+            <a:ext cx="1554480" cy="475488"/>
           </a:xfrm>
           <a:prstGeom prst="rect">
             <a:avLst/>
@@ -33404,6 +32702,111 @@
                 <a:ea typeface="Trebuchet MS" pitchFamily="34" charset="-122"/>
                 <a:cs typeface="Trebuchet MS" pitchFamily="34" charset="-120"/>
               </a:rPr>
+              <a:t>ri</a:t>
+            </a:r>
+            <a:endParaRPr lang="en-US" sz="1400" dirty="0"/>
+          </a:p>
+        </p:txBody>
+      </p:sp>
+      <p:sp>
+        <p:nvSpPr>
+          <p:cNvPr id="34" name="Text 32"/>
+          <p:cNvSpPr/>
+          <p:nvPr/>
+        </p:nvSpPr>
+        <p:spPr>
+          <a:xfrm>
+            <a:off x="6784848" y="3364992"/>
+            <a:ext cx="73152" cy="475488"/>
+          </a:xfrm>
+          <a:prstGeom prst="rect">
+            <a:avLst/>
+          </a:prstGeom>
+          <a:noFill/>
+          <a:ln/>
+        </p:spPr>
+        <p:txBody>
+          <a:bodyPr wrap="square" lIns="0" tIns="0" rIns="0" bIns="0" rtlCol="0" anchor="ctr"/>
+          <a:lstStyle/>
+          <a:p>
+            <a:pPr algn="ctr" indent="0" marL="0">
+              <a:buNone/>
+            </a:pPr>
+            <a:r>
+              <a:rPr lang="en-US" sz="1600" b="1" dirty="0">
+                <a:solidFill>
+                  <a:srgbClr val="0D9488"/>
+                </a:solidFill>
+                <a:latin typeface="Trebuchet MS" pitchFamily="34" charset="0"/>
+                <a:ea typeface="Trebuchet MS" pitchFamily="34" charset="-122"/>
+                <a:cs typeface="Trebuchet MS" pitchFamily="34" charset="-120"/>
+              </a:rPr>
+              <a:t>·</a:t>
+            </a:r>
+            <a:endParaRPr lang="en-US" sz="1600" dirty="0"/>
+          </a:p>
+        </p:txBody>
+      </p:sp>
+      <p:sp>
+        <p:nvSpPr>
+          <p:cNvPr id="35" name="Shape 33"/>
+          <p:cNvSpPr/>
+          <p:nvPr/>
+        </p:nvSpPr>
+        <p:spPr>
+          <a:xfrm>
+            <a:off x="6858000" y="3364992"/>
+            <a:ext cx="1554480" cy="475488"/>
+          </a:xfrm>
+          <a:prstGeom prst="rect">
+            <a:avLst>
+              <a:gd name="adj" fmla="val 9615"/>
+            </a:avLst>
+          </a:prstGeom>
+          <a:solidFill>
+            <a:srgbClr val="FFFFFF"/>
+          </a:solidFill>
+          <a:ln w="12700">
+            <a:solidFill>
+              <a:srgbClr val="0D9488"/>
+            </a:solidFill>
+            <a:prstDash val="solid"/>
+          </a:ln>
+        </p:spPr>
+      </p:sp>
+      <p:sp>
+        <p:nvSpPr>
+          <p:cNvPr id="36" name="Text 34"/>
+          <p:cNvSpPr/>
+          <p:nvPr/>
+        </p:nvSpPr>
+        <p:spPr>
+          <a:xfrm>
+            <a:off x="6858000" y="3364992"/>
+            <a:ext cx="1554480" cy="475488"/>
+          </a:xfrm>
+          <a:prstGeom prst="rect">
+            <a:avLst/>
+          </a:prstGeom>
+          <a:noFill/>
+          <a:ln/>
+        </p:spPr>
+        <p:txBody>
+          <a:bodyPr wrap="square" lIns="0" tIns="0" rIns="0" bIns="0" rtlCol="0" anchor="ctr"/>
+          <a:lstStyle/>
+          <a:p>
+            <a:pPr algn="ctr" indent="0" marL="0">
+              <a:buNone/>
+            </a:pPr>
+            <a:r>
+              <a:rPr lang="en-US" sz="1400" b="1" dirty="0">
+                <a:solidFill>
+                  <a:srgbClr val="0D9488"/>
+                </a:solidFill>
+                <a:latin typeface="Trebuchet MS" pitchFamily="34" charset="0"/>
+                <a:ea typeface="Trebuchet MS" pitchFamily="34" charset="-122"/>
+                <a:cs typeface="Trebuchet MS" pitchFamily="34" charset="-120"/>
+              </a:rPr>
               <a:t>ous</a:t>
             </a:r>
             <a:endParaRPr lang="en-US" sz="1400" dirty="0"/>
@@ -33412,7 +32815,7 @@
       </p:sp>
       <p:sp>
         <p:nvSpPr>
-          <p:cNvPr id="34" name="Shape 32"/>
+          <p:cNvPr id="37" name="Shape 35"/>
           <p:cNvSpPr/>
           <p:nvPr/>
         </p:nvSpPr>
@@ -33439,7 +32842,7 @@
       </p:sp>
       <p:sp>
         <p:nvSpPr>
-          <p:cNvPr id="35" name="Text 33"/>
+          <p:cNvPr id="38" name="Text 36"/>
           <p:cNvSpPr/>
           <p:nvPr/>
         </p:nvSpPr>
@@ -33478,18 +32881,18 @@
       </p:sp>
       <p:sp>
         <p:nvSpPr>
-          <p:cNvPr id="36" name="Shape 34"/>
+          <p:cNvPr id="39" name="Shape 37"/>
           <p:cNvSpPr/>
           <p:nvPr/>
         </p:nvSpPr>
         <p:spPr>
           <a:xfrm>
             <a:off x="1874520" y="4096512"/>
-            <a:ext cx="6903720" cy="804672"/>
+            <a:ext cx="6903720" cy="658368"/>
           </a:xfrm>
           <a:prstGeom prst="rect">
             <a:avLst>
-              <a:gd name="adj" fmla="val 6818"/>
+              <a:gd name="adj" fmla="val 8333"/>
             </a:avLst>
           </a:prstGeom>
           <a:solidFill>
@@ -33505,18 +32908,18 @@
       </p:sp>
       <p:sp>
         <p:nvSpPr>
-          <p:cNvPr id="37" name="Shape 35"/>
-          <p:cNvSpPr/>
-          <p:nvPr/>
-        </p:nvSpPr>
-        <p:spPr>
-          <a:xfrm>
-            <a:off x="2427732" y="4169664"/>
-            <a:ext cx="685800" cy="384048"/>
+          <p:cNvPr id="40" name="Shape 38"/>
+          <p:cNvSpPr/>
+          <p:nvPr/>
+        </p:nvSpPr>
+        <p:spPr>
+          <a:xfrm>
+            <a:off x="1951330" y="4169664"/>
+            <a:ext cx="676656" cy="475488"/>
           </a:xfrm>
           <a:prstGeom prst="rect">
             <a:avLst>
-              <a:gd name="adj" fmla="val 9524"/>
+              <a:gd name="adj" fmla="val 7692"/>
             </a:avLst>
           </a:prstGeom>
           <a:solidFill>
@@ -33532,14 +32935,14 @@
       </p:sp>
       <p:sp>
         <p:nvSpPr>
-          <p:cNvPr id="38" name="Text 36"/>
-          <p:cNvSpPr/>
-          <p:nvPr/>
-        </p:nvSpPr>
-        <p:spPr>
-          <a:xfrm>
-            <a:off x="2427732" y="4169664"/>
-            <a:ext cx="685800" cy="384048"/>
+          <p:cNvPr id="41" name="Text 39"/>
+          <p:cNvSpPr/>
+          <p:nvPr/>
+        </p:nvSpPr>
+        <p:spPr>
+          <a:xfrm>
+            <a:off x="1951330" y="4169664"/>
+            <a:ext cx="676656" cy="475488"/>
           </a:xfrm>
           <a:prstGeom prst="rect">
             <a:avLst/>
@@ -33563,7 +32966,7 @@
                 <a:ea typeface="Trebuchet MS" pitchFamily="34" charset="-122"/>
                 <a:cs typeface="Trebuchet MS" pitchFamily="34" charset="-120"/>
               </a:rPr>
-              <a:t>f</a:t>
+              <a:t>m</a:t>
             </a:r>
             <a:endParaRPr lang="en-US" sz="900" dirty="0"/>
           </a:p>
@@ -33571,18 +32974,18 @@
       </p:sp>
       <p:sp>
         <p:nvSpPr>
-          <p:cNvPr id="39" name="Shape 37"/>
-          <p:cNvSpPr/>
-          <p:nvPr/>
-        </p:nvSpPr>
-        <p:spPr>
-          <a:xfrm>
-            <a:off x="3639312" y="4169664"/>
-            <a:ext cx="685800" cy="384048"/>
+          <p:cNvPr id="42" name="Shape 40"/>
+          <p:cNvSpPr/>
+          <p:nvPr/>
+        </p:nvSpPr>
+        <p:spPr>
+          <a:xfrm>
+            <a:off x="2677363" y="4169664"/>
+            <a:ext cx="676656" cy="475488"/>
           </a:xfrm>
           <a:prstGeom prst="rect">
             <a:avLst>
-              <a:gd name="adj" fmla="val 9524"/>
+              <a:gd name="adj" fmla="val 7692"/>
             </a:avLst>
           </a:prstGeom>
           <a:solidFill>
@@ -33598,14 +33001,14 @@
       </p:sp>
       <p:sp>
         <p:nvSpPr>
-          <p:cNvPr id="40" name="Text 38"/>
-          <p:cNvSpPr/>
-          <p:nvPr/>
-        </p:nvSpPr>
-        <p:spPr>
-          <a:xfrm>
-            <a:off x="3639312" y="4169664"/>
-            <a:ext cx="685800" cy="384048"/>
+          <p:cNvPr id="43" name="Text 41"/>
+          <p:cNvSpPr/>
+          <p:nvPr/>
+        </p:nvSpPr>
+        <p:spPr>
+          <a:xfrm>
+            <a:off x="2677363" y="4169664"/>
+            <a:ext cx="676656" cy="475488"/>
           </a:xfrm>
           <a:prstGeom prst="rect">
             <a:avLst/>
@@ -33629,7 +33032,7 @@
                 <a:ea typeface="Trebuchet MS" pitchFamily="34" charset="-122"/>
                 <a:cs typeface="Trebuchet MS" pitchFamily="34" charset="-120"/>
               </a:rPr>
-              <a:t>ur</a:t>
+              <a:t>y</a:t>
             </a:r>
             <a:endParaRPr lang="en-US" sz="900" dirty="0"/>
           </a:p>
@@ -33637,18 +33040,18 @@
       </p:sp>
       <p:sp>
         <p:nvSpPr>
-          <p:cNvPr id="41" name="Shape 39"/>
-          <p:cNvSpPr/>
-          <p:nvPr/>
-        </p:nvSpPr>
-        <p:spPr>
-          <a:xfrm>
-            <a:off x="4850892" y="4169664"/>
-            <a:ext cx="685800" cy="384048"/>
+          <p:cNvPr id="44" name="Shape 42"/>
+          <p:cNvSpPr/>
+          <p:nvPr/>
+        </p:nvSpPr>
+        <p:spPr>
+          <a:xfrm>
+            <a:off x="3403397" y="4169664"/>
+            <a:ext cx="676656" cy="475488"/>
           </a:xfrm>
           <a:prstGeom prst="rect">
             <a:avLst>
-              <a:gd name="adj" fmla="val 9524"/>
+              <a:gd name="adj" fmla="val 7692"/>
             </a:avLst>
           </a:prstGeom>
           <a:solidFill>
@@ -33664,14 +33067,14 @@
       </p:sp>
       <p:sp>
         <p:nvSpPr>
-          <p:cNvPr id="42" name="Text 40"/>
-          <p:cNvSpPr/>
-          <p:nvPr/>
-        </p:nvSpPr>
-        <p:spPr>
-          <a:xfrm>
-            <a:off x="4850892" y="4169664"/>
-            <a:ext cx="685800" cy="384048"/>
+          <p:cNvPr id="45" name="Text 43"/>
+          <p:cNvSpPr/>
+          <p:nvPr/>
+        </p:nvSpPr>
+        <p:spPr>
+          <a:xfrm>
+            <a:off x="3403397" y="4169664"/>
+            <a:ext cx="676656" cy="475488"/>
           </a:xfrm>
           <a:prstGeom prst="rect">
             <a:avLst/>
@@ -33695,7 +33098,7 @@
                 <a:ea typeface="Trebuchet MS" pitchFamily="34" charset="-122"/>
                 <a:cs typeface="Trebuchet MS" pitchFamily="34" charset="-120"/>
               </a:rPr>
-              <a:t>i</a:t>
+              <a:t>s</a:t>
             </a:r>
             <a:endParaRPr lang="en-US" sz="900" dirty="0"/>
           </a:p>
@@ -33703,18 +33106,18 @@
       </p:sp>
       <p:sp>
         <p:nvSpPr>
-          <p:cNvPr id="43" name="Shape 41"/>
-          <p:cNvSpPr/>
-          <p:nvPr/>
-        </p:nvSpPr>
-        <p:spPr>
-          <a:xfrm>
-            <a:off x="6062472" y="4169664"/>
-            <a:ext cx="685800" cy="384048"/>
+          <p:cNvPr id="46" name="Shape 44"/>
+          <p:cNvSpPr/>
+          <p:nvPr/>
+        </p:nvSpPr>
+        <p:spPr>
+          <a:xfrm>
+            <a:off x="4129430" y="4169664"/>
+            <a:ext cx="676656" cy="475488"/>
           </a:xfrm>
           <a:prstGeom prst="rect">
             <a:avLst>
-              <a:gd name="adj" fmla="val 9524"/>
+              <a:gd name="adj" fmla="val 7692"/>
             </a:avLst>
           </a:prstGeom>
           <a:solidFill>
@@ -33730,14 +33133,14 @@
       </p:sp>
       <p:sp>
         <p:nvSpPr>
-          <p:cNvPr id="44" name="Text 42"/>
-          <p:cNvSpPr/>
-          <p:nvPr/>
-        </p:nvSpPr>
-        <p:spPr>
-          <a:xfrm>
-            <a:off x="6062472" y="4169664"/>
-            <a:ext cx="685800" cy="384048"/>
+          <p:cNvPr id="47" name="Text 45"/>
+          <p:cNvSpPr/>
+          <p:nvPr/>
+        </p:nvSpPr>
+        <p:spPr>
+          <a:xfrm>
+            <a:off x="4129430" y="4169664"/>
+            <a:ext cx="676656" cy="475488"/>
           </a:xfrm>
           <a:prstGeom prst="rect">
             <a:avLst/>
@@ -33761,6 +33164,270 @@
                 <a:ea typeface="Trebuchet MS" pitchFamily="34" charset="-122"/>
                 <a:cs typeface="Trebuchet MS" pitchFamily="34" charset="-120"/>
               </a:rPr>
+              <a:t>t</a:t>
+            </a:r>
+            <a:endParaRPr lang="en-US" sz="900" dirty="0"/>
+          </a:p>
+        </p:txBody>
+      </p:sp>
+      <p:sp>
+        <p:nvSpPr>
+          <p:cNvPr id="48" name="Shape 46"/>
+          <p:cNvSpPr/>
+          <p:nvPr/>
+        </p:nvSpPr>
+        <p:spPr>
+          <a:xfrm>
+            <a:off x="4855464" y="4169664"/>
+            <a:ext cx="676656" cy="475488"/>
+          </a:xfrm>
+          <a:prstGeom prst="rect">
+            <a:avLst>
+              <a:gd name="adj" fmla="val 7692"/>
+            </a:avLst>
+          </a:prstGeom>
+          <a:solidFill>
+            <a:srgbClr val="FFFFFF"/>
+          </a:solidFill>
+          <a:ln w="12700">
+            <a:solidFill>
+              <a:srgbClr val="DB2777"/>
+            </a:solidFill>
+            <a:prstDash val="solid"/>
+          </a:ln>
+        </p:spPr>
+      </p:sp>
+      <p:sp>
+        <p:nvSpPr>
+          <p:cNvPr id="49" name="Text 47"/>
+          <p:cNvSpPr/>
+          <p:nvPr/>
+        </p:nvSpPr>
+        <p:spPr>
+          <a:xfrm>
+            <a:off x="4855464" y="4169664"/>
+            <a:ext cx="676656" cy="475488"/>
+          </a:xfrm>
+          <a:prstGeom prst="rect">
+            <a:avLst/>
+          </a:prstGeom>
+          <a:noFill/>
+          <a:ln/>
+        </p:spPr>
+        <p:txBody>
+          <a:bodyPr wrap="square" lIns="0" tIns="0" rIns="0" bIns="0" rtlCol="0" anchor="ctr"/>
+          <a:lstStyle/>
+          <a:p>
+            <a:pPr algn="ctr" indent="0" marL="0">
+              <a:buNone/>
+            </a:pPr>
+            <a:r>
+              <a:rPr lang="en-US" sz="900" b="1" dirty="0">
+                <a:solidFill>
+                  <a:srgbClr val="9D174D"/>
+                </a:solidFill>
+                <a:latin typeface="Trebuchet MS" pitchFamily="34" charset="0"/>
+                <a:ea typeface="Trebuchet MS" pitchFamily="34" charset="-122"/>
+                <a:cs typeface="Trebuchet MS" pitchFamily="34" charset="-120"/>
+              </a:rPr>
+              <a:t>e</a:t>
+            </a:r>
+            <a:endParaRPr lang="en-US" sz="900" dirty="0"/>
+          </a:p>
+        </p:txBody>
+      </p:sp>
+      <p:sp>
+        <p:nvSpPr>
+          <p:cNvPr id="50" name="Shape 48"/>
+          <p:cNvSpPr/>
+          <p:nvPr/>
+        </p:nvSpPr>
+        <p:spPr>
+          <a:xfrm>
+            <a:off x="5581498" y="4169664"/>
+            <a:ext cx="676656" cy="475488"/>
+          </a:xfrm>
+          <a:prstGeom prst="rect">
+            <a:avLst>
+              <a:gd name="adj" fmla="val 7692"/>
+            </a:avLst>
+          </a:prstGeom>
+          <a:solidFill>
+            <a:srgbClr val="FFFFFF"/>
+          </a:solidFill>
+          <a:ln w="12700">
+            <a:solidFill>
+              <a:srgbClr val="DB2777"/>
+            </a:solidFill>
+            <a:prstDash val="solid"/>
+          </a:ln>
+        </p:spPr>
+      </p:sp>
+      <p:sp>
+        <p:nvSpPr>
+          <p:cNvPr id="51" name="Text 49"/>
+          <p:cNvSpPr/>
+          <p:nvPr/>
+        </p:nvSpPr>
+        <p:spPr>
+          <a:xfrm>
+            <a:off x="5581498" y="4169664"/>
+            <a:ext cx="676656" cy="475488"/>
+          </a:xfrm>
+          <a:prstGeom prst="rect">
+            <a:avLst/>
+          </a:prstGeom>
+          <a:noFill/>
+          <a:ln/>
+        </p:spPr>
+        <p:txBody>
+          <a:bodyPr wrap="square" lIns="0" tIns="0" rIns="0" bIns="0" rtlCol="0" anchor="ctr"/>
+          <a:lstStyle/>
+          <a:p>
+            <a:pPr algn="ctr" indent="0" marL="0">
+              <a:buNone/>
+            </a:pPr>
+            <a:r>
+              <a:rPr lang="en-US" sz="900" b="1" dirty="0">
+                <a:solidFill>
+                  <a:srgbClr val="9D174D"/>
+                </a:solidFill>
+                <a:latin typeface="Trebuchet MS" pitchFamily="34" charset="0"/>
+                <a:ea typeface="Trebuchet MS" pitchFamily="34" charset="-122"/>
+                <a:cs typeface="Trebuchet MS" pitchFamily="34" charset="-120"/>
+              </a:rPr>
+              <a:t>r</a:t>
+            </a:r>
+            <a:endParaRPr lang="en-US" sz="900" dirty="0"/>
+          </a:p>
+        </p:txBody>
+      </p:sp>
+      <p:sp>
+        <p:nvSpPr>
+          <p:cNvPr id="52" name="Shape 50"/>
+          <p:cNvSpPr/>
+          <p:nvPr/>
+        </p:nvSpPr>
+        <p:spPr>
+          <a:xfrm>
+            <a:off x="6307531" y="4169664"/>
+            <a:ext cx="676656" cy="475488"/>
+          </a:xfrm>
+          <a:prstGeom prst="rect">
+            <a:avLst>
+              <a:gd name="adj" fmla="val 7692"/>
+            </a:avLst>
+          </a:prstGeom>
+          <a:solidFill>
+            <a:srgbClr val="FFFFFF"/>
+          </a:solidFill>
+          <a:ln w="12700">
+            <a:solidFill>
+              <a:srgbClr val="DB2777"/>
+            </a:solidFill>
+            <a:prstDash val="solid"/>
+          </a:ln>
+        </p:spPr>
+      </p:sp>
+      <p:sp>
+        <p:nvSpPr>
+          <p:cNvPr id="53" name="Text 51"/>
+          <p:cNvSpPr/>
+          <p:nvPr/>
+        </p:nvSpPr>
+        <p:spPr>
+          <a:xfrm>
+            <a:off x="6307531" y="4169664"/>
+            <a:ext cx="676656" cy="475488"/>
+          </a:xfrm>
+          <a:prstGeom prst="rect">
+            <a:avLst/>
+          </a:prstGeom>
+          <a:noFill/>
+          <a:ln/>
+        </p:spPr>
+        <p:txBody>
+          <a:bodyPr wrap="square" lIns="0" tIns="0" rIns="0" bIns="0" rtlCol="0" anchor="ctr"/>
+          <a:lstStyle/>
+          <a:p>
+            <a:pPr algn="ctr" indent="0" marL="0">
+              <a:buNone/>
+            </a:pPr>
+            <a:r>
+              <a:rPr lang="en-US" sz="900" b="1" dirty="0">
+                <a:solidFill>
+                  <a:srgbClr val="9D174D"/>
+                </a:solidFill>
+                <a:latin typeface="Trebuchet MS" pitchFamily="34" charset="0"/>
+                <a:ea typeface="Trebuchet MS" pitchFamily="34" charset="-122"/>
+                <a:cs typeface="Trebuchet MS" pitchFamily="34" charset="-120"/>
+              </a:rPr>
+              <a:t>i</a:t>
+            </a:r>
+            <a:endParaRPr lang="en-US" sz="900" dirty="0"/>
+          </a:p>
+        </p:txBody>
+      </p:sp>
+      <p:sp>
+        <p:nvSpPr>
+          <p:cNvPr id="54" name="Shape 52"/>
+          <p:cNvSpPr/>
+          <p:nvPr/>
+        </p:nvSpPr>
+        <p:spPr>
+          <a:xfrm>
+            <a:off x="7033565" y="4169664"/>
+            <a:ext cx="676656" cy="475488"/>
+          </a:xfrm>
+          <a:prstGeom prst="rect">
+            <a:avLst>
+              <a:gd name="adj" fmla="val 7692"/>
+            </a:avLst>
+          </a:prstGeom>
+          <a:solidFill>
+            <a:srgbClr val="FFFFFF"/>
+          </a:solidFill>
+          <a:ln w="12700">
+            <a:solidFill>
+              <a:srgbClr val="DB2777"/>
+            </a:solidFill>
+            <a:prstDash val="solid"/>
+          </a:ln>
+        </p:spPr>
+      </p:sp>
+      <p:sp>
+        <p:nvSpPr>
+          <p:cNvPr id="55" name="Text 53"/>
+          <p:cNvSpPr/>
+          <p:nvPr/>
+        </p:nvSpPr>
+        <p:spPr>
+          <a:xfrm>
+            <a:off x="7033565" y="4169664"/>
+            <a:ext cx="676656" cy="475488"/>
+          </a:xfrm>
+          <a:prstGeom prst="rect">
+            <a:avLst/>
+          </a:prstGeom>
+          <a:noFill/>
+          <a:ln/>
+        </p:spPr>
+        <p:txBody>
+          <a:bodyPr wrap="square" lIns="0" tIns="0" rIns="0" bIns="0" rtlCol="0" anchor="ctr"/>
+          <a:lstStyle/>
+          <a:p>
+            <a:pPr algn="ctr" indent="0" marL="0">
+              <a:buNone/>
+            </a:pPr>
+            <a:r>
+              <a:rPr lang="en-US" sz="900" b="1" dirty="0">
+                <a:solidFill>
+                  <a:srgbClr val="9D174D"/>
+                </a:solidFill>
+                <a:latin typeface="Trebuchet MS" pitchFamily="34" charset="0"/>
+                <a:ea typeface="Trebuchet MS" pitchFamily="34" charset="-122"/>
+                <a:cs typeface="Trebuchet MS" pitchFamily="34" charset="-120"/>
+              </a:rPr>
               <a:t>ou</a:t>
             </a:r>
             <a:endParaRPr lang="en-US" sz="900" dirty="0"/>
@@ -33769,57 +33436,18 @@
       </p:sp>
       <p:sp>
         <p:nvSpPr>
-          <p:cNvPr id="45" name="Text 43"/>
-          <p:cNvSpPr/>
-          <p:nvPr/>
-        </p:nvSpPr>
-        <p:spPr>
-          <a:xfrm>
-            <a:off x="6062472" y="4572000"/>
-            <a:ext cx="685800" cy="219456"/>
-          </a:xfrm>
-          <a:prstGeom prst="rect">
-            <a:avLst/>
-          </a:prstGeom>
-          <a:noFill/>
-          <a:ln/>
-        </p:spPr>
-        <p:txBody>
-          <a:bodyPr wrap="square" lIns="0" tIns="0" rIns="0" bIns="0" rtlCol="0" anchor="t"/>
-          <a:lstStyle/>
-          <a:p>
-            <a:pPr algn="ctr" indent="0" marL="0">
-              <a:buNone/>
-            </a:pPr>
-            <a:r>
-              <a:rPr lang="en-US" sz="750" i="1" dirty="0">
-                <a:solidFill>
-                  <a:srgbClr val="94A3B8"/>
-                </a:solidFill>
-                <a:latin typeface="Calibri" pitchFamily="34" charset="0"/>
-                <a:ea typeface="Calibri" pitchFamily="34" charset="-122"/>
-                <a:cs typeface="Calibri" pitchFamily="34" charset="-120"/>
-              </a:rPr>
-              <a:t>/u/</a:t>
-            </a:r>
-            <a:endParaRPr lang="en-US" sz="750" dirty="0"/>
-          </a:p>
-        </p:txBody>
-      </p:sp>
-      <p:sp>
-        <p:nvSpPr>
-          <p:cNvPr id="46" name="Shape 44"/>
-          <p:cNvSpPr/>
-          <p:nvPr/>
-        </p:nvSpPr>
-        <p:spPr>
-          <a:xfrm>
-            <a:off x="7274052" y="4169664"/>
-            <a:ext cx="685800" cy="384048"/>
+          <p:cNvPr id="56" name="Shape 54"/>
+          <p:cNvSpPr/>
+          <p:nvPr/>
+        </p:nvSpPr>
+        <p:spPr>
+          <a:xfrm>
+            <a:off x="7759598" y="4169664"/>
+            <a:ext cx="676656" cy="475488"/>
           </a:xfrm>
           <a:prstGeom prst="rect">
             <a:avLst>
-              <a:gd name="adj" fmla="val 9524"/>
+              <a:gd name="adj" fmla="val 7692"/>
             </a:avLst>
           </a:prstGeom>
           <a:solidFill>
@@ -33835,14 +33463,14 @@
       </p:sp>
       <p:sp>
         <p:nvSpPr>
-          <p:cNvPr id="47" name="Text 45"/>
-          <p:cNvSpPr/>
-          <p:nvPr/>
-        </p:nvSpPr>
-        <p:spPr>
-          <a:xfrm>
-            <a:off x="7274052" y="4169664"/>
-            <a:ext cx="685800" cy="384048"/>
+          <p:cNvPr id="57" name="Text 55"/>
+          <p:cNvSpPr/>
+          <p:nvPr/>
+        </p:nvSpPr>
+        <p:spPr>
+          <a:xfrm>
+            <a:off x="7759598" y="4169664"/>
+            <a:ext cx="676656" cy="475488"/>
           </a:xfrm>
           <a:prstGeom prst="rect">
             <a:avLst/>
@@ -35884,7 +35512,7 @@
                 <a:ea typeface="Trebuchet MS" pitchFamily="34" charset="-122"/>
                 <a:cs typeface="Trebuchet MS" pitchFamily="34" charset="-120"/>
               </a:rPr>
-              <a:t>glob</a:t>
+              <a:t>study</a:t>
             </a:r>
             <a:endParaRPr lang="en-US" sz="1300" dirty="0"/>
           </a:p>
@@ -35973,7 +35601,7 @@
                 <a:ea typeface="Trebuchet MS" pitchFamily="34" charset="-122"/>
                 <a:cs typeface="Trebuchet MS" pitchFamily="34" charset="-120"/>
               </a:rPr>
-              <a:t>in-</a:t>
+              <a:t>un-</a:t>
             </a:r>
             <a:endParaRPr lang="en-US" sz="1300" dirty="0"/>
           </a:p>
@@ -36037,7 +35665,7 @@
                 <a:ea typeface="Trebuchet MS" pitchFamily="34" charset="-122"/>
                 <a:cs typeface="Trebuchet MS" pitchFamily="34" charset="-120"/>
               </a:rPr>
-              <a:t>stud</a:t>
+              <a:t>grace</a:t>
             </a:r>
             <a:endParaRPr lang="en-US" sz="1300" dirty="0"/>
           </a:p>
@@ -36126,7 +35754,7 @@
                 <a:ea typeface="Trebuchet MS" pitchFamily="34" charset="-122"/>
                 <a:cs typeface="Trebuchet MS" pitchFamily="34" charset="-120"/>
               </a:rPr>
-              <a:t>sub-</a:t>
+              <a:t>in-</a:t>
             </a:r>
             <a:endParaRPr lang="en-US" sz="1300" dirty="0"/>
           </a:p>
@@ -36190,7 +35818,7 @@
                 <a:ea typeface="Trebuchet MS" pitchFamily="34" charset="-122"/>
                 <a:cs typeface="Trebuchet MS" pitchFamily="34" charset="-120"/>
               </a:rPr>
-              <a:t>vict</a:t>
+              <a:t>glory</a:t>
             </a:r>
             <a:endParaRPr lang="en-US" sz="1300" dirty="0"/>
           </a:p>
@@ -36279,7 +35907,7 @@
                 <a:ea typeface="Trebuchet MS" pitchFamily="34" charset="-122"/>
                 <a:cs typeface="Trebuchet MS" pitchFamily="34" charset="-120"/>
               </a:rPr>
-              <a:t>un-</a:t>
+              <a:t>super-</a:t>
             </a:r>
             <a:endParaRPr lang="en-US" sz="1300" dirty="0"/>
           </a:p>
@@ -36539,7 +36167,7 @@
                 <a:ea typeface="Trebuchet MS" pitchFamily="34" charset="-122"/>
                 <a:cs typeface="Trebuchet MS" pitchFamily="34" charset="-120"/>
               </a:rPr>
-              <a:t>serious</a:t>
+              <a:t>furious</a:t>
             </a:r>
             <a:endParaRPr lang="en-US" sz="1200" dirty="0"/>
           </a:p>
@@ -36605,7 +36233,7 @@
                 <a:ea typeface="Trebuchet MS" pitchFamily="34" charset="-122"/>
                 <a:cs typeface="Trebuchet MS" pitchFamily="34" charset="-120"/>
               </a:rPr>
-              <a:t>victorious</a:t>
+              <a:t>serious</a:t>
             </a:r>
             <a:endParaRPr lang="en-US" sz="1200" dirty="0"/>
           </a:p>
@@ -36671,7 +36299,7 @@
                 <a:ea typeface="Trebuchet MS" pitchFamily="34" charset="-122"/>
                 <a:cs typeface="Trebuchet MS" pitchFamily="34" charset="-120"/>
               </a:rPr>
-              <a:t>studious</a:t>
+              <a:t>glorious</a:t>
             </a:r>
             <a:endParaRPr lang="en-US" sz="1200" dirty="0"/>
           </a:p>
@@ -36737,7 +36365,7 @@
                 <a:ea typeface="Trebuchet MS" pitchFamily="34" charset="-122"/>
                 <a:cs typeface="Trebuchet MS" pitchFamily="34" charset="-120"/>
               </a:rPr>
-              <a:t>ambitious</a:t>
+              <a:t>mysterious</a:t>
             </a:r>
             <a:endParaRPr lang="en-US" sz="1200" dirty="0"/>
           </a:p>
@@ -36869,7 +36497,7 @@
                 <a:ea typeface="Trebuchet MS" pitchFamily="34" charset="-122"/>
                 <a:cs typeface="Trebuchet MS" pitchFamily="34" charset="-120"/>
               </a:rPr>
-              <a:t>furious</a:t>
+              <a:t>ambitious</a:t>
             </a:r>
             <a:endParaRPr lang="en-US" sz="1200" dirty="0"/>
           </a:p>
@@ -36935,7 +36563,7 @@
                 <a:ea typeface="Trebuchet MS" pitchFamily="34" charset="-122"/>
                 <a:cs typeface="Trebuchet MS" pitchFamily="34" charset="-120"/>
               </a:rPr>
-              <a:t>famous</a:t>
+              <a:t>infectious</a:t>
             </a:r>
             <a:endParaRPr lang="en-US" sz="1200" dirty="0"/>
           </a:p>
@@ -37719,7 +37347,7 @@
                 <a:ea typeface="Calibri" pitchFamily="34" charset="-122"/>
                 <a:cs typeface="Calibri" pitchFamily="34" charset="-120"/>
               </a:rPr>
-              <a:t>A meaningful word part added to the beginning of a root to change its meaning. E.g. 'un-' in 'serious' means 'not'.</a:t>
+              <a:t>A meaningful word part added to the beginning of a root to change its meaning. E.g. 'un-' in 'furious' means 'not'.</a:t>
             </a:r>
             <a:endParaRPr lang="en-US" sz="1350" dirty="0"/>
           </a:p>
@@ -38123,7 +37751,7 @@
                 <a:ea typeface="Calibri" pitchFamily="34" charset="-122"/>
                 <a:cs typeface="Calibri" pitchFamily="34" charset="-120"/>
               </a:rPr>
-              <a:t>1.  The suffix '-ious' turns a base word into an adjective (describing word).</a:t>
+              <a:t>1.  The suffix '-ious' comes from Latin.</a:t>
             </a:r>
             <a:endParaRPr lang="en-US" sz="1300" dirty="0"/>
           </a:p>
@@ -38262,7 +37890,7 @@
                 <a:ea typeface="Calibri" pitchFamily="34" charset="-122"/>
                 <a:cs typeface="Calibri" pitchFamily="34" charset="-120"/>
               </a:rPr>
-              <a:t>2.  The suffix '-ious' means 'without' or 'not having'.</a:t>
+              <a:t>2.  The word 'curious' contains the suffix '-ious'.</a:t>
             </a:r>
             <a:endParaRPr lang="en-US" sz="1300" dirty="0"/>
           </a:p>
@@ -38285,11 +37913,11 @@
             </a:avLst>
           </a:prstGeom>
           <a:solidFill>
-            <a:srgbClr val="FEE2E2"/>
-          </a:solidFill>
-          <a:ln w="12700">
-            <a:solidFill>
-              <a:srgbClr val="DC2626"/>
+            <a:srgbClr val="DCFCE7"/>
+          </a:solidFill>
+          <a:ln w="12700">
+            <a:solidFill>
+              <a:srgbClr val="16A34A"/>
             </a:solidFill>
             <a:prstDash val="solid"/>
           </a:ln>
@@ -38322,13 +37950,13 @@
             <a:r>
               <a:rPr lang="en-US" sz="1100" b="1" dirty="0">
                 <a:solidFill>
-                  <a:srgbClr val="DC2626"/>
+                  <a:srgbClr val="16A34A"/>
                 </a:solidFill>
                 <a:latin typeface="Trebuchet MS" pitchFamily="34" charset="0"/>
                 <a:ea typeface="Trebuchet MS" pitchFamily="34" charset="-122"/>
                 <a:cs typeface="Trebuchet MS" pitchFamily="34" charset="-120"/>
               </a:rPr>
-              <a:t>FALSE</a:t>
+              <a:t>TRUE</a:t>
             </a:r>
             <a:endParaRPr lang="en-US" sz="1100" dirty="0"/>
           </a:p>
@@ -38401,7 +38029,7 @@
                 <a:ea typeface="Calibri" pitchFamily="34" charset="-122"/>
                 <a:cs typeface="Calibri" pitchFamily="34" charset="-120"/>
               </a:rPr>
-              <a:t>3.  The word 'curious' contains the suffix '-ious'.</a:t>
+              <a:t>3.  The suffix '-ious' turns a base word into an adjective.</a:t>
             </a:r>
             <a:endParaRPr lang="en-US" sz="1300" dirty="0"/>
           </a:p>
@@ -38540,7 +38168,7 @@
                 <a:ea typeface="Calibri" pitchFamily="34" charset="-122"/>
                 <a:cs typeface="Calibri" pitchFamily="34" charset="-120"/>
               </a:rPr>
-              <a:t>4.  Words ending in '-ious' describe a person, place, or thing as having a quality.</a:t>
+              <a:t>4.  The suffix '-ious' means 'without' or 'lacking'.</a:t>
             </a:r>
             <a:endParaRPr lang="en-US" sz="1300" dirty="0"/>
           </a:p>
@@ -38563,11 +38191,11 @@
             </a:avLst>
           </a:prstGeom>
           <a:solidFill>
-            <a:srgbClr val="DCFCE7"/>
-          </a:solidFill>
-          <a:ln w="12700">
-            <a:solidFill>
-              <a:srgbClr val="16A34A"/>
+            <a:srgbClr val="FEE2E2"/>
+          </a:solidFill>
+          <a:ln w="12700">
+            <a:solidFill>
+              <a:srgbClr val="DC2626"/>
             </a:solidFill>
             <a:prstDash val="solid"/>
           </a:ln>
@@ -38600,13 +38228,13 @@
             <a:r>
               <a:rPr lang="en-US" sz="1100" b="1" dirty="0">
                 <a:solidFill>
-                  <a:srgbClr val="16A34A"/>
+                  <a:srgbClr val="DC2626"/>
                 </a:solidFill>
                 <a:latin typeface="Trebuchet MS" pitchFamily="34" charset="0"/>
                 <a:ea typeface="Trebuchet MS" pitchFamily="34" charset="-122"/>
                 <a:cs typeface="Trebuchet MS" pitchFamily="34" charset="-120"/>
               </a:rPr>
-              <a:t>TRUE</a:t>
+              <a:t>FALSE</a:t>
             </a:r>
             <a:endParaRPr lang="en-US" sz="1100" dirty="0"/>
           </a:p>
@@ -38679,7 +38307,7 @@
                 <a:ea typeface="Calibri" pitchFamily="34" charset="-122"/>
                 <a:cs typeface="Calibri" pitchFamily="34" charset="-120"/>
               </a:rPr>
-              <a:t>5.  The suffix '-ious' can only be added to words from Old English.</a:t>
+              <a:t>5.  Words ending in '-ious' always describe actions, not qualities.</a:t>
             </a:r>
             <a:endParaRPr lang="en-US" sz="1300" dirty="0"/>
           </a:p>
@@ -39384,7 +39012,7 @@
                 <a:ea typeface="Trebuchet MS" pitchFamily="34" charset="-122"/>
                 <a:cs typeface="Trebuchet MS" pitchFamily="34" charset="-120"/>
               </a:rPr>
-              <a:t>serious</a:t>
+              <a:t>furious</a:t>
             </a:r>
             <a:endParaRPr lang="en-US" sz="1300" dirty="0"/>
           </a:p>
@@ -39450,7 +39078,7 @@
                 <a:ea typeface="Trebuchet MS" pitchFamily="34" charset="-122"/>
                 <a:cs typeface="Trebuchet MS" pitchFamily="34" charset="-120"/>
               </a:rPr>
-              <a:t>victorious</a:t>
+              <a:t>serious</a:t>
             </a:r>
             <a:endParaRPr lang="en-US" sz="1300" dirty="0"/>
           </a:p>
@@ -39516,7 +39144,7 @@
                 <a:ea typeface="Trebuchet MS" pitchFamily="34" charset="-122"/>
                 <a:cs typeface="Trebuchet MS" pitchFamily="34" charset="-120"/>
               </a:rPr>
-              <a:t>studious</a:t>
+              <a:t>glorious</a:t>
             </a:r>
             <a:endParaRPr lang="en-US" sz="1300" dirty="0"/>
           </a:p>
@@ -39582,7 +39210,7 @@
                 <a:ea typeface="Trebuchet MS" pitchFamily="34" charset="-122"/>
                 <a:cs typeface="Trebuchet MS" pitchFamily="34" charset="-120"/>
               </a:rPr>
-              <a:t>ambitious</a:t>
+              <a:t>mysterious</a:t>
             </a:r>
             <a:endParaRPr lang="en-US" sz="1300" dirty="0"/>
           </a:p>
@@ -39714,7 +39342,7 @@
                 <a:ea typeface="Trebuchet MS" pitchFamily="34" charset="-122"/>
                 <a:cs typeface="Trebuchet MS" pitchFamily="34" charset="-120"/>
               </a:rPr>
-              <a:t>furious</a:t>
+              <a:t>ambitious</a:t>
             </a:r>
             <a:endParaRPr lang="en-US" sz="1300" dirty="0"/>
           </a:p>
@@ -40563,7 +40191,7 @@
                 <a:ea typeface="Trebuchet MS" pitchFamily="34" charset="-122"/>
                 <a:cs typeface="Trebuchet MS" pitchFamily="34" charset="-120"/>
               </a:rPr>
-              <a:t>glob</a:t>
+              <a:t>study</a:t>
             </a:r>
             <a:endParaRPr lang="en-US" sz="1300" dirty="0"/>
           </a:p>
@@ -40652,7 +40280,7 @@
                 <a:ea typeface="Trebuchet MS" pitchFamily="34" charset="-122"/>
                 <a:cs typeface="Trebuchet MS" pitchFamily="34" charset="-120"/>
               </a:rPr>
-              <a:t>in-</a:t>
+              <a:t>un-</a:t>
             </a:r>
             <a:endParaRPr lang="en-US" sz="1300" dirty="0"/>
           </a:p>
@@ -40716,7 +40344,7 @@
                 <a:ea typeface="Trebuchet MS" pitchFamily="34" charset="-122"/>
                 <a:cs typeface="Trebuchet MS" pitchFamily="34" charset="-120"/>
               </a:rPr>
-              <a:t>stud</a:t>
+              <a:t>grace</a:t>
             </a:r>
             <a:endParaRPr lang="en-US" sz="1300" dirty="0"/>
           </a:p>
@@ -40805,7 +40433,7 @@
                 <a:ea typeface="Trebuchet MS" pitchFamily="34" charset="-122"/>
                 <a:cs typeface="Trebuchet MS" pitchFamily="34" charset="-120"/>
               </a:rPr>
-              <a:t>sub-</a:t>
+              <a:t>in-</a:t>
             </a:r>
             <a:endParaRPr lang="en-US" sz="1300" dirty="0"/>
           </a:p>
@@ -40869,7 +40497,7 @@
                 <a:ea typeface="Trebuchet MS" pitchFamily="34" charset="-122"/>
                 <a:cs typeface="Trebuchet MS" pitchFamily="34" charset="-120"/>
               </a:rPr>
-              <a:t>vict</a:t>
+              <a:t>glory</a:t>
             </a:r>
             <a:endParaRPr lang="en-US" sz="1300" dirty="0"/>
           </a:p>
@@ -40958,7 +40586,7 @@
                 <a:ea typeface="Trebuchet MS" pitchFamily="34" charset="-122"/>
                 <a:cs typeface="Trebuchet MS" pitchFamily="34" charset="-120"/>
               </a:rPr>
-              <a:t>un-</a:t>
+              <a:t>super-</a:t>
             </a:r>
             <a:endParaRPr lang="en-US" sz="1300" dirty="0"/>
           </a:p>
@@ -41958,7 +41586,7 @@
                 <a:ea typeface="Calibri" pitchFamily="34" charset="-122"/>
                 <a:cs typeface="Calibri" pitchFamily="34" charset="-120"/>
               </a:rPr>
-              <a:t>Extremely angry.</a:t>
+              <a:t>Having a strong wish to succeed or achieve great things.</a:t>
             </a:r>
             <a:endParaRPr lang="en-US" sz="1200" dirty="0"/>
           </a:p>
@@ -42031,7 +41659,7 @@
                 <a:ea typeface="Trebuchet MS" pitchFamily="34" charset="-122"/>
                 <a:cs typeface="Trebuchet MS" pitchFamily="34" charset="-120"/>
               </a:rPr>
-              <a:t>serious</a:t>
+              <a:t>furious</a:t>
             </a:r>
             <a:endParaRPr lang="en-US" sz="1200" dirty="0"/>
           </a:p>
@@ -42097,7 +41725,7 @@
                 <a:ea typeface="Calibri" pitchFamily="34" charset="-122"/>
                 <a:cs typeface="Calibri" pitchFamily="34" charset="-120"/>
               </a:rPr>
-              <a:t>Eager to learn or find out about something.</a:t>
+              <a:t>Wanting to find out and learn about things.</a:t>
             </a:r>
             <a:endParaRPr lang="en-US" sz="1200" dirty="0"/>
           </a:p>
@@ -42170,7 +41798,7 @@
                 <a:ea typeface="Trebuchet MS" pitchFamily="34" charset="-122"/>
                 <a:cs typeface="Trebuchet MS" pitchFamily="34" charset="-120"/>
               </a:rPr>
-              <a:t>victorious</a:t>
+              <a:t>serious</a:t>
             </a:r>
             <a:endParaRPr lang="en-US" sz="1200" dirty="0"/>
           </a:p>
@@ -42236,7 +41864,7 @@
                 <a:ea typeface="Calibri" pitchFamily="34" charset="-122"/>
                 <a:cs typeface="Calibri" pitchFamily="34" charset="-120"/>
               </a:rPr>
-              <a:t>Spending a lot of time studying and learning.</a:t>
+              <a:t>Wonderful and full of beauty or great achievement.</a:t>
             </a:r>
             <a:endParaRPr lang="en-US" sz="1200" dirty="0"/>
           </a:p>
@@ -42309,7 +41937,7 @@
                 <a:ea typeface="Trebuchet MS" pitchFamily="34" charset="-122"/>
                 <a:cs typeface="Trebuchet MS" pitchFamily="34" charset="-120"/>
               </a:rPr>
-              <a:t>studious</a:t>
+              <a:t>glorious</a:t>
             </a:r>
             <a:endParaRPr lang="en-US" sz="1200" dirty="0"/>
           </a:p>
@@ -42375,7 +42003,7 @@
                 <a:ea typeface="Calibri" pitchFamily="34" charset="-122"/>
                 <a:cs typeface="Calibri" pitchFamily="34" charset="-120"/>
               </a:rPr>
-              <a:t>Having a strong wish to succeed or achieve something big.</a:t>
+              <a:t>Strange and difficult to explain or understand.</a:t>
             </a:r>
             <a:endParaRPr lang="en-US" sz="1200" dirty="0"/>
           </a:p>
@@ -42448,7 +42076,7 @@
                 <a:ea typeface="Trebuchet MS" pitchFamily="34" charset="-122"/>
                 <a:cs typeface="Trebuchet MS" pitchFamily="34" charset="-120"/>
               </a:rPr>
-              <a:t>ambitious</a:t>
+              <a:t>mysterious</a:t>
             </a:r>
             <a:endParaRPr lang="en-US" sz="1200" dirty="0"/>
           </a:p>
@@ -42653,7 +42281,7 @@
                 <a:ea typeface="Calibri" pitchFamily="34" charset="-122"/>
                 <a:cs typeface="Calibri" pitchFamily="34" charset="-120"/>
               </a:rPr>
-              <a:t>Having won a game, battle, or competition.</a:t>
+              <a:t>Important and needing careful thought; not joking.</a:t>
             </a:r>
             <a:endParaRPr lang="en-US" sz="1200" dirty="0"/>
           </a:p>
@@ -42726,7 +42354,7 @@
                 <a:ea typeface="Trebuchet MS" pitchFamily="34" charset="-122"/>
                 <a:cs typeface="Trebuchet MS" pitchFamily="34" charset="-120"/>
               </a:rPr>
-              <a:t>furious</a:t>
+              <a:t>ambitious</a:t>
             </a:r>
             <a:endParaRPr lang="en-US" sz="1200" dirty="0"/>
           </a:p>
@@ -42792,7 +42420,7 @@
                 <a:ea typeface="Calibri" pitchFamily="34" charset="-122"/>
                 <a:cs typeface="Calibri" pitchFamily="34" charset="-120"/>
               </a:rPr>
-              <a:t>Important or not silly; meaning what you say.</a:t>
+              <a:t>Extremely angry.</a:t>
             </a:r>
             <a:endParaRPr lang="en-US" sz="1200" dirty="0"/>
           </a:p>
@@ -43287,7 +42915,7 @@
                 <a:ea typeface="Calibri" pitchFamily="34" charset="-122"/>
                 <a:cs typeface="Calibri" pitchFamily="34" charset="-120"/>
               </a:rPr>
-              <a:t>The curious puppy sniffed every corner of the garden.</a:t>
+              <a:t>The curious cat crept slowly towards the mysterious box in the corner of the room.</a:t>
             </a:r>
             <a:endParaRPr lang="en-US" sz="1500" dirty="0"/>
           </a:p>
@@ -43451,7 +43079,7 @@
                 <a:ea typeface="Calibri" pitchFamily="34" charset="-122"/>
                 <a:cs typeface="Calibri" pitchFamily="34" charset="-120"/>
               </a:rPr>
-              <a:t>She felt victorious after winning the swimming race at school.</a:t>
+              <a:t>She was furious when she found out her brother had eaten the last piece of cake.</a:t>
             </a:r>
             <a:endParaRPr lang="en-US" sz="1500" dirty="0"/>
           </a:p>
@@ -43615,7 +43243,7 @@
                 <a:ea typeface="Calibri" pitchFamily="34" charset="-122"/>
                 <a:cs typeface="Calibri" pitchFamily="34" charset="-120"/>
               </a:rPr>
-              <a:t>The teacher gave the class a serious look before the test began.</a:t>
+              <a:t>The glorious sunrise painted the sky in shades of orange, pink, and gold.</a:t>
             </a:r>
             <a:endParaRPr lang="en-US" sz="1500" dirty="0"/>
           </a:p>
